--- a/docs/ai-built-tools-process.pptx
+++ b/docs/ai-built-tools-process.pptx
@@ -15,9 +15,10 @@
     <p:sldId id="263" r:id="rId9"/>
     <p:sldId id="264" r:id="rId10"/>
     <p:sldId id="265" r:id="rId11"/>
+    <p:sldId id="266" r:id="rId12"/>
   </p:sldIdLst>
   <p:notesMasterIdLst>
-    <p:notesMasterId r:id="rId12"/>
+    <p:notesMasterId r:id="rId13"/>
   </p:notesMasterIdLst>
   <p:sldSz cx="12192000" cy="6858000"/>
   <p:notesSz cx="6858000" cy="12192000"/>
@@ -116,30 +117,31 @@
   <p:extLst>
     <p:ext uri="{521415D9-36F7-43E2-AB2F-B90AF26B5E84}">
       <p14:sectionLst xmlns:p14="http://schemas.microsoft.com/office/powerpoint/2010/main">
-        <p14:section name="導入" id="{56a40f13-6d7d-f1cc-e65f-16a4dff7f9b5}">
+        <p14:section name="導入" id="{9f06d225-3c2f-85eb-91fd-62ffbe827449}">
           <p14:sldIdLst>
             <p14:sldId id="256"/>
             <p14:sldId id="257"/>
           </p14:sldIdLst>
         </p14:section>
-        <p14:section name="工程" id="{bf6fb4ab-1792-defa-ab82-fd8a42956d9e}">
+        <p14:section name="工程" id="{4a8239ad-b855-700c-12b9-a8133757f982}">
           <p14:sldIdLst>
             <p14:sldId id="258"/>
             <p14:sldId id="259"/>
             <p14:sldId id="260"/>
             <p14:sldId id="261"/>
+            <p14:sldId id="262"/>
           </p14:sldIdLst>
         </p14:section>
-        <p14:section name="結果" id="{0ea1dde6-b1d4-dbc8-a53e-8e7d4518c5dc}">
+        <p14:section name="結果" id="{37ec8711-8cd7-c687-160f-3fd22523fb97}">
           <p14:sldIdLst>
-            <p14:sldId id="262"/>
             <p14:sldId id="263"/>
+            <p14:sldId id="264"/>
           </p14:sldIdLst>
         </p14:section>
-        <p14:section name="まとめ" id="{dcc2c076-a3ee-58a2-8fe1-8a89eeb7e288}">
+        <p14:section name="まとめ" id="{e76955b7-6d85-f3e3-0e7e-9b16009b85c7}">
           <p14:sldIdLst>
-            <p14:sldId id="264"/>
             <p14:sldId id="265"/>
+            <p14:sldId id="266"/>
           </p14:sldIdLst>
         </p14:section>
       </p14:sectionLst>
@@ -1009,7 +1011,7 @@
           <a:p>
             <a:r>
               <a:rPr lang="en-US" dirty="0"/>
-              <a:t>公開するときは、この 4 点を確認します。残りの作業は、docs/remaining-tasks.ja.md に、まとめてあります。</a:t>
+              <a:t>今日も、PowerShell 用のコマンドを WSL に貼ってしまう場面がありました。どこで実行するかを、毎回明記してもらうと、防げます。</a:t>
             </a:r>
             <a:endParaRPr lang="en-US" dirty="0"/>
           </a:p>
@@ -1033,6 +1035,94 @@
             <a:fld id="{F7021451-1387-4CA6-816F-3879F97B5CBC}" type="slidenum">
               <a:rPr lang="en-US"/>
               <a:t>10</a:t>
+            </a:fld>
+            <a:endParaRPr lang="en-US"/>
+          </a:p>
+        </p:txBody>
+      </p:sp>
+    </p:spTree>
+    <p:extLst>
+      <p:ext uri="{BB962C8B-B14F-4D97-AF65-F5344CB8AC3E}">
+        <p14:creationId xmlns:p14="http://schemas.microsoft.com/office/powerpoint/2010/main" val="1024086991"/>
+      </p:ext>
+    </p:extLst>
+  </p:cSld>
+  <p:clrMapOvr>
+    <a:masterClrMapping/>
+  </p:clrMapOvr>
+</p:notes>
+</file>
+
+<file path=ppt/notesSlides/notesSlide11.xml><?xml version="1.0" encoding="utf-8"?>
+<p:notes xmlns:a="http://schemas.openxmlformats.org/drawingml/2006/main" xmlns:r="http://schemas.openxmlformats.org/officeDocument/2006/relationships" xmlns:p="http://schemas.openxmlformats.org/presentationml/2006/main">
+  <p:cSld>
+    <p:spTree>
+      <p:nvGrpSpPr>
+        <p:cNvPr id="1" name=""/>
+        <p:cNvGrpSpPr/>
+        <p:nvPr/>
+      </p:nvGrpSpPr>
+      <p:grpSpPr>
+        <a:xfrm>
+          <a:off x="0" y="0"/>
+          <a:ext cx="0" cy="0"/>
+          <a:chOff x="0" y="0"/>
+          <a:chExt cx="0" cy="0"/>
+        </a:xfrm>
+      </p:grpSpPr>
+      <p:sp>
+        <p:nvSpPr>
+          <p:cNvPr id="2" name="Slide Image Placeholder 1"/>
+          <p:cNvSpPr>
+            <a:spLocks noGrp="1" noRot="1" noChangeAspect="1"/>
+          </p:cNvSpPr>
+          <p:nvPr>
+            <p:ph type="sldImg"/>
+          </p:nvPr>
+        </p:nvSpPr>
+        <p:spPr/>
+      </p:sp>
+      <p:sp>
+        <p:nvSpPr>
+          <p:cNvPr id="3" name="Notes Placeholder 2"/>
+          <p:cNvSpPr>
+            <a:spLocks noGrp="1"/>
+          </p:cNvSpPr>
+          <p:nvPr>
+            <p:ph type="body" idx="1"/>
+          </p:nvPr>
+        </p:nvSpPr>
+        <p:spPr/>
+        <p:txBody>
+          <a:bodyPr/>
+          <a:lstStyle/>
+          <a:p>
+            <a:r>
+              <a:rPr lang="en-US" dirty="0"/>
+              <a:t>公開するときは、この 4 点を確認します。残りの作業は、docs/remaining-tasks.ja.md に、まとめてあります。</a:t>
+            </a:r>
+            <a:endParaRPr lang="en-US" dirty="0"/>
+          </a:p>
+        </p:txBody>
+      </p:sp>
+      <p:sp>
+        <p:nvSpPr>
+          <p:cNvPr id="4" name="Slide Number Placeholder 3"/>
+          <p:cNvSpPr>
+            <a:spLocks noGrp="1"/>
+          </p:cNvSpPr>
+          <p:nvPr>
+            <p:ph type="sldNum" sz="quarter" idx="10"/>
+          </p:nvPr>
+        </p:nvSpPr>
+        <p:spPr/>
+        <p:txBody>
+          <a:bodyPr/>
+          <a:lstStyle/>
+          <a:p>
+            <a:fld id="{F7021451-1387-4CA6-816F-3879F97B5CBC}" type="slidenum">
+              <a:rPr lang="en-US"/>
+              <a:t>11</a:t>
             </a:fld>
             <a:endParaRPr lang="en-US"/>
           </a:p>
@@ -1361,7 +1451,7 @@
           <a:p>
             <a:r>
               <a:rPr lang="en-US" dirty="0"/>
-              <a:t>1 つの道具が、実通信で見つかった問題を直しながら育っていった例です。22 件が実は 11 件だった、という発見は、PC で動かして初めて分かりました。</a:t>
+              <a:t>このセッションの作業の大部分は、クラウドの Ubuntu の作業環境で行いました。apt で dotnet を入れ、uv・poetry・go と合わせて、本物のロックファイルを作れました。一方、外部 API には届かないので、通信を拒否されたときの動作(終了コード 2)を、わざと確認しました。pkill -f が自分のシェルを止めた、import os の抜けに気づいた、といった不具合も、ここで見つかりました。</a:t>
             </a:r>
             <a:endParaRPr lang="en-US" dirty="0"/>
           </a:p>
@@ -1449,7 +1539,7 @@
           <a:p>
             <a:r>
               <a:rPr lang="en-US" dirty="0"/>
-              <a:t>手で作った『それらしいファイル』では見つからない問題が、本物のファイルでは見つかりました。例えば .csproj の [3.1.1] の読み方です。</a:t>
+              <a:t>1 つの道具が、実通信で見つかった問題を直しながら育っていった例です。22 件が実は 11 件だった、という発見は、PC で動かして初めて分かりました。</a:t>
             </a:r>
             <a:endParaRPr lang="en-US" dirty="0"/>
           </a:p>
@@ -1537,7 +1627,7 @@
           <a:p>
             <a:r>
               <a:rPr lang="en-US" dirty="0"/>
-              <a:t>どれも、コードを読むだけでは気づきにくいものでした。動かして、出力を見て、初めて分かりました。</a:t>
+              <a:t>手で作った『それらしいファイル』では見つからない問題が、本物のファイルでは見つかりました。例えば .csproj の [3.1.1] の読み方です。</a:t>
             </a:r>
             <a:endParaRPr lang="en-US" dirty="0"/>
           </a:p>
@@ -1625,7 +1715,7 @@
           <a:p>
             <a:r>
               <a:rPr lang="en-US" dirty="0"/>
-              <a:t>同じモデル、同じコードで、2 回実行しました。結果が変わっています。打ち消されたのは、/file のパストラバーサルです。1 回の結果で、AI を使うほうが良いとは言えません。5 回の実行は、集計中です。</a:t>
+              <a:t>どれも、コードを読むだけでは気づきにくいものでした。動かして、出力を見て、初めて分かりました。</a:t>
             </a:r>
             <a:endParaRPr lang="en-US" dirty="0"/>
           </a:p>
@@ -1713,7 +1803,7 @@
           <a:p>
             <a:r>
               <a:rPr lang="en-US" dirty="0"/>
-              <a:t>今日も、PowerShell 用のコマンドを WSL に貼ってしまう場面がありました。どこで実行するかを、毎回明記してもらうと、防げます。</a:t>
+              <a:t>同じモデル、同じコードで、2 回実行しました。結果が変わっています。打ち消されたのは、/file のパストラバーサルです。1 回の結果で、AI を使うほうが良いとは言えません。5 回の実行は、集計中です。</a:t>
             </a:r>
             <a:endParaRPr lang="en-US" dirty="0"/>
           </a:p>
@@ -2661,6 +2751,892 @@
       </p:grpSpPr>
       <p:sp>
         <p:nvSpPr>
+          <p:cNvPr id="2" name="Text 0"/>
+          <p:cNvSpPr/>
+          <p:nvPr>
+            <p:ph idx="100" type="title" hasCustomPrompt="1"/>
+          </p:nvPr>
+        </p:nvSpPr>
+        <p:spPr>
+          <a:xfrm>
+            <a:off x="548640" y="365760"/>
+            <a:ext cx="11064240" cy="822960"/>
+          </a:xfrm>
+          <a:prstGeom prst="rect">
+            <a:avLst/>
+          </a:prstGeom>
+          <a:noFill/>
+          <a:ln/>
+        </p:spPr>
+        <p:txBody>
+          <a:bodyPr wrap="square" lIns="0" tIns="0" rIns="0" bIns="0" rtlCol="0" anchor="ctr"/>
+          <a:lstStyle/>
+          <a:p>
+            <a:pPr algn="l" indent="0" marL="0">
+              <a:buNone/>
+            </a:pPr>
+            <a:r>
+              <a:rPr lang="en-US" sz="3400" b="1" dirty="0">
+                <a:solidFill>
+                  <a:schemeClr val="tx2"/>
+                </a:solidFill>
+              </a:rPr>
+              <a:t>AI との進め方</a:t>
+            </a:r>
+            <a:endParaRPr lang="en-US" sz="3400" dirty="0"/>
+          </a:p>
+        </p:txBody>
+      </p:sp>
+      <p:sp>
+        <p:nvSpPr>
+          <p:cNvPr id="3" name="手順の円 1"/>
+          <p:cNvSpPr/>
+          <p:nvPr/>
+        </p:nvSpPr>
+        <p:spPr>
+          <a:xfrm>
+            <a:off x="548640" y="1527048"/>
+            <a:ext cx="502920" cy="502920"/>
+          </a:xfrm>
+          <a:prstGeom prst="ellipse">
+            <a:avLst/>
+          </a:prstGeom>
+          <a:solidFill>
+            <a:schemeClr val="accent1"/>
+          </a:solidFill>
+          <a:ln/>
+        </p:spPr>
+      </p:sp>
+      <p:sp>
+        <p:nvSpPr>
+          <p:cNvPr id="4" name="Text 2"/>
+          <p:cNvSpPr txBox="1"/>
+          <p:nvPr/>
+        </p:nvSpPr>
+        <p:spPr>
+          <a:xfrm>
+            <a:off x="548640" y="1527048"/>
+            <a:ext cx="502920" cy="502920"/>
+          </a:xfrm>
+          <a:prstGeom prst="rect">
+            <a:avLst/>
+          </a:prstGeom>
+          <a:noFill/>
+          <a:ln/>
+        </p:spPr>
+        <p:txBody>
+          <a:bodyPr wrap="square" lIns="0" tIns="0" rIns="0" bIns="0" rtlCol="0" anchor="ctr"/>
+          <a:lstStyle/>
+          <a:p>
+            <a:pPr algn="ctr" indent="0" marL="0">
+              <a:buNone/>
+            </a:pPr>
+            <a:r>
+              <a:rPr lang="en-US" sz="1600" b="1" dirty="0">
+                <a:solidFill>
+                  <a:schemeClr val="bg1"/>
+                </a:solidFill>
+                <a:latin typeface="Yu Gothic" pitchFamily="34" charset="0"/>
+                <a:ea typeface="Yu Gothic" pitchFamily="34" charset="-122"/>
+                <a:cs typeface="Yu Gothic" pitchFamily="34" charset="-120"/>
+              </a:rPr>
+              <a:t>1</a:t>
+            </a:r>
+            <a:endParaRPr lang="en-US" sz="1600" dirty="0"/>
+          </a:p>
+        </p:txBody>
+      </p:sp>
+      <p:sp>
+        <p:nvSpPr>
+          <p:cNvPr id="5" name="Text 3"/>
+          <p:cNvSpPr txBox="1"/>
+          <p:nvPr/>
+        </p:nvSpPr>
+        <p:spPr>
+          <a:xfrm>
+            <a:off x="1280160" y="1463040"/>
+            <a:ext cx="5669280" cy="640080"/>
+          </a:xfrm>
+          <a:prstGeom prst="rect">
+            <a:avLst/>
+          </a:prstGeom>
+          <a:noFill/>
+          <a:ln/>
+        </p:spPr>
+        <p:txBody>
+          <a:bodyPr wrap="square" lIns="0" tIns="0" rIns="0" bIns="0" rtlCol="0" anchor="ctr"/>
+          <a:lstStyle/>
+          <a:p>
+            <a:pPr indent="0" marL="0">
+              <a:buNone/>
+            </a:pPr>
+            <a:r>
+              <a:rPr lang="en-US" sz="1600" dirty="0">
+                <a:solidFill>
+                  <a:schemeClr val="tx1"/>
+                </a:solidFill>
+                <a:latin typeface="Yu Gothic" pitchFamily="34" charset="0"/>
+                <a:ea typeface="Yu Gothic" pitchFamily="34" charset="-122"/>
+                <a:cs typeface="Yu Gothic" pitchFamily="34" charset="-120"/>
+              </a:rPr>
+              <a:t>目的を伝える</a:t>
+            </a:r>
+            <a:endParaRPr lang="en-US" sz="1600" dirty="0"/>
+          </a:p>
+        </p:txBody>
+      </p:sp>
+      <p:sp>
+        <p:nvSpPr>
+          <p:cNvPr id="6" name="手順の円 2"/>
+          <p:cNvSpPr/>
+          <p:nvPr/>
+        </p:nvSpPr>
+        <p:spPr>
+          <a:xfrm>
+            <a:off x="548640" y="2304288"/>
+            <a:ext cx="502920" cy="502920"/>
+          </a:xfrm>
+          <a:prstGeom prst="ellipse">
+            <a:avLst/>
+          </a:prstGeom>
+          <a:solidFill>
+            <a:schemeClr val="accent1"/>
+          </a:solidFill>
+          <a:ln/>
+        </p:spPr>
+      </p:sp>
+      <p:sp>
+        <p:nvSpPr>
+          <p:cNvPr id="7" name="Text 5"/>
+          <p:cNvSpPr txBox="1"/>
+          <p:nvPr/>
+        </p:nvSpPr>
+        <p:spPr>
+          <a:xfrm>
+            <a:off x="548640" y="2304288"/>
+            <a:ext cx="502920" cy="502920"/>
+          </a:xfrm>
+          <a:prstGeom prst="rect">
+            <a:avLst/>
+          </a:prstGeom>
+          <a:noFill/>
+          <a:ln/>
+        </p:spPr>
+        <p:txBody>
+          <a:bodyPr wrap="square" lIns="0" tIns="0" rIns="0" bIns="0" rtlCol="0" anchor="ctr"/>
+          <a:lstStyle/>
+          <a:p>
+            <a:pPr algn="ctr" indent="0" marL="0">
+              <a:buNone/>
+            </a:pPr>
+            <a:r>
+              <a:rPr lang="en-US" sz="1600" b="1" dirty="0">
+                <a:solidFill>
+                  <a:schemeClr val="bg1"/>
+                </a:solidFill>
+                <a:latin typeface="Yu Gothic" pitchFamily="34" charset="0"/>
+                <a:ea typeface="Yu Gothic" pitchFamily="34" charset="-122"/>
+                <a:cs typeface="Yu Gothic" pitchFamily="34" charset="-120"/>
+              </a:rPr>
+              <a:t>2</a:t>
+            </a:r>
+            <a:endParaRPr lang="en-US" sz="1600" dirty="0"/>
+          </a:p>
+        </p:txBody>
+      </p:sp>
+      <p:sp>
+        <p:nvSpPr>
+          <p:cNvPr id="8" name="Text 6"/>
+          <p:cNvSpPr txBox="1"/>
+          <p:nvPr/>
+        </p:nvSpPr>
+        <p:spPr>
+          <a:xfrm>
+            <a:off x="1280160" y="2240280"/>
+            <a:ext cx="5669280" cy="640080"/>
+          </a:xfrm>
+          <a:prstGeom prst="rect">
+            <a:avLst/>
+          </a:prstGeom>
+          <a:noFill/>
+          <a:ln/>
+        </p:spPr>
+        <p:txBody>
+          <a:bodyPr wrap="square" lIns="0" tIns="0" rIns="0" bIns="0" rtlCol="0" anchor="ctr"/>
+          <a:lstStyle/>
+          <a:p>
+            <a:pPr indent="0" marL="0">
+              <a:buNone/>
+            </a:pPr>
+            <a:r>
+              <a:rPr lang="en-US" sz="1600" dirty="0">
+                <a:solidFill>
+                  <a:schemeClr val="tx1"/>
+                </a:solidFill>
+                <a:latin typeface="Yu Gothic" pitchFamily="34" charset="0"/>
+                <a:ea typeface="Yu Gothic" pitchFamily="34" charset="-122"/>
+                <a:cs typeface="Yu Gothic" pitchFamily="34" charset="-120"/>
+              </a:rPr>
+              <a:t>AI が、コードとドキュメントを読んで調べる</a:t>
+            </a:r>
+            <a:endParaRPr lang="en-US" sz="1600" dirty="0"/>
+          </a:p>
+        </p:txBody>
+      </p:sp>
+      <p:sp>
+        <p:nvSpPr>
+          <p:cNvPr id="9" name="手順の円 3"/>
+          <p:cNvSpPr/>
+          <p:nvPr/>
+        </p:nvSpPr>
+        <p:spPr>
+          <a:xfrm>
+            <a:off x="548640" y="3081528"/>
+            <a:ext cx="502920" cy="502920"/>
+          </a:xfrm>
+          <a:prstGeom prst="ellipse">
+            <a:avLst/>
+          </a:prstGeom>
+          <a:solidFill>
+            <a:schemeClr val="accent1"/>
+          </a:solidFill>
+          <a:ln/>
+        </p:spPr>
+      </p:sp>
+      <p:sp>
+        <p:nvSpPr>
+          <p:cNvPr id="10" name="Text 8"/>
+          <p:cNvSpPr txBox="1"/>
+          <p:nvPr/>
+        </p:nvSpPr>
+        <p:spPr>
+          <a:xfrm>
+            <a:off x="548640" y="3081528"/>
+            <a:ext cx="502920" cy="502920"/>
+          </a:xfrm>
+          <a:prstGeom prst="rect">
+            <a:avLst/>
+          </a:prstGeom>
+          <a:noFill/>
+          <a:ln/>
+        </p:spPr>
+        <p:txBody>
+          <a:bodyPr wrap="square" lIns="0" tIns="0" rIns="0" bIns="0" rtlCol="0" anchor="ctr"/>
+          <a:lstStyle/>
+          <a:p>
+            <a:pPr algn="ctr" indent="0" marL="0">
+              <a:buNone/>
+            </a:pPr>
+            <a:r>
+              <a:rPr lang="en-US" sz="1600" b="1" dirty="0">
+                <a:solidFill>
+                  <a:schemeClr val="bg1"/>
+                </a:solidFill>
+                <a:latin typeface="Yu Gothic" pitchFamily="34" charset="0"/>
+                <a:ea typeface="Yu Gothic" pitchFamily="34" charset="-122"/>
+                <a:cs typeface="Yu Gothic" pitchFamily="34" charset="-120"/>
+              </a:rPr>
+              <a:t>3</a:t>
+            </a:r>
+            <a:endParaRPr lang="en-US" sz="1600" dirty="0"/>
+          </a:p>
+        </p:txBody>
+      </p:sp>
+      <p:sp>
+        <p:nvSpPr>
+          <p:cNvPr id="11" name="Text 9"/>
+          <p:cNvSpPr txBox="1"/>
+          <p:nvPr/>
+        </p:nvSpPr>
+        <p:spPr>
+          <a:xfrm>
+            <a:off x="1280160" y="3017520"/>
+            <a:ext cx="5669280" cy="640080"/>
+          </a:xfrm>
+          <a:prstGeom prst="rect">
+            <a:avLst/>
+          </a:prstGeom>
+          <a:noFill/>
+          <a:ln/>
+        </p:spPr>
+        <p:txBody>
+          <a:bodyPr wrap="square" lIns="0" tIns="0" rIns="0" bIns="0" rtlCol="0" anchor="ctr"/>
+          <a:lstStyle/>
+          <a:p>
+            <a:pPr indent="0" marL="0">
+              <a:buNone/>
+            </a:pPr>
+            <a:r>
+              <a:rPr lang="en-US" sz="1600" dirty="0">
+                <a:solidFill>
+                  <a:schemeClr val="tx1"/>
+                </a:solidFill>
+                <a:latin typeface="Yu Gothic" pitchFamily="34" charset="0"/>
+                <a:ea typeface="Yu Gothic" pitchFamily="34" charset="-122"/>
+                <a:cs typeface="Yu Gothic" pitchFamily="34" charset="-120"/>
+              </a:rPr>
+              <a:t>小さく実装して、作業環境で動かす</a:t>
+            </a:r>
+            <a:endParaRPr lang="en-US" sz="1600" dirty="0"/>
+          </a:p>
+        </p:txBody>
+      </p:sp>
+      <p:sp>
+        <p:nvSpPr>
+          <p:cNvPr id="12" name="手順の円 4"/>
+          <p:cNvSpPr/>
+          <p:nvPr/>
+        </p:nvSpPr>
+        <p:spPr>
+          <a:xfrm>
+            <a:off x="548640" y="3858768"/>
+            <a:ext cx="502920" cy="502920"/>
+          </a:xfrm>
+          <a:prstGeom prst="ellipse">
+            <a:avLst/>
+          </a:prstGeom>
+          <a:solidFill>
+            <a:schemeClr val="accent1"/>
+          </a:solidFill>
+          <a:ln/>
+        </p:spPr>
+      </p:sp>
+      <p:sp>
+        <p:nvSpPr>
+          <p:cNvPr id="13" name="Text 11"/>
+          <p:cNvSpPr txBox="1"/>
+          <p:nvPr/>
+        </p:nvSpPr>
+        <p:spPr>
+          <a:xfrm>
+            <a:off x="548640" y="3858768"/>
+            <a:ext cx="502920" cy="502920"/>
+          </a:xfrm>
+          <a:prstGeom prst="rect">
+            <a:avLst/>
+          </a:prstGeom>
+          <a:noFill/>
+          <a:ln/>
+        </p:spPr>
+        <p:txBody>
+          <a:bodyPr wrap="square" lIns="0" tIns="0" rIns="0" bIns="0" rtlCol="0" anchor="ctr"/>
+          <a:lstStyle/>
+          <a:p>
+            <a:pPr algn="ctr" indent="0" marL="0">
+              <a:buNone/>
+            </a:pPr>
+            <a:r>
+              <a:rPr lang="en-US" sz="1600" b="1" dirty="0">
+                <a:solidFill>
+                  <a:schemeClr val="bg1"/>
+                </a:solidFill>
+                <a:latin typeface="Yu Gothic" pitchFamily="34" charset="0"/>
+                <a:ea typeface="Yu Gothic" pitchFamily="34" charset="-122"/>
+                <a:cs typeface="Yu Gothic" pitchFamily="34" charset="-120"/>
+              </a:rPr>
+              <a:t>4</a:t>
+            </a:r>
+            <a:endParaRPr lang="en-US" sz="1600" dirty="0"/>
+          </a:p>
+        </p:txBody>
+      </p:sp>
+      <p:sp>
+        <p:nvSpPr>
+          <p:cNvPr id="14" name="Text 12"/>
+          <p:cNvSpPr txBox="1"/>
+          <p:nvPr/>
+        </p:nvSpPr>
+        <p:spPr>
+          <a:xfrm>
+            <a:off x="1280160" y="3794760"/>
+            <a:ext cx="5669280" cy="640080"/>
+          </a:xfrm>
+          <a:prstGeom prst="rect">
+            <a:avLst/>
+          </a:prstGeom>
+          <a:noFill/>
+          <a:ln/>
+        </p:spPr>
+        <p:txBody>
+          <a:bodyPr wrap="square" lIns="0" tIns="0" rIns="0" bIns="0" rtlCol="0" anchor="ctr"/>
+          <a:lstStyle/>
+          <a:p>
+            <a:pPr indent="0" marL="0">
+              <a:buNone/>
+            </a:pPr>
+            <a:r>
+              <a:rPr lang="en-US" sz="1600" dirty="0">
+                <a:solidFill>
+                  <a:schemeClr val="tx1"/>
+                </a:solidFill>
+                <a:latin typeface="Yu Gothic" pitchFamily="34" charset="0"/>
+                <a:ea typeface="Yu Gothic" pitchFamily="34" charset="-122"/>
+                <a:cs typeface="Yu Gothic" pitchFamily="34" charset="-120"/>
+              </a:rPr>
+              <a:t>PC や Actions で、実通信を確認する(出力を貼る)</a:t>
+            </a:r>
+            <a:endParaRPr lang="en-US" sz="1600" dirty="0"/>
+          </a:p>
+        </p:txBody>
+      </p:sp>
+      <p:sp>
+        <p:nvSpPr>
+          <p:cNvPr id="15" name="手順の円 5"/>
+          <p:cNvSpPr/>
+          <p:nvPr/>
+        </p:nvSpPr>
+        <p:spPr>
+          <a:xfrm>
+            <a:off x="548640" y="4636008"/>
+            <a:ext cx="502920" cy="502920"/>
+          </a:xfrm>
+          <a:prstGeom prst="ellipse">
+            <a:avLst/>
+          </a:prstGeom>
+          <a:solidFill>
+            <a:schemeClr val="accent1"/>
+          </a:solidFill>
+          <a:ln/>
+        </p:spPr>
+      </p:sp>
+      <p:sp>
+        <p:nvSpPr>
+          <p:cNvPr id="16" name="Text 14"/>
+          <p:cNvSpPr txBox="1"/>
+          <p:nvPr/>
+        </p:nvSpPr>
+        <p:spPr>
+          <a:xfrm>
+            <a:off x="548640" y="4636008"/>
+            <a:ext cx="502920" cy="502920"/>
+          </a:xfrm>
+          <a:prstGeom prst="rect">
+            <a:avLst/>
+          </a:prstGeom>
+          <a:noFill/>
+          <a:ln/>
+        </p:spPr>
+        <p:txBody>
+          <a:bodyPr wrap="square" lIns="0" tIns="0" rIns="0" bIns="0" rtlCol="0" anchor="ctr"/>
+          <a:lstStyle/>
+          <a:p>
+            <a:pPr algn="ctr" indent="0" marL="0">
+              <a:buNone/>
+            </a:pPr>
+            <a:r>
+              <a:rPr lang="en-US" sz="1600" b="1" dirty="0">
+                <a:solidFill>
+                  <a:schemeClr val="bg1"/>
+                </a:solidFill>
+                <a:latin typeface="Yu Gothic" pitchFamily="34" charset="0"/>
+                <a:ea typeface="Yu Gothic" pitchFamily="34" charset="-122"/>
+                <a:cs typeface="Yu Gothic" pitchFamily="34" charset="-120"/>
+              </a:rPr>
+              <a:t>5</a:t>
+            </a:r>
+            <a:endParaRPr lang="en-US" sz="1600" dirty="0"/>
+          </a:p>
+        </p:txBody>
+      </p:sp>
+      <p:sp>
+        <p:nvSpPr>
+          <p:cNvPr id="17" name="Text 15"/>
+          <p:cNvSpPr txBox="1"/>
+          <p:nvPr/>
+        </p:nvSpPr>
+        <p:spPr>
+          <a:xfrm>
+            <a:off x="1280160" y="4572000"/>
+            <a:ext cx="5669280" cy="640080"/>
+          </a:xfrm>
+          <a:prstGeom prst="rect">
+            <a:avLst/>
+          </a:prstGeom>
+          <a:noFill/>
+          <a:ln/>
+        </p:spPr>
+        <p:txBody>
+          <a:bodyPr wrap="square" lIns="0" tIns="0" rIns="0" bIns="0" rtlCol="0" anchor="ctr"/>
+          <a:lstStyle/>
+          <a:p>
+            <a:pPr indent="0" marL="0">
+              <a:buNone/>
+            </a:pPr>
+            <a:r>
+              <a:rPr lang="en-US" sz="1600" dirty="0">
+                <a:solidFill>
+                  <a:schemeClr val="tx1"/>
+                </a:solidFill>
+                <a:latin typeface="Yu Gothic" pitchFamily="34" charset="0"/>
+                <a:ea typeface="Yu Gothic" pitchFamily="34" charset="-122"/>
+                <a:cs typeface="Yu Gothic" pitchFamily="34" charset="-120"/>
+              </a:rPr>
+              <a:t>AI が出力を読んで、不具合を直す</a:t>
+            </a:r>
+            <a:endParaRPr lang="en-US" sz="1600" dirty="0"/>
+          </a:p>
+        </p:txBody>
+      </p:sp>
+      <p:sp>
+        <p:nvSpPr>
+          <p:cNvPr id="18" name="手順の円 6"/>
+          <p:cNvSpPr/>
+          <p:nvPr/>
+        </p:nvSpPr>
+        <p:spPr>
+          <a:xfrm>
+            <a:off x="548640" y="5413248"/>
+            <a:ext cx="502920" cy="502920"/>
+          </a:xfrm>
+          <a:prstGeom prst="ellipse">
+            <a:avLst/>
+          </a:prstGeom>
+          <a:solidFill>
+            <a:schemeClr val="accent1"/>
+          </a:solidFill>
+          <a:ln/>
+        </p:spPr>
+      </p:sp>
+      <p:sp>
+        <p:nvSpPr>
+          <p:cNvPr id="19" name="Text 17"/>
+          <p:cNvSpPr txBox="1"/>
+          <p:nvPr/>
+        </p:nvSpPr>
+        <p:spPr>
+          <a:xfrm>
+            <a:off x="548640" y="5413248"/>
+            <a:ext cx="502920" cy="502920"/>
+          </a:xfrm>
+          <a:prstGeom prst="rect">
+            <a:avLst/>
+          </a:prstGeom>
+          <a:noFill/>
+          <a:ln/>
+        </p:spPr>
+        <p:txBody>
+          <a:bodyPr wrap="square" lIns="0" tIns="0" rIns="0" bIns="0" rtlCol="0" anchor="ctr"/>
+          <a:lstStyle/>
+          <a:p>
+            <a:pPr algn="ctr" indent="0" marL="0">
+              <a:buNone/>
+            </a:pPr>
+            <a:r>
+              <a:rPr lang="en-US" sz="1600" b="1" dirty="0">
+                <a:solidFill>
+                  <a:schemeClr val="bg1"/>
+                </a:solidFill>
+                <a:latin typeface="Yu Gothic" pitchFamily="34" charset="0"/>
+                <a:ea typeface="Yu Gothic" pitchFamily="34" charset="-122"/>
+                <a:cs typeface="Yu Gothic" pitchFamily="34" charset="-120"/>
+              </a:rPr>
+              <a:t>6</a:t>
+            </a:r>
+            <a:endParaRPr lang="en-US" sz="1600" dirty="0"/>
+          </a:p>
+        </p:txBody>
+      </p:sp>
+      <p:sp>
+        <p:nvSpPr>
+          <p:cNvPr id="20" name="Text 18"/>
+          <p:cNvSpPr txBox="1"/>
+          <p:nvPr/>
+        </p:nvSpPr>
+        <p:spPr>
+          <a:xfrm>
+            <a:off x="1280160" y="5349240"/>
+            <a:ext cx="5669280" cy="640080"/>
+          </a:xfrm>
+          <a:prstGeom prst="rect">
+            <a:avLst/>
+          </a:prstGeom>
+          <a:noFill/>
+          <a:ln/>
+        </p:spPr>
+        <p:txBody>
+          <a:bodyPr wrap="square" lIns="0" tIns="0" rIns="0" bIns="0" rtlCol="0" anchor="ctr"/>
+          <a:lstStyle/>
+          <a:p>
+            <a:pPr indent="0" marL="0">
+              <a:buNone/>
+            </a:pPr>
+            <a:r>
+              <a:rPr lang="en-US" sz="1600" dirty="0">
+                <a:solidFill>
+                  <a:schemeClr val="tx1"/>
+                </a:solidFill>
+                <a:latin typeface="Yu Gothic" pitchFamily="34" charset="0"/>
+                <a:ea typeface="Yu Gothic" pitchFamily="34" charset="-122"/>
+                <a:cs typeface="Yu Gothic" pitchFamily="34" charset="-120"/>
+              </a:rPr>
+              <a:t>確認できたことと未確認を、ノートと PR に残す</a:t>
+            </a:r>
+            <a:endParaRPr lang="en-US" sz="1600" dirty="0"/>
+          </a:p>
+        </p:txBody>
+      </p:sp>
+      <p:sp>
+        <p:nvSpPr>
+          <p:cNvPr id="21" name="コツのカード"/>
+          <p:cNvSpPr/>
+          <p:nvPr/>
+        </p:nvSpPr>
+        <p:spPr>
+          <a:xfrm>
+            <a:off x="7315200" y="1463040"/>
+            <a:ext cx="4297680" cy="4572000"/>
+          </a:xfrm>
+          <a:prstGeom prst="roundRect">
+            <a:avLst>
+              <a:gd name="adj" fmla="val 2553"/>
+            </a:avLst>
+          </a:prstGeom>
+          <a:solidFill>
+            <a:schemeClr val="bg2"/>
+          </a:solidFill>
+          <a:ln/>
+        </p:spPr>
+      </p:sp>
+      <p:sp>
+        <p:nvSpPr>
+          <p:cNvPr id="22" name="コツ 円"/>
+          <p:cNvSpPr/>
+          <p:nvPr/>
+        </p:nvSpPr>
+        <p:spPr>
+          <a:xfrm>
+            <a:off x="7635240" y="1737360"/>
+            <a:ext cx="685800" cy="685800"/>
+          </a:xfrm>
+          <a:prstGeom prst="ellipse">
+            <a:avLst/>
+          </a:prstGeom>
+          <a:solidFill>
+            <a:schemeClr val="accent2"/>
+          </a:solidFill>
+          <a:ln/>
+        </p:spPr>
+      </p:sp>
+      <p:pic>
+        <p:nvPicPr>
+          <p:cNvPr id="23" name="Image 0" descr="コツ">    </p:cNvPr>
+          <p:cNvPicPr>
+            <a:picLocks noChangeAspect="1"/>
+          </p:cNvPicPr>
+          <p:nvPr/>
+        </p:nvPicPr>
+        <p:blipFill>
+          <a:blip r:embed="rId1"/>
+          <a:stretch>
+            <a:fillRect/>
+          </a:stretch>
+        </p:blipFill>
+        <p:spPr>
+          <a:xfrm>
+            <a:off x="7806690" y="1908810"/>
+            <a:ext cx="342900" cy="342900"/>
+          </a:xfrm>
+          <a:prstGeom prst="rect">
+            <a:avLst/>
+          </a:prstGeom>
+        </p:spPr>
+      </p:pic>
+      <p:sp>
+        <p:nvSpPr>
+          <p:cNvPr id="24" name="Text 21"/>
+          <p:cNvSpPr txBox="1"/>
+          <p:nvPr/>
+        </p:nvSpPr>
+        <p:spPr>
+          <a:xfrm>
+            <a:off x="8503920" y="1737360"/>
+            <a:ext cx="2926080" cy="685800"/>
+          </a:xfrm>
+          <a:prstGeom prst="rect">
+            <a:avLst/>
+          </a:prstGeom>
+          <a:noFill/>
+          <a:ln/>
+        </p:spPr>
+        <p:txBody>
+          <a:bodyPr wrap="square" lIns="0" tIns="0" rIns="0" bIns="0" rtlCol="0" anchor="ctr"/>
+          <a:lstStyle/>
+          <a:p>
+            <a:pPr indent="0" marL="0">
+              <a:buNone/>
+            </a:pPr>
+            <a:r>
+              <a:rPr lang="en-US" sz="2200" b="1" dirty="0">
+                <a:solidFill>
+                  <a:schemeClr val="tx2"/>
+                </a:solidFill>
+                <a:latin typeface="Yu Gothic" pitchFamily="34" charset="0"/>
+                <a:ea typeface="Yu Gothic" pitchFamily="34" charset="-122"/>
+                <a:cs typeface="Yu Gothic" pitchFamily="34" charset="-120"/>
+              </a:rPr>
+              <a:t>コツ</a:t>
+            </a:r>
+            <a:endParaRPr lang="en-US" sz="2200" dirty="0"/>
+          </a:p>
+        </p:txBody>
+      </p:sp>
+      <p:sp>
+        <p:nvSpPr>
+          <p:cNvPr id="25" name="Text 22"/>
+          <p:cNvSpPr txBox="1"/>
+          <p:nvPr/>
+        </p:nvSpPr>
+        <p:spPr>
+          <a:xfrm>
+            <a:off x="7635240" y="2743200"/>
+            <a:ext cx="3657600" cy="3108960"/>
+          </a:xfrm>
+          <a:prstGeom prst="rect">
+            <a:avLst/>
+          </a:prstGeom>
+          <a:noFill/>
+          <a:ln/>
+        </p:spPr>
+        <p:txBody>
+          <a:bodyPr wrap="square" lIns="0" tIns="0" rIns="0" bIns="0" rtlCol="0" anchor="t"/>
+          <a:lstStyle/>
+          <a:p>
+            <a:pPr marL="342900" indent="-342900">
+              <a:spcAft>
+                <a:spcPts val="1400"/>
+              </a:spcAft>
+              <a:buSzPct val="100000"/>
+              <a:buChar char="•"/>
+            </a:pPr>
+            <a:r>
+              <a:rPr lang="en-US" sz="1800" dirty="0">
+                <a:solidFill>
+                  <a:schemeClr val="tx1"/>
+                </a:solidFill>
+                <a:latin typeface="Yu Gothic" pitchFamily="34" charset="0"/>
+                <a:ea typeface="Yu Gothic" pitchFamily="34" charset="-122"/>
+                <a:cs typeface="Yu Gothic" pitchFamily="34" charset="-120"/>
+              </a:rPr>
+              <a:t>出力は、省略せずに貼る</a:t>
+            </a:r>
+            <a:endParaRPr lang="en-US" sz="1800" dirty="0"/>
+          </a:p>
+          <a:p>
+            <a:pPr marL="342900" indent="-342900">
+              <a:spcAft>
+                <a:spcPts val="1400"/>
+              </a:spcAft>
+              <a:buSzPct val="100000"/>
+              <a:buChar char="•"/>
+            </a:pPr>
+            <a:r>
+              <a:rPr lang="en-US" sz="1800" dirty="0">
+                <a:solidFill>
+                  <a:schemeClr val="tx1"/>
+                </a:solidFill>
+                <a:latin typeface="Yu Gothic" pitchFamily="34" charset="0"/>
+                <a:ea typeface="Yu Gothic" pitchFamily="34" charset="-122"/>
+                <a:cs typeface="Yu Gothic" pitchFamily="34" charset="-120"/>
+              </a:rPr>
+              <a:t>どこで実行するか(Windows か WSL か)を、コマンドごとに明記してもらう</a:t>
+            </a:r>
+            <a:endParaRPr lang="en-US" sz="1800" dirty="0"/>
+          </a:p>
+          <a:p>
+            <a:pPr marL="342900" indent="-342900">
+              <a:spcAft>
+                <a:spcPts val="1400"/>
+              </a:spcAft>
+              <a:buSzPct val="100000"/>
+              <a:buChar char="•"/>
+            </a:pPr>
+            <a:r>
+              <a:rPr lang="en-US" sz="1800" dirty="0">
+                <a:solidFill>
+                  <a:schemeClr val="tx1"/>
+                </a:solidFill>
+                <a:latin typeface="Yu Gothic" pitchFamily="34" charset="0"/>
+                <a:ea typeface="Yu Gothic" pitchFamily="34" charset="-122"/>
+                <a:cs typeface="Yu Gothic" pitchFamily="34" charset="-120"/>
+              </a:rPr>
+              <a:t>AI の説明が、推測か確認済みかを聞く</a:t>
+            </a:r>
+            <a:endParaRPr lang="en-US" sz="1800" dirty="0"/>
+          </a:p>
+        </p:txBody>
+      </p:sp>
+      <p:sp>
+        <p:nvSpPr>
+          <p:cNvPr id="25" name="Slide Number Placeholder 0"/>
+          <p:cNvSpPr>
+            <a:spLocks noGrp="1"/>
+          </p:cNvSpPr>
+          <p:nvPr>
+            <p:ph type="sldNum" sz="quarter" idx="4294967295"/>
+          </p:nvPr>
+        </p:nvSpPr>
+        <p:spPr>
+          <a:xfrm>
+            <a:off x="10972800" y="6355080"/>
+            <a:ext cx="640080" cy="274320"/>
+          </a:xfrm>
+          <a:prstGeom prst="rect">
+            <a:avLst/>
+          </a:prstGeom>
+          <a:extLst>
+            <a:ext uri="{C572A759-6A51-4108-AA02-DFA0A04FC94B}">
+              <ma14:wrappingTextBoxFlag xmlns:ma14="http://schemas.microsoft.com/office/mac/drawingml/2011/main" val="0"/>
+            </a:ext>
+          </a:extLst>
+        </p:spPr>
+        <p:txBody>
+          <a:bodyPr/>
+          <a:lstStyle>
+            <a:lvl1pPr>
+              <a:defRPr sz="1100">
+                <a:solidFill>
+                  <a:schemeClr val="accent3"/>
+                </a:solidFill>
+              </a:defRPr>
+            </a:lvl1pPr>
+          </a:lstStyle>
+          <a:p>
+            <a:pPr algn="r"/>
+            <a:fld id="{F7021451-1387-4CA6-816F-3879F97B5CBC}" type="slidenum">
+              <a:rPr b="0" lang="en-US"/>
+              <a:t>10</a:t>
+            </a:fld>
+            <a:endParaRPr lang="en-US"/>
+          </a:p>
+        </p:txBody>
+      </p:sp>
+    </p:spTree>
+  </p:cSld>
+  <p:clrMapOvr>
+    <a:masterClrMapping/>
+  </p:clrMapOvr>
+</p:sld>
+</file>
+
+<file path=ppt/slides/slide11.xml><?xml version="1.0" encoding="utf-8"?>
+<p:sld xmlns:a="http://schemas.openxmlformats.org/drawingml/2006/main" xmlns:r="http://schemas.openxmlformats.org/officeDocument/2006/relationships" xmlns:p="http://schemas.openxmlformats.org/presentationml/2006/main">
+  <p:cSld name="Slide 11">
+    <p:spTree>
+      <p:nvGrpSpPr>
+        <p:cNvPr id="1" name=""/>
+        <p:cNvGrpSpPr/>
+        <p:nvPr/>
+      </p:nvGrpSpPr>
+      <p:grpSpPr>
+        <a:xfrm>
+          <a:off x="0" y="0"/>
+          <a:ext cx="0" cy="0"/>
+          <a:chOff x="0" y="0"/>
+          <a:chExt cx="0" cy="0"/>
+        </a:xfrm>
+      </p:grpSpPr>
+      <p:sp>
+        <p:nvSpPr>
           <p:cNvPr id="2" name="Text 1"/>
           <p:cNvSpPr/>
           <p:nvPr>
@@ -5960,7 +6936,7 @@
                   <a:schemeClr val="tx2"/>
                 </a:solidFill>
               </a:rPr>
-              <a:t>例: dep_cve_check.py の成長</a:t>
+              <a:t>クラウドの作業環境(Ubuntu)での検証</a:t>
             </a:r>
             <a:endParaRPr lang="en-US" sz="3400" dirty="0"/>
           </a:p>
@@ -5968,14 +6944,75 @@
       </p:sp>
       <p:sp>
         <p:nvSpPr>
-          <p:cNvPr id="3" name="段階の円 1"/>
+          <p:cNvPr id="3" name="できたことのカード"/>
           <p:cNvSpPr/>
           <p:nvPr/>
         </p:nvSpPr>
         <p:spPr>
           <a:xfrm>
-            <a:off x="548640" y="1581912"/>
-            <a:ext cx="502920" cy="502920"/>
+            <a:off x="548640" y="1463040"/>
+            <a:ext cx="6949440" cy="4572000"/>
+          </a:xfrm>
+          <a:prstGeom prst="roundRect">
+            <a:avLst>
+              <a:gd name="adj" fmla="val 2400"/>
+            </a:avLst>
+          </a:prstGeom>
+          <a:solidFill>
+            <a:schemeClr val="bg2"/>
+          </a:solidFill>
+          <a:ln/>
+        </p:spPr>
+      </p:sp>
+      <p:sp>
+        <p:nvSpPr>
+          <p:cNvPr id="4" name="Text 2"/>
+          <p:cNvSpPr txBox="1"/>
+          <p:nvPr/>
+        </p:nvSpPr>
+        <p:spPr>
+          <a:xfrm>
+            <a:off x="868680" y="1691640"/>
+            <a:ext cx="6309360" cy="457200"/>
+          </a:xfrm>
+          <a:prstGeom prst="rect">
+            <a:avLst/>
+          </a:prstGeom>
+          <a:noFill/>
+          <a:ln/>
+        </p:spPr>
+        <p:txBody>
+          <a:bodyPr wrap="square" lIns="0" tIns="0" rIns="0" bIns="0" rtlCol="0" anchor="ctr"/>
+          <a:lstStyle/>
+          <a:p>
+            <a:pPr indent="0" marL="0">
+              <a:buNone/>
+            </a:pPr>
+            <a:r>
+              <a:rPr lang="en-US" sz="2000" b="1" dirty="0">
+                <a:solidFill>
+                  <a:schemeClr val="tx2"/>
+                </a:solidFill>
+                <a:latin typeface="Yu Gothic" pitchFamily="34" charset="0"/>
+                <a:ea typeface="Yu Gothic" pitchFamily="34" charset="-122"/>
+                <a:cs typeface="Yu Gothic" pitchFamily="34" charset="-120"/>
+              </a:rPr>
+              <a:t>ここで、実際にやったこと</a:t>
+            </a:r>
+            <a:endParaRPr lang="en-US" sz="2000" dirty="0"/>
+          </a:p>
+        </p:txBody>
+      </p:sp>
+      <p:sp>
+        <p:nvSpPr>
+          <p:cNvPr id="5" name="できたこと 1 円"/>
+          <p:cNvSpPr/>
+          <p:nvPr/>
+        </p:nvSpPr>
+        <p:spPr>
+          <a:xfrm>
+            <a:off x="868680" y="2377440"/>
+            <a:ext cx="457200" cy="457200"/>
           </a:xfrm>
           <a:prstGeom prst="ellipse">
             <a:avLst/>
@@ -5986,16 +7023,40 @@
           <a:ln/>
         </p:spPr>
       </p:sp>
-      <p:sp>
-        <p:nvSpPr>
-          <p:cNvPr id="4" name="Text 2"/>
+      <p:pic>
+        <p:nvPicPr>
+          <p:cNvPr id="6" name="Image 0" descr="できたこと 1">    </p:cNvPr>
+          <p:cNvPicPr>
+            <a:picLocks noChangeAspect="1"/>
+          </p:cNvPicPr>
+          <p:nvPr/>
+        </p:nvPicPr>
+        <p:blipFill>
+          <a:blip r:embed="rId1"/>
+          <a:stretch>
+            <a:fillRect/>
+          </a:stretch>
+        </p:blipFill>
+        <p:spPr>
+          <a:xfrm>
+            <a:off x="982980" y="2491740"/>
+            <a:ext cx="228600" cy="228600"/>
+          </a:xfrm>
+          <a:prstGeom prst="rect">
+            <a:avLst/>
+          </a:prstGeom>
+        </p:spPr>
+      </p:pic>
+      <p:sp>
+        <p:nvSpPr>
+          <p:cNvPr id="7" name="Text 4"/>
           <p:cNvSpPr txBox="1"/>
           <p:nvPr/>
         </p:nvSpPr>
         <p:spPr>
           <a:xfrm>
-            <a:off x="548640" y="1581912"/>
-            <a:ext cx="502920" cy="502920"/>
+            <a:off x="1554480" y="2331720"/>
+            <a:ext cx="5669280" cy="594360"/>
           </a:xfrm>
           <a:prstGeom prst="rect">
             <a:avLst/>
@@ -6007,19 +7068,19 @@
           <a:bodyPr wrap="square" lIns="0" tIns="0" rIns="0" bIns="0" rtlCol="0" anchor="ctr"/>
           <a:lstStyle/>
           <a:p>
-            <a:pPr algn="ctr" indent="0" marL="0">
-              <a:buNone/>
-            </a:pPr>
-            <a:r>
-              <a:rPr lang="en-US" sz="1600" b="1" dirty="0">
-                <a:solidFill>
-                  <a:schemeClr val="bg1"/>
-                </a:solidFill>
-                <a:latin typeface="Yu Gothic" pitchFamily="34" charset="0"/>
-                <a:ea typeface="Yu Gothic" pitchFamily="34" charset="-122"/>
-                <a:cs typeface="Yu Gothic" pitchFamily="34" charset="-120"/>
-              </a:rPr>
-              <a:t>1</a:t>
+            <a:pPr indent="0" marL="0">
+              <a:buNone/>
+            </a:pPr>
+            <a:r>
+              <a:rPr lang="en-US" sz="1600" dirty="0">
+                <a:solidFill>
+                  <a:schemeClr val="tx1"/>
+                </a:solidFill>
+                <a:latin typeface="Yu Gothic" pitchFamily="34" charset="0"/>
+                <a:ea typeface="Yu Gothic" pitchFamily="34" charset="-122"/>
+                <a:cs typeface="Yu Gothic" pitchFamily="34" charset="-120"/>
+              </a:rPr>
+              <a:t>実物のロックファイルを生成(uv・poetry・go・dotnet)</a:t>
             </a:r>
             <a:endParaRPr lang="en-US" sz="1600" dirty="0"/>
           </a:p>
@@ -6027,92 +7088,14 @@
       </p:sp>
       <p:sp>
         <p:nvSpPr>
-          <p:cNvPr id="5" name="Text 3"/>
-          <p:cNvSpPr txBox="1"/>
-          <p:nvPr/>
-        </p:nvSpPr>
-        <p:spPr>
-          <a:xfrm>
-            <a:off x="1280160" y="1508760"/>
-            <a:ext cx="2651760" cy="640080"/>
-          </a:xfrm>
-          <a:prstGeom prst="rect">
-            <a:avLst/>
-          </a:prstGeom>
-          <a:noFill/>
-          <a:ln/>
-        </p:spPr>
-        <p:txBody>
-          <a:bodyPr wrap="square" lIns="0" tIns="0" rIns="0" bIns="0" rtlCol="0" anchor="ctr"/>
-          <a:lstStyle/>
-          <a:p>
-            <a:pPr indent="0" marL="0">
-              <a:buNone/>
-            </a:pPr>
-            <a:r>
-              <a:rPr lang="en-US" sz="1800" b="1" dirty="0">
-                <a:solidFill>
-                  <a:schemeClr val="tx2"/>
-                </a:solidFill>
-                <a:latin typeface="Yu Gothic" pitchFamily="34" charset="0"/>
-                <a:ea typeface="Yu Gothic" pitchFamily="34" charset="-122"/>
-                <a:cs typeface="Yu Gothic" pitchFamily="34" charset="-120"/>
-              </a:rPr>
-              <a:t>試作</a:t>
-            </a:r>
-            <a:endParaRPr lang="en-US" sz="1800" dirty="0"/>
-          </a:p>
-        </p:txBody>
-      </p:sp>
-      <p:sp>
-        <p:nvSpPr>
-          <p:cNvPr id="6" name="Text 4"/>
-          <p:cNvSpPr txBox="1"/>
-          <p:nvPr/>
-        </p:nvSpPr>
-        <p:spPr>
-          <a:xfrm>
-            <a:off x="3931920" y="1508760"/>
-            <a:ext cx="3566160" cy="640080"/>
-          </a:xfrm>
-          <a:prstGeom prst="rect">
-            <a:avLst/>
-          </a:prstGeom>
-          <a:noFill/>
-          <a:ln/>
-        </p:spPr>
-        <p:txBody>
-          <a:bodyPr wrap="square" lIns="0" tIns="0" rIns="0" bIns="0" rtlCol="0" anchor="ctr"/>
-          <a:lstStyle/>
-          <a:p>
-            <a:pPr indent="0" marL="0">
-              <a:buNone/>
-            </a:pPr>
-            <a:r>
-              <a:rPr lang="en-US" sz="1400" dirty="0">
-                <a:solidFill>
-                  <a:schemeClr val="tx1"/>
-                </a:solidFill>
-                <a:latin typeface="Yu Gothic" pitchFamily="34" charset="0"/>
-                <a:ea typeface="Yu Gothic" pitchFamily="34" charset="-122"/>
-                <a:cs typeface="Yu Gothic" pitchFamily="34" charset="-120"/>
-              </a:rPr>
-              <a:t>OSV に問い合わせて、SARIF を出す</a:t>
-            </a:r>
-            <a:endParaRPr lang="en-US" sz="1400" dirty="0"/>
-          </a:p>
-        </p:txBody>
-      </p:sp>
-      <p:sp>
-        <p:nvSpPr>
-          <p:cNvPr id="7" name="段階の円 2"/>
+          <p:cNvPr id="8" name="できたこと 2 円"/>
           <p:cNvSpPr/>
           <p:nvPr/>
         </p:nvSpPr>
         <p:spPr>
           <a:xfrm>
-            <a:off x="548640" y="2359152"/>
-            <a:ext cx="502920" cy="502920"/>
+            <a:off x="868680" y="3108960"/>
+            <a:ext cx="457200" cy="457200"/>
           </a:xfrm>
           <a:prstGeom prst="ellipse">
             <a:avLst/>
@@ -6123,16 +7106,40 @@
           <a:ln/>
         </p:spPr>
       </p:sp>
-      <p:sp>
-        <p:nvSpPr>
-          <p:cNvPr id="8" name="Text 6"/>
+      <p:pic>
+        <p:nvPicPr>
+          <p:cNvPr id="9" name="Image 1" descr="できたこと 2">    </p:cNvPr>
+          <p:cNvPicPr>
+            <a:picLocks noChangeAspect="1"/>
+          </p:cNvPicPr>
+          <p:nvPr/>
+        </p:nvPicPr>
+        <p:blipFill>
+          <a:blip r:embed="rId2"/>
+          <a:stretch>
+            <a:fillRect/>
+          </a:stretch>
+        </p:blipFill>
+        <p:spPr>
+          <a:xfrm>
+            <a:off x="982980" y="3223260"/>
+            <a:ext cx="228600" cy="228600"/>
+          </a:xfrm>
+          <a:prstGeom prst="rect">
+            <a:avLst/>
+          </a:prstGeom>
+        </p:spPr>
+      </p:pic>
+      <p:sp>
+        <p:nvSpPr>
+          <p:cNvPr id="10" name="Text 6"/>
           <p:cNvSpPr txBox="1"/>
           <p:nvPr/>
         </p:nvSpPr>
         <p:spPr>
           <a:xfrm>
-            <a:off x="548640" y="2359152"/>
-            <a:ext cx="502920" cy="502920"/>
+            <a:off x="1554480" y="3063240"/>
+            <a:ext cx="5669280" cy="594360"/>
           </a:xfrm>
           <a:prstGeom prst="rect">
             <a:avLst/>
@@ -6144,19 +7151,19 @@
           <a:bodyPr wrap="square" lIns="0" tIns="0" rIns="0" bIns="0" rtlCol="0" anchor="ctr"/>
           <a:lstStyle/>
           <a:p>
-            <a:pPr algn="ctr" indent="0" marL="0">
-              <a:buNone/>
-            </a:pPr>
-            <a:r>
-              <a:rPr lang="en-US" sz="1600" b="1" dirty="0">
-                <a:solidFill>
-                  <a:schemeClr val="bg1"/>
-                </a:solidFill>
-                <a:latin typeface="Yu Gothic" pitchFamily="34" charset="0"/>
-                <a:ea typeface="Yu Gothic" pitchFamily="34" charset="-122"/>
-                <a:cs typeface="Yu Gothic" pitchFamily="34" charset="-120"/>
-              </a:rPr>
-              <a:t>2</a:t>
+            <a:pPr indent="0" marL="0">
+              <a:buNone/>
+            </a:pPr>
+            <a:r>
+              <a:rPr lang="en-US" sz="1600" dirty="0">
+                <a:solidFill>
+                  <a:schemeClr val="tx1"/>
+                </a:solidFill>
+                <a:latin typeface="Yu Gothic" pitchFamily="34" charset="0"/>
+                <a:ea typeface="Yu Gothic" pitchFamily="34" charset="-122"/>
+                <a:cs typeface="Yu Gothic" pitchFamily="34" charset="-120"/>
+              </a:rPr>
+              <a:t>他人のコードを読んでから、隔離して実行(ルールのみ)</a:t>
             </a:r>
             <a:endParaRPr lang="en-US" sz="1600" dirty="0"/>
           </a:p>
@@ -6164,92 +7171,14 @@
       </p:sp>
       <p:sp>
         <p:nvSpPr>
-          <p:cNvPr id="9" name="Text 7"/>
-          <p:cNvSpPr txBox="1"/>
-          <p:nvPr/>
-        </p:nvSpPr>
-        <p:spPr>
-          <a:xfrm>
-            <a:off x="1280160" y="2286000"/>
-            <a:ext cx="2651760" cy="640080"/>
-          </a:xfrm>
-          <a:prstGeom prst="rect">
-            <a:avLst/>
-          </a:prstGeom>
-          <a:noFill/>
-          <a:ln/>
-        </p:spPr>
-        <p:txBody>
-          <a:bodyPr wrap="square" lIns="0" tIns="0" rIns="0" bIns="0" rtlCol="0" anchor="ctr"/>
-          <a:lstStyle/>
-          <a:p>
-            <a:pPr indent="0" marL="0">
-              <a:buNone/>
-            </a:pPr>
-            <a:r>
-              <a:rPr lang="en-US" sz="1800" b="1" dirty="0">
-                <a:solidFill>
-                  <a:schemeClr val="tx2"/>
-                </a:solidFill>
-                <a:latin typeface="Yu Gothic" pitchFamily="34" charset="0"/>
-                <a:ea typeface="Yu Gothic" pitchFamily="34" charset="-122"/>
-                <a:cs typeface="Yu Gothic" pitchFamily="34" charset="-120"/>
-              </a:rPr>
-              <a:t>実通信で検証</a:t>
-            </a:r>
-            <a:endParaRPr lang="en-US" sz="1800" dirty="0"/>
-          </a:p>
-        </p:txBody>
-      </p:sp>
-      <p:sp>
-        <p:nvSpPr>
-          <p:cNvPr id="10" name="Text 8"/>
-          <p:cNvSpPr txBox="1"/>
-          <p:nvPr/>
-        </p:nvSpPr>
-        <p:spPr>
-          <a:xfrm>
-            <a:off x="3931920" y="2286000"/>
-            <a:ext cx="3566160" cy="640080"/>
-          </a:xfrm>
-          <a:prstGeom prst="rect">
-            <a:avLst/>
-          </a:prstGeom>
-          <a:noFill/>
-          <a:ln/>
-        </p:spPr>
-        <p:txBody>
-          <a:bodyPr wrap="square" lIns="0" tIns="0" rIns="0" bIns="0" rtlCol="0" anchor="ctr"/>
-          <a:lstStyle/>
-          <a:p>
-            <a:pPr indent="0" marL="0">
-              <a:buNone/>
-            </a:pPr>
-            <a:r>
-              <a:rPr lang="en-US" sz="1400" dirty="0">
-                <a:solidFill>
-                  <a:schemeClr val="tx1"/>
-                </a:solidFill>
-                <a:latin typeface="Yu Gothic" pitchFamily="34" charset="0"/>
-                <a:ea typeface="Yu Gothic" pitchFamily="34" charset="-122"/>
-                <a:cs typeface="Yu Gothic" pitchFamily="34" charset="-120"/>
-              </a:rPr>
-              <a:t>古い版を渡して、22 件が出た</a:t>
-            </a:r>
-            <a:endParaRPr lang="en-US" sz="1400" dirty="0"/>
-          </a:p>
-        </p:txBody>
-      </p:sp>
-      <p:sp>
-        <p:nvSpPr>
-          <p:cNvPr id="11" name="段階の円 3"/>
+          <p:cNvPr id="11" name="できたこと 3 円"/>
           <p:cNvSpPr/>
           <p:nvPr/>
         </p:nvSpPr>
         <p:spPr>
           <a:xfrm>
-            <a:off x="548640" y="3136392"/>
-            <a:ext cx="502920" cy="502920"/>
+            <a:off x="868680" y="3840480"/>
+            <a:ext cx="457200" cy="457200"/>
           </a:xfrm>
           <a:prstGeom prst="ellipse">
             <a:avLst/>
@@ -6260,16 +7189,40 @@
           <a:ln/>
         </p:spPr>
       </p:sp>
-      <p:sp>
-        <p:nvSpPr>
-          <p:cNvPr id="12" name="Text 10"/>
+      <p:pic>
+        <p:nvPicPr>
+          <p:cNvPr id="12" name="Image 2" descr="できたこと 3">    </p:cNvPr>
+          <p:cNvPicPr>
+            <a:picLocks noChangeAspect="1"/>
+          </p:cNvPicPr>
+          <p:nvPr/>
+        </p:nvPicPr>
+        <p:blipFill>
+          <a:blip r:embed="rId3"/>
+          <a:stretch>
+            <a:fillRect/>
+          </a:stretch>
+        </p:blipFill>
+        <p:spPr>
+          <a:xfrm>
+            <a:off x="982980" y="3954780"/>
+            <a:ext cx="228600" cy="228600"/>
+          </a:xfrm>
+          <a:prstGeom prst="rect">
+            <a:avLst/>
+          </a:prstGeom>
+        </p:spPr>
+      </p:pic>
+      <p:sp>
+        <p:nvSpPr>
+          <p:cNvPr id="13" name="Text 8"/>
           <p:cNvSpPr txBox="1"/>
           <p:nvPr/>
         </p:nvSpPr>
         <p:spPr>
           <a:xfrm>
-            <a:off x="548640" y="3136392"/>
-            <a:ext cx="502920" cy="502920"/>
+            <a:off x="1554480" y="3794760"/>
+            <a:ext cx="5669280" cy="594360"/>
           </a:xfrm>
           <a:prstGeom prst="rect">
             <a:avLst/>
@@ -6281,19 +7234,19 @@
           <a:bodyPr wrap="square" lIns="0" tIns="0" rIns="0" bIns="0" rtlCol="0" anchor="ctr"/>
           <a:lstStyle/>
           <a:p>
-            <a:pPr algn="ctr" indent="0" marL="0">
-              <a:buNone/>
-            </a:pPr>
-            <a:r>
-              <a:rPr lang="en-US" sz="1600" b="1" dirty="0">
-                <a:solidFill>
-                  <a:schemeClr val="bg1"/>
-                </a:solidFill>
-                <a:latin typeface="Yu Gothic" pitchFamily="34" charset="0"/>
-                <a:ea typeface="Yu Gothic" pitchFamily="34" charset="-122"/>
-                <a:cs typeface="Yu Gothic" pitchFamily="34" charset="-120"/>
-              </a:rPr>
-              <a:t>3</a:t>
+            <a:pPr indent="0" marL="0">
+              <a:buNone/>
+            </a:pPr>
+            <a:r>
+              <a:rPr lang="en-US" sz="1600" dirty="0">
+                <a:solidFill>
+                  <a:schemeClr val="tx1"/>
+                </a:solidFill>
+                <a:latin typeface="Yu Gothic" pitchFamily="34" charset="0"/>
+                <a:ea typeface="Yu Gothic" pitchFamily="34" charset="-122"/>
+                <a:cs typeface="Yu Gothic" pitchFamily="34" charset="-120"/>
+              </a:rPr>
+              <a:t>ラボの回帰テスト 22 パターン(ポートを変えても)</a:t>
             </a:r>
             <a:endParaRPr lang="en-US" sz="1600" dirty="0"/>
           </a:p>
@@ -6301,92 +7254,14 @@
       </p:sp>
       <p:sp>
         <p:nvSpPr>
-          <p:cNvPr id="13" name="Text 11"/>
-          <p:cNvSpPr txBox="1"/>
-          <p:nvPr/>
-        </p:nvSpPr>
-        <p:spPr>
-          <a:xfrm>
-            <a:off x="1280160" y="3063240"/>
-            <a:ext cx="2651760" cy="640080"/>
-          </a:xfrm>
-          <a:prstGeom prst="rect">
-            <a:avLst/>
-          </a:prstGeom>
-          <a:noFill/>
-          <a:ln/>
-        </p:spPr>
-        <p:txBody>
-          <a:bodyPr wrap="square" lIns="0" tIns="0" rIns="0" bIns="0" rtlCol="0" anchor="ctr"/>
-          <a:lstStyle/>
-          <a:p>
-            <a:pPr indent="0" marL="0">
-              <a:buNone/>
-            </a:pPr>
-            <a:r>
-              <a:rPr lang="en-US" sz="1800" b="1" dirty="0">
-                <a:solidFill>
-                  <a:schemeClr val="tx2"/>
-                </a:solidFill>
-                <a:latin typeface="Yu Gothic" pitchFamily="34" charset="0"/>
-                <a:ea typeface="Yu Gothic" pitchFamily="34" charset="-122"/>
-                <a:cs typeface="Yu Gothic" pitchFamily="34" charset="-120"/>
-              </a:rPr>
-              <a:t>CVE 単位にまとめる</a:t>
-            </a:r>
-            <a:endParaRPr lang="en-US" sz="1800" dirty="0"/>
-          </a:p>
-        </p:txBody>
-      </p:sp>
-      <p:sp>
-        <p:nvSpPr>
-          <p:cNvPr id="14" name="Text 12"/>
-          <p:cNvSpPr txBox="1"/>
-          <p:nvPr/>
-        </p:nvSpPr>
-        <p:spPr>
-          <a:xfrm>
-            <a:off x="3931920" y="3063240"/>
-            <a:ext cx="3566160" cy="640080"/>
-          </a:xfrm>
-          <a:prstGeom prst="rect">
-            <a:avLst/>
-          </a:prstGeom>
-          <a:noFill/>
-          <a:ln/>
-        </p:spPr>
-        <p:txBody>
-          <a:bodyPr wrap="square" lIns="0" tIns="0" rIns="0" bIns="0" rtlCol="0" anchor="ctr"/>
-          <a:lstStyle/>
-          <a:p>
-            <a:pPr indent="0" marL="0">
-              <a:buNone/>
-            </a:pPr>
-            <a:r>
-              <a:rPr lang="en-US" sz="1400" dirty="0">
-                <a:solidFill>
-                  <a:schemeClr val="tx1"/>
-                </a:solidFill>
-                <a:latin typeface="Yu Gothic" pitchFamily="34" charset="0"/>
-                <a:ea typeface="Yu Gothic" pitchFamily="34" charset="-122"/>
-                <a:cs typeface="Yu Gothic" pitchFamily="34" charset="-120"/>
-              </a:rPr>
-              <a:t>同じ CVE が 2 回数えられていた</a:t>
-            </a:r>
-            <a:endParaRPr lang="en-US" sz="1400" dirty="0"/>
-          </a:p>
-        </p:txBody>
-      </p:sp>
-      <p:sp>
-        <p:nvSpPr>
-          <p:cNvPr id="15" name="段階の円 4"/>
+          <p:cNvPr id="14" name="できたこと 4 円"/>
           <p:cNvSpPr/>
           <p:nvPr/>
         </p:nvSpPr>
         <p:spPr>
           <a:xfrm>
-            <a:off x="548640" y="3913632"/>
-            <a:ext cx="502920" cy="502920"/>
+            <a:off x="868680" y="4572000"/>
+            <a:ext cx="457200" cy="457200"/>
           </a:xfrm>
           <a:prstGeom prst="ellipse">
             <a:avLst/>
@@ -6397,16 +7272,40 @@
           <a:ln/>
         </p:spPr>
       </p:sp>
-      <p:sp>
-        <p:nvSpPr>
-          <p:cNvPr id="16" name="Text 14"/>
+      <p:pic>
+        <p:nvPicPr>
+          <p:cNvPr id="15" name="Image 3" descr="できたこと 4">    </p:cNvPr>
+          <p:cNvPicPr>
+            <a:picLocks noChangeAspect="1"/>
+          </p:cNvPicPr>
+          <p:nvPr/>
+        </p:nvPicPr>
+        <p:blipFill>
+          <a:blip r:embed="rId4"/>
+          <a:stretch>
+            <a:fillRect/>
+          </a:stretch>
+        </p:blipFill>
+        <p:spPr>
+          <a:xfrm>
+            <a:off x="982980" y="4686300"/>
+            <a:ext cx="228600" cy="228600"/>
+          </a:xfrm>
+          <a:prstGeom prst="rect">
+            <a:avLst/>
+          </a:prstGeom>
+        </p:spPr>
+      </p:pic>
+      <p:sp>
+        <p:nvSpPr>
+          <p:cNvPr id="16" name="Text 10"/>
           <p:cNvSpPr txBox="1"/>
           <p:nvPr/>
         </p:nvSpPr>
         <p:spPr>
           <a:xfrm>
-            <a:off x="548640" y="3913632"/>
-            <a:ext cx="502920" cy="502920"/>
+            <a:off x="1554480" y="4526280"/>
+            <a:ext cx="5669280" cy="594360"/>
           </a:xfrm>
           <a:prstGeom prst="rect">
             <a:avLst/>
@@ -6418,19 +7317,19 @@
           <a:bodyPr wrap="square" lIns="0" tIns="0" rIns="0" bIns="0" rtlCol="0" anchor="ctr"/>
           <a:lstStyle/>
           <a:p>
-            <a:pPr algn="ctr" indent="0" marL="0">
-              <a:buNone/>
-            </a:pPr>
-            <a:r>
-              <a:rPr lang="en-US" sz="1600" b="1" dirty="0">
-                <a:solidFill>
-                  <a:schemeClr val="bg1"/>
-                </a:solidFill>
-                <a:latin typeface="Yu Gothic" pitchFamily="34" charset="0"/>
-                <a:ea typeface="Yu Gothic" pitchFamily="34" charset="-122"/>
-                <a:cs typeface="Yu Gothic" pitchFamily="34" charset="-120"/>
-              </a:rPr>
-              <a:t>4</a:t>
+            <a:pPr indent="0" marL="0">
+              <a:buNone/>
+            </a:pPr>
+            <a:r>
+              <a:rPr lang="en-US" sz="1600" dirty="0">
+                <a:solidFill>
+                  <a:schemeClr val="tx1"/>
+                </a:solidFill>
+                <a:latin typeface="Yu Gothic" pitchFamily="34" charset="0"/>
+                <a:ea typeface="Yu Gothic" pitchFamily="34" charset="-122"/>
+                <a:cs typeface="Yu Gothic" pitchFamily="34" charset="-120"/>
+              </a:rPr>
+              <a:t>通信を拒否した状態で、終了コード 2 を確認</a:t>
             </a:r>
             <a:endParaRPr lang="en-US" sz="1600" dirty="0"/>
           </a:p>
@@ -6438,92 +7337,14 @@
       </p:sp>
       <p:sp>
         <p:nvSpPr>
-          <p:cNvPr id="17" name="Text 15"/>
-          <p:cNvSpPr txBox="1"/>
-          <p:nvPr/>
-        </p:nvSpPr>
-        <p:spPr>
-          <a:xfrm>
-            <a:off x="1280160" y="3840480"/>
-            <a:ext cx="2651760" cy="640080"/>
-          </a:xfrm>
-          <a:prstGeom prst="rect">
-            <a:avLst/>
-          </a:prstGeom>
-          <a:noFill/>
-          <a:ln/>
-        </p:spPr>
-        <p:txBody>
-          <a:bodyPr wrap="square" lIns="0" tIns="0" rIns="0" bIns="0" rtlCol="0" anchor="ctr"/>
-          <a:lstStyle/>
-          <a:p>
-            <a:pPr indent="0" marL="0">
-              <a:buNone/>
-            </a:pPr>
-            <a:r>
-              <a:rPr lang="en-US" sz="1800" b="1" dirty="0">
-                <a:solidFill>
-                  <a:schemeClr val="tx2"/>
-                </a:solidFill>
-                <a:latin typeface="Yu Gothic" pitchFamily="34" charset="0"/>
-                <a:ea typeface="Yu Gothic" pitchFamily="34" charset="-122"/>
-                <a:cs typeface="Yu Gothic" pitchFamily="34" charset="-120"/>
-              </a:rPr>
-              <a:t>対応を広げる</a:t>
-            </a:r>
-            <a:endParaRPr lang="en-US" sz="1800" dirty="0"/>
-          </a:p>
-        </p:txBody>
-      </p:sp>
-      <p:sp>
-        <p:nvSpPr>
-          <p:cNvPr id="18" name="Text 16"/>
-          <p:cNvSpPr txBox="1"/>
-          <p:nvPr/>
-        </p:nvSpPr>
-        <p:spPr>
-          <a:xfrm>
-            <a:off x="3931920" y="3840480"/>
-            <a:ext cx="3566160" cy="640080"/>
-          </a:xfrm>
-          <a:prstGeom prst="rect">
-            <a:avLst/>
-          </a:prstGeom>
-          <a:noFill/>
-          <a:ln/>
-        </p:spPr>
-        <p:txBody>
-          <a:bodyPr wrap="square" lIns="0" tIns="0" rIns="0" bIns="0" rtlCol="0" anchor="ctr"/>
-          <a:lstStyle/>
-          <a:p>
-            <a:pPr indent="0" marL="0">
-              <a:buNone/>
-            </a:pPr>
-            <a:r>
-              <a:rPr lang="en-US" sz="1400" dirty="0">
-                <a:solidFill>
-                  <a:schemeClr val="tx1"/>
-                </a:solidFill>
-                <a:latin typeface="Yu Gothic" pitchFamily="34" charset="0"/>
-                <a:ea typeface="Yu Gothic" pitchFamily="34" charset="-122"/>
-                <a:cs typeface="Yu Gothic" pitchFamily="34" charset="-120"/>
-              </a:rPr>
-              <a:t>NuGet・poetry・uv・Go(実物で確認)</a:t>
-            </a:r>
-            <a:endParaRPr lang="en-US" sz="1400" dirty="0"/>
-          </a:p>
-        </p:txBody>
-      </p:sp>
-      <p:sp>
-        <p:nvSpPr>
-          <p:cNvPr id="19" name="段階の円 5"/>
+          <p:cNvPr id="17" name="できたこと 5 円"/>
           <p:cNvSpPr/>
           <p:nvPr/>
         </p:nvSpPr>
         <p:spPr>
           <a:xfrm>
-            <a:off x="548640" y="4690872"/>
-            <a:ext cx="502920" cy="502920"/>
+            <a:off x="868680" y="5303520"/>
+            <a:ext cx="457200" cy="457200"/>
           </a:xfrm>
           <a:prstGeom prst="ellipse">
             <a:avLst/>
@@ -6534,16 +7355,40 @@
           <a:ln/>
         </p:spPr>
       </p:sp>
-      <p:sp>
-        <p:nvSpPr>
-          <p:cNvPr id="20" name="Text 18"/>
+      <p:pic>
+        <p:nvPicPr>
+          <p:cNvPr id="18" name="Image 4" descr="できたこと 5">    </p:cNvPr>
+          <p:cNvPicPr>
+            <a:picLocks noChangeAspect="1"/>
+          </p:cNvPicPr>
+          <p:nvPr/>
+        </p:nvPicPr>
+        <p:blipFill>
+          <a:blip r:embed="rId5"/>
+          <a:stretch>
+            <a:fillRect/>
+          </a:stretch>
+        </p:blipFill>
+        <p:spPr>
+          <a:xfrm>
+            <a:off x="982980" y="5417820"/>
+            <a:ext cx="228600" cy="228600"/>
+          </a:xfrm>
+          <a:prstGeom prst="rect">
+            <a:avLst/>
+          </a:prstGeom>
+        </p:spPr>
+      </p:pic>
+      <p:sp>
+        <p:nvSpPr>
+          <p:cNvPr id="19" name="Text 12"/>
           <p:cNvSpPr txBox="1"/>
           <p:nvPr/>
         </p:nvSpPr>
         <p:spPr>
           <a:xfrm>
-            <a:off x="548640" y="4690872"/>
-            <a:ext cx="502920" cy="502920"/>
+            <a:off x="1554480" y="5257800"/>
+            <a:ext cx="5669280" cy="594360"/>
           </a:xfrm>
           <a:prstGeom prst="rect">
             <a:avLst/>
@@ -6555,19 +7400,19 @@
           <a:bodyPr wrap="square" lIns="0" tIns="0" rIns="0" bIns="0" rtlCol="0" anchor="ctr"/>
           <a:lstStyle/>
           <a:p>
-            <a:pPr algn="ctr" indent="0" marL="0">
-              <a:buNone/>
-            </a:pPr>
-            <a:r>
-              <a:rPr lang="en-US" sz="1600" b="1" dirty="0">
-                <a:solidFill>
-                  <a:schemeClr val="bg1"/>
-                </a:solidFill>
-                <a:latin typeface="Yu Gothic" pitchFamily="34" charset="0"/>
-                <a:ea typeface="Yu Gothic" pitchFamily="34" charset="-122"/>
-                <a:cs typeface="Yu Gothic" pitchFamily="34" charset="-120"/>
-              </a:rPr>
-              <a:t>5</a:t>
+            <a:pPr indent="0" marL="0">
+              <a:buNone/>
+            </a:pPr>
+            <a:r>
+              <a:rPr lang="en-US" sz="1600" dirty="0">
+                <a:solidFill>
+                  <a:schemeClr val="tx1"/>
+                </a:solidFill>
+                <a:latin typeface="Yu Gothic" pitchFamily="34" charset="0"/>
+                <a:ea typeface="Yu Gothic" pitchFamily="34" charset="-122"/>
+                <a:cs typeface="Yu Gothic" pitchFamily="34" charset="-120"/>
+              </a:rPr>
+              <a:t>ワークフローのシェルを、3 通りで実行</a:t>
             </a:r>
             <a:endParaRPr lang="en-US" sz="1600" dirty="0"/>
           </a:p>
@@ -6575,233 +7420,18 @@
       </p:sp>
       <p:sp>
         <p:nvSpPr>
-          <p:cNvPr id="21" name="Text 19"/>
-          <p:cNvSpPr txBox="1"/>
-          <p:nvPr/>
-        </p:nvSpPr>
-        <p:spPr>
-          <a:xfrm>
-            <a:off x="1280160" y="4617720"/>
-            <a:ext cx="2651760" cy="640080"/>
-          </a:xfrm>
-          <a:prstGeom prst="rect">
-            <a:avLst/>
-          </a:prstGeom>
-          <a:noFill/>
-          <a:ln/>
-        </p:spPr>
-        <p:txBody>
-          <a:bodyPr wrap="square" lIns="0" tIns="0" rIns="0" bIns="0" rtlCol="0" anchor="ctr"/>
-          <a:lstStyle/>
-          <a:p>
-            <a:pPr indent="0" marL="0">
-              <a:buNone/>
-            </a:pPr>
-            <a:r>
-              <a:rPr lang="en-US" sz="1800" b="1" dirty="0">
-                <a:solidFill>
-                  <a:schemeClr val="tx2"/>
-                </a:solidFill>
-                <a:latin typeface="Yu Gothic" pitchFamily="34" charset="0"/>
-                <a:ea typeface="Yu Gothic" pitchFamily="34" charset="-122"/>
-                <a:cs typeface="Yu Gothic" pitchFamily="34" charset="-120"/>
-              </a:rPr>
-              <a:t>CI に組み込む</a:t>
-            </a:r>
-            <a:endParaRPr lang="en-US" sz="1800" dirty="0"/>
-          </a:p>
-        </p:txBody>
-      </p:sp>
-      <p:sp>
-        <p:nvSpPr>
-          <p:cNvPr id="22" name="Text 20"/>
-          <p:cNvSpPr txBox="1"/>
-          <p:nvPr/>
-        </p:nvSpPr>
-        <p:spPr>
-          <a:xfrm>
-            <a:off x="3931920" y="4617720"/>
-            <a:ext cx="3566160" cy="640080"/>
-          </a:xfrm>
-          <a:prstGeom prst="rect">
-            <a:avLst/>
-          </a:prstGeom>
-          <a:noFill/>
-          <a:ln/>
-        </p:spPr>
-        <p:txBody>
-          <a:bodyPr wrap="square" lIns="0" tIns="0" rIns="0" bIns="0" rtlCol="0" anchor="ctr"/>
-          <a:lstStyle/>
-          <a:p>
-            <a:pPr indent="0" marL="0">
-              <a:buNone/>
-            </a:pPr>
-            <a:r>
-              <a:rPr lang="en-US" sz="1400" dirty="0">
-                <a:solidFill>
-                  <a:schemeClr val="tx1"/>
-                </a:solidFill>
-                <a:latin typeface="Yu Gothic" pitchFamily="34" charset="0"/>
-                <a:ea typeface="Yu Gothic" pitchFamily="34" charset="-122"/>
-                <a:cs typeface="Yu Gothic" pitchFamily="34" charset="-120"/>
-              </a:rPr>
-              <a:t>自動で探して照合し、要約にも表示</a:t>
-            </a:r>
-            <a:endParaRPr lang="en-US" sz="1400" dirty="0"/>
-          </a:p>
-        </p:txBody>
-      </p:sp>
-      <p:sp>
-        <p:nvSpPr>
-          <p:cNvPr id="23" name="段階の円 6"/>
+          <p:cNvPr id="20" name="制約のカード"/>
           <p:cNvSpPr/>
           <p:nvPr/>
         </p:nvSpPr>
         <p:spPr>
           <a:xfrm>
-            <a:off x="548640" y="5468112"/>
-            <a:ext cx="502920" cy="502920"/>
-          </a:xfrm>
-          <a:prstGeom prst="ellipse">
-            <a:avLst/>
-          </a:prstGeom>
-          <a:solidFill>
-            <a:schemeClr val="accent1"/>
-          </a:solidFill>
-          <a:ln/>
-        </p:spPr>
-      </p:sp>
-      <p:sp>
-        <p:nvSpPr>
-          <p:cNvPr id="24" name="Text 22"/>
-          <p:cNvSpPr txBox="1"/>
-          <p:nvPr/>
-        </p:nvSpPr>
-        <p:spPr>
-          <a:xfrm>
-            <a:off x="548640" y="5468112"/>
-            <a:ext cx="502920" cy="502920"/>
-          </a:xfrm>
-          <a:prstGeom prst="rect">
-            <a:avLst/>
-          </a:prstGeom>
-          <a:noFill/>
-          <a:ln/>
-        </p:spPr>
-        <p:txBody>
-          <a:bodyPr wrap="square" lIns="0" tIns="0" rIns="0" bIns="0" rtlCol="0" anchor="ctr"/>
-          <a:lstStyle/>
-          <a:p>
-            <a:pPr algn="ctr" indent="0" marL="0">
-              <a:buNone/>
-            </a:pPr>
-            <a:r>
-              <a:rPr lang="en-US" sz="1600" b="1" dirty="0">
-                <a:solidFill>
-                  <a:schemeClr val="bg1"/>
-                </a:solidFill>
-                <a:latin typeface="Yu Gothic" pitchFamily="34" charset="0"/>
-                <a:ea typeface="Yu Gothic" pitchFamily="34" charset="-122"/>
-                <a:cs typeface="Yu Gothic" pitchFamily="34" charset="-120"/>
-              </a:rPr>
-              <a:t>6</a:t>
-            </a:r>
-            <a:endParaRPr lang="en-US" sz="1600" dirty="0"/>
-          </a:p>
-        </p:txBody>
-      </p:sp>
-      <p:sp>
-        <p:nvSpPr>
-          <p:cNvPr id="25" name="Text 23"/>
-          <p:cNvSpPr txBox="1"/>
-          <p:nvPr/>
-        </p:nvSpPr>
-        <p:spPr>
-          <a:xfrm>
-            <a:off x="1280160" y="5394960"/>
-            <a:ext cx="2651760" cy="640080"/>
-          </a:xfrm>
-          <a:prstGeom prst="rect">
-            <a:avLst/>
-          </a:prstGeom>
-          <a:noFill/>
-          <a:ln/>
-        </p:spPr>
-        <p:txBody>
-          <a:bodyPr wrap="square" lIns="0" tIns="0" rIns="0" bIns="0" rtlCol="0" anchor="ctr"/>
-          <a:lstStyle/>
-          <a:p>
-            <a:pPr indent="0" marL="0">
-              <a:buNone/>
-            </a:pPr>
-            <a:r>
-              <a:rPr lang="en-US" sz="1800" b="1" dirty="0">
-                <a:solidFill>
-                  <a:schemeClr val="tx2"/>
-                </a:solidFill>
-                <a:latin typeface="Yu Gothic" pitchFamily="34" charset="0"/>
-                <a:ea typeface="Yu Gothic" pitchFamily="34" charset="-122"/>
-                <a:cs typeface="Yu Gothic" pitchFamily="34" charset="-120"/>
-              </a:rPr>
-              <a:t>GHSA と突き合わせる</a:t>
-            </a:r>
-            <a:endParaRPr lang="en-US" sz="1800" dirty="0"/>
-          </a:p>
-        </p:txBody>
-      </p:sp>
-      <p:sp>
-        <p:nvSpPr>
-          <p:cNvPr id="26" name="Text 24"/>
-          <p:cNvSpPr txBox="1"/>
-          <p:nvPr/>
-        </p:nvSpPr>
-        <p:spPr>
-          <a:xfrm>
-            <a:off x="3931920" y="5394960"/>
-            <a:ext cx="3566160" cy="640080"/>
-          </a:xfrm>
-          <a:prstGeom prst="rect">
-            <a:avLst/>
-          </a:prstGeom>
-          <a:noFill/>
-          <a:ln/>
-        </p:spPr>
-        <p:txBody>
-          <a:bodyPr wrap="square" lIns="0" tIns="0" rIns="0" bIns="0" rtlCol="0" anchor="ctr"/>
-          <a:lstStyle/>
-          <a:p>
-            <a:pPr indent="0" marL="0">
-              <a:buNone/>
-            </a:pPr>
-            <a:r>
-              <a:rPr lang="en-US" sz="1400" dirty="0">
-                <a:solidFill>
-                  <a:schemeClr val="tx1"/>
-                </a:solidFill>
-                <a:latin typeface="Yu Gothic" pitchFamily="34" charset="0"/>
-                <a:ea typeface="Yu Gothic" pitchFamily="34" charset="-122"/>
-                <a:cs typeface="Yu Gothic" pitchFamily="34" charset="-120"/>
-              </a:rPr>
-              <a:t>実データで、16 件中 14 件が一致</a:t>
-            </a:r>
-            <a:endParaRPr lang="en-US" sz="1400" dirty="0"/>
-          </a:p>
-        </p:txBody>
-      </p:sp>
-      <p:sp>
-        <p:nvSpPr>
-          <p:cNvPr id="27" name="数字のカード 1"/>
-          <p:cNvSpPr/>
-          <p:nvPr/>
-        </p:nvSpPr>
-        <p:spPr>
-          <a:xfrm>
-            <a:off x="7863840" y="1554480"/>
-            <a:ext cx="3749040" cy="2103120"/>
+            <a:off x="7772400" y="1463040"/>
+            <a:ext cx="3840480" cy="4572000"/>
           </a:xfrm>
           <a:prstGeom prst="roundRect">
             <a:avLst>
-              <a:gd name="adj" fmla="val 5217"/>
+              <a:gd name="adj" fmla="val 2857"/>
             </a:avLst>
           </a:prstGeom>
           <a:solidFill>
@@ -6812,14 +7442,58 @@
       </p:sp>
       <p:sp>
         <p:nvSpPr>
-          <p:cNvPr id="28" name="Text 26"/>
+          <p:cNvPr id="21" name="制約 円"/>
+          <p:cNvSpPr/>
+          <p:nvPr/>
+        </p:nvSpPr>
+        <p:spPr>
+          <a:xfrm>
+            <a:off x="8092440" y="1691640"/>
+            <a:ext cx="640080" cy="640080"/>
+          </a:xfrm>
+          <a:prstGeom prst="ellipse">
+            <a:avLst/>
+          </a:prstGeom>
+          <a:solidFill>
+            <a:schemeClr val="accent2"/>
+          </a:solidFill>
+          <a:ln/>
+        </p:spPr>
+      </p:sp>
+      <p:pic>
+        <p:nvPicPr>
+          <p:cNvPr id="22" name="Image 5" descr="制約">    </p:cNvPr>
+          <p:cNvPicPr>
+            <a:picLocks noChangeAspect="1"/>
+          </p:cNvPicPr>
+          <p:nvPr/>
+        </p:nvPicPr>
+        <p:blipFill>
+          <a:blip r:embed="rId6"/>
+          <a:stretch>
+            <a:fillRect/>
+          </a:stretch>
+        </p:blipFill>
+        <p:spPr>
+          <a:xfrm>
+            <a:off x="8252460" y="1851660"/>
+            <a:ext cx="320040" cy="320040"/>
+          </a:xfrm>
+          <a:prstGeom prst="rect">
+            <a:avLst/>
+          </a:prstGeom>
+        </p:spPr>
+      </p:pic>
+      <p:sp>
+        <p:nvSpPr>
+          <p:cNvPr id="23" name="Text 15"/>
           <p:cNvSpPr txBox="1"/>
           <p:nvPr/>
         </p:nvSpPr>
         <p:spPr>
           <a:xfrm>
-            <a:off x="8138160" y="1828800"/>
-            <a:ext cx="3200400" cy="1005840"/>
+            <a:off x="8915400" y="1691640"/>
+            <a:ext cx="2560320" cy="640080"/>
           </a:xfrm>
           <a:prstGeom prst="rect">
             <a:avLst/>
@@ -6835,30 +7509,30 @@
               <a:buNone/>
             </a:pPr>
             <a:r>
-              <a:rPr lang="en-US" sz="4800" b="1" dirty="0">
-                <a:solidFill>
-                  <a:schemeClr val="accent1"/>
-                </a:solidFill>
-                <a:latin typeface="Yu Gothic" pitchFamily="34" charset="0"/>
-                <a:ea typeface="Yu Gothic" pitchFamily="34" charset="-122"/>
-                <a:cs typeface="Yu Gothic" pitchFamily="34" charset="-120"/>
-              </a:rPr>
-              <a:t>22 → 11</a:t>
-            </a:r>
-            <a:endParaRPr lang="en-US" sz="4800" dirty="0"/>
-          </a:p>
-        </p:txBody>
-      </p:sp>
-      <p:sp>
-        <p:nvSpPr>
-          <p:cNvPr id="29" name="Text 27"/>
+              <a:rPr lang="en-US" sz="2000" b="1" dirty="0">
+                <a:solidFill>
+                  <a:schemeClr val="tx2"/>
+                </a:solidFill>
+                <a:latin typeface="Yu Gothic" pitchFamily="34" charset="0"/>
+                <a:ea typeface="Yu Gothic" pitchFamily="34" charset="-122"/>
+                <a:cs typeface="Yu Gothic" pitchFamily="34" charset="-120"/>
+              </a:rPr>
+              <a:t>分かった制約</a:t>
+            </a:r>
+            <a:endParaRPr lang="en-US" sz="2000" dirty="0"/>
+          </a:p>
+        </p:txBody>
+      </p:sp>
+      <p:sp>
+        <p:nvSpPr>
+          <p:cNvPr id="24" name="Text 16"/>
           <p:cNvSpPr txBox="1"/>
           <p:nvPr/>
         </p:nvSpPr>
         <p:spPr>
           <a:xfrm>
-            <a:off x="8138160" y="2880360"/>
-            <a:ext cx="3200400" cy="640080"/>
+            <a:off x="8092440" y="2651760"/>
+            <a:ext cx="3200400" cy="3108960"/>
           </a:xfrm>
           <a:prstGeom prst="rect">
             <a:avLst/>
@@ -6870,11 +7544,15 @@
           <a:bodyPr wrap="square" lIns="0" tIns="0" rIns="0" bIns="0" rtlCol="0" anchor="t"/>
           <a:lstStyle/>
           <a:p>
-            <a:pPr indent="0" marL="0">
-              <a:buNone/>
-            </a:pPr>
-            <a:r>
-              <a:rPr lang="en-US" sz="1400" dirty="0">
+            <a:pPr marL="342900" indent="-342900">
+              <a:spcAft>
+                <a:spcPts val="1400"/>
+              </a:spcAft>
+              <a:buSzPct val="100000"/>
+              <a:buChar char="•"/>
+            </a:pPr>
+            <a:r>
+              <a:rPr lang="en-US" sz="1600" dirty="0">
                 <a:solidFill>
                   <a:schemeClr val="tx1"/>
                 </a:solidFill>
@@ -6882,99 +7560,20 @@
                 <a:ea typeface="Yu Gothic" pitchFamily="34" charset="-122"/>
                 <a:cs typeface="Yu Gothic" pitchFamily="34" charset="-120"/>
               </a:rPr>
-              <a:t>CVE の重複を解消(件数)</a:t>
-            </a:r>
-            <a:endParaRPr lang="en-US" sz="1400" dirty="0"/>
-          </a:p>
-        </p:txBody>
-      </p:sp>
-      <p:sp>
-        <p:nvSpPr>
-          <p:cNvPr id="30" name="数字のカード 2"/>
-          <p:cNvSpPr/>
-          <p:nvPr/>
-        </p:nvSpPr>
-        <p:spPr>
-          <a:xfrm>
-            <a:off x="7863840" y="3886200"/>
-            <a:ext cx="3749040" cy="2103120"/>
-          </a:xfrm>
-          <a:prstGeom prst="roundRect">
-            <a:avLst>
-              <a:gd name="adj" fmla="val 5217"/>
-            </a:avLst>
-          </a:prstGeom>
-          <a:solidFill>
-            <a:schemeClr val="bg2"/>
-          </a:solidFill>
-          <a:ln/>
-        </p:spPr>
-      </p:sp>
-      <p:sp>
-        <p:nvSpPr>
-          <p:cNvPr id="31" name="Text 29"/>
-          <p:cNvSpPr txBox="1"/>
-          <p:nvPr/>
-        </p:nvSpPr>
-        <p:spPr>
-          <a:xfrm>
-            <a:off x="8138160" y="4160520"/>
-            <a:ext cx="3200400" cy="1005840"/>
-          </a:xfrm>
-          <a:prstGeom prst="rect">
-            <a:avLst/>
-          </a:prstGeom>
-          <a:noFill/>
-          <a:ln/>
-        </p:spPr>
-        <p:txBody>
-          <a:bodyPr wrap="square" lIns="0" tIns="0" rIns="0" bIns="0" rtlCol="0" anchor="ctr"/>
-          <a:lstStyle/>
-          <a:p>
-            <a:pPr indent="0" marL="0">
-              <a:buNone/>
-            </a:pPr>
-            <a:r>
-              <a:rPr lang="en-US" sz="4800" b="1" dirty="0">
-                <a:solidFill>
-                  <a:schemeClr val="accent1"/>
-                </a:solidFill>
-                <a:latin typeface="Yu Gothic" pitchFamily="34" charset="0"/>
-                <a:ea typeface="Yu Gothic" pitchFamily="34" charset="-122"/>
-                <a:cs typeface="Yu Gothic" pitchFamily="34" charset="-120"/>
-              </a:rPr>
-              <a:t>14 / 16</a:t>
-            </a:r>
-            <a:endParaRPr lang="en-US" sz="4800" dirty="0"/>
-          </a:p>
-        </p:txBody>
-      </p:sp>
-      <p:sp>
-        <p:nvSpPr>
-          <p:cNvPr id="32" name="Text 30"/>
-          <p:cNvSpPr txBox="1"/>
-          <p:nvPr/>
-        </p:nvSpPr>
-        <p:spPr>
-          <a:xfrm>
-            <a:off x="8138160" y="5212080"/>
-            <a:ext cx="3200400" cy="640080"/>
-          </a:xfrm>
-          <a:prstGeom prst="rect">
-            <a:avLst/>
-          </a:prstGeom>
-          <a:noFill/>
-          <a:ln/>
-        </p:spPr>
-        <p:txBody>
-          <a:bodyPr wrap="square" lIns="0" tIns="0" rIns="0" bIns="0" rtlCol="0" anchor="t"/>
-          <a:lstStyle/>
-          <a:p>
-            <a:pPr indent="0" marL="0">
-              <a:buNone/>
-            </a:pPr>
-            <a:r>
-              <a:rPr lang="en-US" sz="1400" dirty="0">
+              <a:t>OSV と GitHub の API は許可制(403)</a:t>
+            </a:r>
+            <a:endParaRPr lang="en-US" sz="1600" dirty="0"/>
+          </a:p>
+          <a:p>
+            <a:pPr marL="342900" indent="-342900">
+              <a:spcAft>
+                <a:spcPts val="1400"/>
+              </a:spcAft>
+              <a:buSzPct val="100000"/>
+              <a:buChar char="•"/>
+            </a:pPr>
+            <a:r>
+              <a:rPr lang="en-US" sz="1600" dirty="0">
                 <a:solidFill>
                   <a:schemeClr val="tx1"/>
                 </a:solidFill>
@@ -6982,9 +7581,30 @@
                 <a:ea typeface="Yu Gothic" pitchFamily="34" charset="-122"/>
                 <a:cs typeface="Yu Gothic" pitchFamily="34" charset="-120"/>
               </a:rPr>
-              <a:t>OSV と GHSA の修正版が一致</a:t>
-            </a:r>
-            <a:endParaRPr lang="en-US" sz="1400" dirty="0"/>
+              <a:t>LLM(Ollama)にも届かない</a:t>
+            </a:r>
+            <a:endParaRPr lang="en-US" sz="1600" dirty="0"/>
+          </a:p>
+          <a:p>
+            <a:pPr marL="342900" indent="-342900">
+              <a:spcAft>
+                <a:spcPts val="1400"/>
+              </a:spcAft>
+              <a:buSzPct val="100000"/>
+              <a:buChar char="•"/>
+            </a:pPr>
+            <a:r>
+              <a:rPr lang="en-US" sz="1600" dirty="0">
+                <a:solidFill>
+                  <a:schemeClr val="tx1"/>
+                </a:solidFill>
+                <a:latin typeface="Yu Gothic" pitchFamily="34" charset="0"/>
+                <a:ea typeface="Yu Gothic" pitchFamily="34" charset="-122"/>
+                <a:cs typeface="Yu Gothic" pitchFamily="34" charset="-120"/>
+              </a:rPr>
+              <a:t>だから、実通信は PC と Actions で確認する</a:t>
+            </a:r>
+            <a:endParaRPr lang="en-US" sz="1600" dirty="0"/>
           </a:p>
         </p:txBody>
       </p:sp>
@@ -7090,7 +7710,7 @@
                   <a:schemeClr val="tx2"/>
                 </a:solidFill>
               </a:rPr>
-              <a:t>テストの方法</a:t>
+              <a:t>例: dep_cve_check.py の成長</a:t>
             </a:r>
             <a:endParaRPr lang="en-US" sz="3400" dirty="0"/>
           </a:p>
@@ -7098,18 +7718,840 @@
       </p:sp>
       <p:sp>
         <p:nvSpPr>
-          <p:cNvPr id="3" name="テストのカード 1"/>
+          <p:cNvPr id="3" name="段階の円 1"/>
           <p:cNvSpPr/>
           <p:nvPr/>
         </p:nvSpPr>
         <p:spPr>
           <a:xfrm>
-            <a:off x="548640" y="1463040"/>
-            <a:ext cx="3566160" cy="2194560"/>
+            <a:off x="548640" y="1581912"/>
+            <a:ext cx="502920" cy="502920"/>
+          </a:xfrm>
+          <a:prstGeom prst="ellipse">
+            <a:avLst/>
+          </a:prstGeom>
+          <a:solidFill>
+            <a:schemeClr val="accent1"/>
+          </a:solidFill>
+          <a:ln/>
+        </p:spPr>
+      </p:sp>
+      <p:sp>
+        <p:nvSpPr>
+          <p:cNvPr id="4" name="Text 2"/>
+          <p:cNvSpPr txBox="1"/>
+          <p:nvPr/>
+        </p:nvSpPr>
+        <p:spPr>
+          <a:xfrm>
+            <a:off x="548640" y="1581912"/>
+            <a:ext cx="502920" cy="502920"/>
+          </a:xfrm>
+          <a:prstGeom prst="rect">
+            <a:avLst/>
+          </a:prstGeom>
+          <a:noFill/>
+          <a:ln/>
+        </p:spPr>
+        <p:txBody>
+          <a:bodyPr wrap="square" lIns="0" tIns="0" rIns="0" bIns="0" rtlCol="0" anchor="ctr"/>
+          <a:lstStyle/>
+          <a:p>
+            <a:pPr algn="ctr" indent="0" marL="0">
+              <a:buNone/>
+            </a:pPr>
+            <a:r>
+              <a:rPr lang="en-US" sz="1600" b="1" dirty="0">
+                <a:solidFill>
+                  <a:schemeClr val="bg1"/>
+                </a:solidFill>
+                <a:latin typeface="Yu Gothic" pitchFamily="34" charset="0"/>
+                <a:ea typeface="Yu Gothic" pitchFamily="34" charset="-122"/>
+                <a:cs typeface="Yu Gothic" pitchFamily="34" charset="-120"/>
+              </a:rPr>
+              <a:t>1</a:t>
+            </a:r>
+            <a:endParaRPr lang="en-US" sz="1600" dirty="0"/>
+          </a:p>
+        </p:txBody>
+      </p:sp>
+      <p:sp>
+        <p:nvSpPr>
+          <p:cNvPr id="5" name="Text 3"/>
+          <p:cNvSpPr txBox="1"/>
+          <p:nvPr/>
+        </p:nvSpPr>
+        <p:spPr>
+          <a:xfrm>
+            <a:off x="1280160" y="1508760"/>
+            <a:ext cx="2651760" cy="640080"/>
+          </a:xfrm>
+          <a:prstGeom prst="rect">
+            <a:avLst/>
+          </a:prstGeom>
+          <a:noFill/>
+          <a:ln/>
+        </p:spPr>
+        <p:txBody>
+          <a:bodyPr wrap="square" lIns="0" tIns="0" rIns="0" bIns="0" rtlCol="0" anchor="ctr"/>
+          <a:lstStyle/>
+          <a:p>
+            <a:pPr indent="0" marL="0">
+              <a:buNone/>
+            </a:pPr>
+            <a:r>
+              <a:rPr lang="en-US" sz="1800" b="1" dirty="0">
+                <a:solidFill>
+                  <a:schemeClr val="tx2"/>
+                </a:solidFill>
+                <a:latin typeface="Yu Gothic" pitchFamily="34" charset="0"/>
+                <a:ea typeface="Yu Gothic" pitchFamily="34" charset="-122"/>
+                <a:cs typeface="Yu Gothic" pitchFamily="34" charset="-120"/>
+              </a:rPr>
+              <a:t>試作</a:t>
+            </a:r>
+            <a:endParaRPr lang="en-US" sz="1800" dirty="0"/>
+          </a:p>
+        </p:txBody>
+      </p:sp>
+      <p:sp>
+        <p:nvSpPr>
+          <p:cNvPr id="6" name="Text 4"/>
+          <p:cNvSpPr txBox="1"/>
+          <p:nvPr/>
+        </p:nvSpPr>
+        <p:spPr>
+          <a:xfrm>
+            <a:off x="3931920" y="1508760"/>
+            <a:ext cx="3566160" cy="640080"/>
+          </a:xfrm>
+          <a:prstGeom prst="rect">
+            <a:avLst/>
+          </a:prstGeom>
+          <a:noFill/>
+          <a:ln/>
+        </p:spPr>
+        <p:txBody>
+          <a:bodyPr wrap="square" lIns="0" tIns="0" rIns="0" bIns="0" rtlCol="0" anchor="ctr"/>
+          <a:lstStyle/>
+          <a:p>
+            <a:pPr indent="0" marL="0">
+              <a:buNone/>
+            </a:pPr>
+            <a:r>
+              <a:rPr lang="en-US" sz="1400" dirty="0">
+                <a:solidFill>
+                  <a:schemeClr val="tx1"/>
+                </a:solidFill>
+                <a:latin typeface="Yu Gothic" pitchFamily="34" charset="0"/>
+                <a:ea typeface="Yu Gothic" pitchFamily="34" charset="-122"/>
+                <a:cs typeface="Yu Gothic" pitchFamily="34" charset="-120"/>
+              </a:rPr>
+              <a:t>OSV に問い合わせて、SARIF を出す</a:t>
+            </a:r>
+            <a:endParaRPr lang="en-US" sz="1400" dirty="0"/>
+          </a:p>
+        </p:txBody>
+      </p:sp>
+      <p:sp>
+        <p:nvSpPr>
+          <p:cNvPr id="7" name="段階の円 2"/>
+          <p:cNvSpPr/>
+          <p:nvPr/>
+        </p:nvSpPr>
+        <p:spPr>
+          <a:xfrm>
+            <a:off x="548640" y="2359152"/>
+            <a:ext cx="502920" cy="502920"/>
+          </a:xfrm>
+          <a:prstGeom prst="ellipse">
+            <a:avLst/>
+          </a:prstGeom>
+          <a:solidFill>
+            <a:schemeClr val="accent1"/>
+          </a:solidFill>
+          <a:ln/>
+        </p:spPr>
+      </p:sp>
+      <p:sp>
+        <p:nvSpPr>
+          <p:cNvPr id="8" name="Text 6"/>
+          <p:cNvSpPr txBox="1"/>
+          <p:nvPr/>
+        </p:nvSpPr>
+        <p:spPr>
+          <a:xfrm>
+            <a:off x="548640" y="2359152"/>
+            <a:ext cx="502920" cy="502920"/>
+          </a:xfrm>
+          <a:prstGeom prst="rect">
+            <a:avLst/>
+          </a:prstGeom>
+          <a:noFill/>
+          <a:ln/>
+        </p:spPr>
+        <p:txBody>
+          <a:bodyPr wrap="square" lIns="0" tIns="0" rIns="0" bIns="0" rtlCol="0" anchor="ctr"/>
+          <a:lstStyle/>
+          <a:p>
+            <a:pPr algn="ctr" indent="0" marL="0">
+              <a:buNone/>
+            </a:pPr>
+            <a:r>
+              <a:rPr lang="en-US" sz="1600" b="1" dirty="0">
+                <a:solidFill>
+                  <a:schemeClr val="bg1"/>
+                </a:solidFill>
+                <a:latin typeface="Yu Gothic" pitchFamily="34" charset="0"/>
+                <a:ea typeface="Yu Gothic" pitchFamily="34" charset="-122"/>
+                <a:cs typeface="Yu Gothic" pitchFamily="34" charset="-120"/>
+              </a:rPr>
+              <a:t>2</a:t>
+            </a:r>
+            <a:endParaRPr lang="en-US" sz="1600" dirty="0"/>
+          </a:p>
+        </p:txBody>
+      </p:sp>
+      <p:sp>
+        <p:nvSpPr>
+          <p:cNvPr id="9" name="Text 7"/>
+          <p:cNvSpPr txBox="1"/>
+          <p:nvPr/>
+        </p:nvSpPr>
+        <p:spPr>
+          <a:xfrm>
+            <a:off x="1280160" y="2286000"/>
+            <a:ext cx="2651760" cy="640080"/>
+          </a:xfrm>
+          <a:prstGeom prst="rect">
+            <a:avLst/>
+          </a:prstGeom>
+          <a:noFill/>
+          <a:ln/>
+        </p:spPr>
+        <p:txBody>
+          <a:bodyPr wrap="square" lIns="0" tIns="0" rIns="0" bIns="0" rtlCol="0" anchor="ctr"/>
+          <a:lstStyle/>
+          <a:p>
+            <a:pPr indent="0" marL="0">
+              <a:buNone/>
+            </a:pPr>
+            <a:r>
+              <a:rPr lang="en-US" sz="1800" b="1" dirty="0">
+                <a:solidFill>
+                  <a:schemeClr val="tx2"/>
+                </a:solidFill>
+                <a:latin typeface="Yu Gothic" pitchFamily="34" charset="0"/>
+                <a:ea typeface="Yu Gothic" pitchFamily="34" charset="-122"/>
+                <a:cs typeface="Yu Gothic" pitchFamily="34" charset="-120"/>
+              </a:rPr>
+              <a:t>実通信で検証</a:t>
+            </a:r>
+            <a:endParaRPr lang="en-US" sz="1800" dirty="0"/>
+          </a:p>
+        </p:txBody>
+      </p:sp>
+      <p:sp>
+        <p:nvSpPr>
+          <p:cNvPr id="10" name="Text 8"/>
+          <p:cNvSpPr txBox="1"/>
+          <p:nvPr/>
+        </p:nvSpPr>
+        <p:spPr>
+          <a:xfrm>
+            <a:off x="3931920" y="2286000"/>
+            <a:ext cx="3566160" cy="640080"/>
+          </a:xfrm>
+          <a:prstGeom prst="rect">
+            <a:avLst/>
+          </a:prstGeom>
+          <a:noFill/>
+          <a:ln/>
+        </p:spPr>
+        <p:txBody>
+          <a:bodyPr wrap="square" lIns="0" tIns="0" rIns="0" bIns="0" rtlCol="0" anchor="ctr"/>
+          <a:lstStyle/>
+          <a:p>
+            <a:pPr indent="0" marL="0">
+              <a:buNone/>
+            </a:pPr>
+            <a:r>
+              <a:rPr lang="en-US" sz="1400" dirty="0">
+                <a:solidFill>
+                  <a:schemeClr val="tx1"/>
+                </a:solidFill>
+                <a:latin typeface="Yu Gothic" pitchFamily="34" charset="0"/>
+                <a:ea typeface="Yu Gothic" pitchFamily="34" charset="-122"/>
+                <a:cs typeface="Yu Gothic" pitchFamily="34" charset="-120"/>
+              </a:rPr>
+              <a:t>古い版を渡して、22 件が出た</a:t>
+            </a:r>
+            <a:endParaRPr lang="en-US" sz="1400" dirty="0"/>
+          </a:p>
+        </p:txBody>
+      </p:sp>
+      <p:sp>
+        <p:nvSpPr>
+          <p:cNvPr id="11" name="段階の円 3"/>
+          <p:cNvSpPr/>
+          <p:nvPr/>
+        </p:nvSpPr>
+        <p:spPr>
+          <a:xfrm>
+            <a:off x="548640" y="3136392"/>
+            <a:ext cx="502920" cy="502920"/>
+          </a:xfrm>
+          <a:prstGeom prst="ellipse">
+            <a:avLst/>
+          </a:prstGeom>
+          <a:solidFill>
+            <a:schemeClr val="accent1"/>
+          </a:solidFill>
+          <a:ln/>
+        </p:spPr>
+      </p:sp>
+      <p:sp>
+        <p:nvSpPr>
+          <p:cNvPr id="12" name="Text 10"/>
+          <p:cNvSpPr txBox="1"/>
+          <p:nvPr/>
+        </p:nvSpPr>
+        <p:spPr>
+          <a:xfrm>
+            <a:off x="548640" y="3136392"/>
+            <a:ext cx="502920" cy="502920"/>
+          </a:xfrm>
+          <a:prstGeom prst="rect">
+            <a:avLst/>
+          </a:prstGeom>
+          <a:noFill/>
+          <a:ln/>
+        </p:spPr>
+        <p:txBody>
+          <a:bodyPr wrap="square" lIns="0" tIns="0" rIns="0" bIns="0" rtlCol="0" anchor="ctr"/>
+          <a:lstStyle/>
+          <a:p>
+            <a:pPr algn="ctr" indent="0" marL="0">
+              <a:buNone/>
+            </a:pPr>
+            <a:r>
+              <a:rPr lang="en-US" sz="1600" b="1" dirty="0">
+                <a:solidFill>
+                  <a:schemeClr val="bg1"/>
+                </a:solidFill>
+                <a:latin typeface="Yu Gothic" pitchFamily="34" charset="0"/>
+                <a:ea typeface="Yu Gothic" pitchFamily="34" charset="-122"/>
+                <a:cs typeface="Yu Gothic" pitchFamily="34" charset="-120"/>
+              </a:rPr>
+              <a:t>3</a:t>
+            </a:r>
+            <a:endParaRPr lang="en-US" sz="1600" dirty="0"/>
+          </a:p>
+        </p:txBody>
+      </p:sp>
+      <p:sp>
+        <p:nvSpPr>
+          <p:cNvPr id="13" name="Text 11"/>
+          <p:cNvSpPr txBox="1"/>
+          <p:nvPr/>
+        </p:nvSpPr>
+        <p:spPr>
+          <a:xfrm>
+            <a:off x="1280160" y="3063240"/>
+            <a:ext cx="2651760" cy="640080"/>
+          </a:xfrm>
+          <a:prstGeom prst="rect">
+            <a:avLst/>
+          </a:prstGeom>
+          <a:noFill/>
+          <a:ln/>
+        </p:spPr>
+        <p:txBody>
+          <a:bodyPr wrap="square" lIns="0" tIns="0" rIns="0" bIns="0" rtlCol="0" anchor="ctr"/>
+          <a:lstStyle/>
+          <a:p>
+            <a:pPr indent="0" marL="0">
+              <a:buNone/>
+            </a:pPr>
+            <a:r>
+              <a:rPr lang="en-US" sz="1800" b="1" dirty="0">
+                <a:solidFill>
+                  <a:schemeClr val="tx2"/>
+                </a:solidFill>
+                <a:latin typeface="Yu Gothic" pitchFamily="34" charset="0"/>
+                <a:ea typeface="Yu Gothic" pitchFamily="34" charset="-122"/>
+                <a:cs typeface="Yu Gothic" pitchFamily="34" charset="-120"/>
+              </a:rPr>
+              <a:t>CVE 単位にまとめる</a:t>
+            </a:r>
+            <a:endParaRPr lang="en-US" sz="1800" dirty="0"/>
+          </a:p>
+        </p:txBody>
+      </p:sp>
+      <p:sp>
+        <p:nvSpPr>
+          <p:cNvPr id="14" name="Text 12"/>
+          <p:cNvSpPr txBox="1"/>
+          <p:nvPr/>
+        </p:nvSpPr>
+        <p:spPr>
+          <a:xfrm>
+            <a:off x="3931920" y="3063240"/>
+            <a:ext cx="3566160" cy="640080"/>
+          </a:xfrm>
+          <a:prstGeom prst="rect">
+            <a:avLst/>
+          </a:prstGeom>
+          <a:noFill/>
+          <a:ln/>
+        </p:spPr>
+        <p:txBody>
+          <a:bodyPr wrap="square" lIns="0" tIns="0" rIns="0" bIns="0" rtlCol="0" anchor="ctr"/>
+          <a:lstStyle/>
+          <a:p>
+            <a:pPr indent="0" marL="0">
+              <a:buNone/>
+            </a:pPr>
+            <a:r>
+              <a:rPr lang="en-US" sz="1400" dirty="0">
+                <a:solidFill>
+                  <a:schemeClr val="tx1"/>
+                </a:solidFill>
+                <a:latin typeface="Yu Gothic" pitchFamily="34" charset="0"/>
+                <a:ea typeface="Yu Gothic" pitchFamily="34" charset="-122"/>
+                <a:cs typeface="Yu Gothic" pitchFamily="34" charset="-120"/>
+              </a:rPr>
+              <a:t>同じ CVE が 2 回数えられていた</a:t>
+            </a:r>
+            <a:endParaRPr lang="en-US" sz="1400" dirty="0"/>
+          </a:p>
+        </p:txBody>
+      </p:sp>
+      <p:sp>
+        <p:nvSpPr>
+          <p:cNvPr id="15" name="段階の円 4"/>
+          <p:cNvSpPr/>
+          <p:nvPr/>
+        </p:nvSpPr>
+        <p:spPr>
+          <a:xfrm>
+            <a:off x="548640" y="3913632"/>
+            <a:ext cx="502920" cy="502920"/>
+          </a:xfrm>
+          <a:prstGeom prst="ellipse">
+            <a:avLst/>
+          </a:prstGeom>
+          <a:solidFill>
+            <a:schemeClr val="accent1"/>
+          </a:solidFill>
+          <a:ln/>
+        </p:spPr>
+      </p:sp>
+      <p:sp>
+        <p:nvSpPr>
+          <p:cNvPr id="16" name="Text 14"/>
+          <p:cNvSpPr txBox="1"/>
+          <p:nvPr/>
+        </p:nvSpPr>
+        <p:spPr>
+          <a:xfrm>
+            <a:off x="548640" y="3913632"/>
+            <a:ext cx="502920" cy="502920"/>
+          </a:xfrm>
+          <a:prstGeom prst="rect">
+            <a:avLst/>
+          </a:prstGeom>
+          <a:noFill/>
+          <a:ln/>
+        </p:spPr>
+        <p:txBody>
+          <a:bodyPr wrap="square" lIns="0" tIns="0" rIns="0" bIns="0" rtlCol="0" anchor="ctr"/>
+          <a:lstStyle/>
+          <a:p>
+            <a:pPr algn="ctr" indent="0" marL="0">
+              <a:buNone/>
+            </a:pPr>
+            <a:r>
+              <a:rPr lang="en-US" sz="1600" b="1" dirty="0">
+                <a:solidFill>
+                  <a:schemeClr val="bg1"/>
+                </a:solidFill>
+                <a:latin typeface="Yu Gothic" pitchFamily="34" charset="0"/>
+                <a:ea typeface="Yu Gothic" pitchFamily="34" charset="-122"/>
+                <a:cs typeface="Yu Gothic" pitchFamily="34" charset="-120"/>
+              </a:rPr>
+              <a:t>4</a:t>
+            </a:r>
+            <a:endParaRPr lang="en-US" sz="1600" dirty="0"/>
+          </a:p>
+        </p:txBody>
+      </p:sp>
+      <p:sp>
+        <p:nvSpPr>
+          <p:cNvPr id="17" name="Text 15"/>
+          <p:cNvSpPr txBox="1"/>
+          <p:nvPr/>
+        </p:nvSpPr>
+        <p:spPr>
+          <a:xfrm>
+            <a:off x="1280160" y="3840480"/>
+            <a:ext cx="2651760" cy="640080"/>
+          </a:xfrm>
+          <a:prstGeom prst="rect">
+            <a:avLst/>
+          </a:prstGeom>
+          <a:noFill/>
+          <a:ln/>
+        </p:spPr>
+        <p:txBody>
+          <a:bodyPr wrap="square" lIns="0" tIns="0" rIns="0" bIns="0" rtlCol="0" anchor="ctr"/>
+          <a:lstStyle/>
+          <a:p>
+            <a:pPr indent="0" marL="0">
+              <a:buNone/>
+            </a:pPr>
+            <a:r>
+              <a:rPr lang="en-US" sz="1800" b="1" dirty="0">
+                <a:solidFill>
+                  <a:schemeClr val="tx2"/>
+                </a:solidFill>
+                <a:latin typeface="Yu Gothic" pitchFamily="34" charset="0"/>
+                <a:ea typeface="Yu Gothic" pitchFamily="34" charset="-122"/>
+                <a:cs typeface="Yu Gothic" pitchFamily="34" charset="-120"/>
+              </a:rPr>
+              <a:t>対応を広げる</a:t>
+            </a:r>
+            <a:endParaRPr lang="en-US" sz="1800" dirty="0"/>
+          </a:p>
+        </p:txBody>
+      </p:sp>
+      <p:sp>
+        <p:nvSpPr>
+          <p:cNvPr id="18" name="Text 16"/>
+          <p:cNvSpPr txBox="1"/>
+          <p:nvPr/>
+        </p:nvSpPr>
+        <p:spPr>
+          <a:xfrm>
+            <a:off x="3931920" y="3840480"/>
+            <a:ext cx="3566160" cy="640080"/>
+          </a:xfrm>
+          <a:prstGeom prst="rect">
+            <a:avLst/>
+          </a:prstGeom>
+          <a:noFill/>
+          <a:ln/>
+        </p:spPr>
+        <p:txBody>
+          <a:bodyPr wrap="square" lIns="0" tIns="0" rIns="0" bIns="0" rtlCol="0" anchor="ctr"/>
+          <a:lstStyle/>
+          <a:p>
+            <a:pPr indent="0" marL="0">
+              <a:buNone/>
+            </a:pPr>
+            <a:r>
+              <a:rPr lang="en-US" sz="1400" dirty="0">
+                <a:solidFill>
+                  <a:schemeClr val="tx1"/>
+                </a:solidFill>
+                <a:latin typeface="Yu Gothic" pitchFamily="34" charset="0"/>
+                <a:ea typeface="Yu Gothic" pitchFamily="34" charset="-122"/>
+                <a:cs typeface="Yu Gothic" pitchFamily="34" charset="-120"/>
+              </a:rPr>
+              <a:t>NuGet・poetry・uv・Go(実物で確認)</a:t>
+            </a:r>
+            <a:endParaRPr lang="en-US" sz="1400" dirty="0"/>
+          </a:p>
+        </p:txBody>
+      </p:sp>
+      <p:sp>
+        <p:nvSpPr>
+          <p:cNvPr id="19" name="段階の円 5"/>
+          <p:cNvSpPr/>
+          <p:nvPr/>
+        </p:nvSpPr>
+        <p:spPr>
+          <a:xfrm>
+            <a:off x="548640" y="4690872"/>
+            <a:ext cx="502920" cy="502920"/>
+          </a:xfrm>
+          <a:prstGeom prst="ellipse">
+            <a:avLst/>
+          </a:prstGeom>
+          <a:solidFill>
+            <a:schemeClr val="accent1"/>
+          </a:solidFill>
+          <a:ln/>
+        </p:spPr>
+      </p:sp>
+      <p:sp>
+        <p:nvSpPr>
+          <p:cNvPr id="20" name="Text 18"/>
+          <p:cNvSpPr txBox="1"/>
+          <p:nvPr/>
+        </p:nvSpPr>
+        <p:spPr>
+          <a:xfrm>
+            <a:off x="548640" y="4690872"/>
+            <a:ext cx="502920" cy="502920"/>
+          </a:xfrm>
+          <a:prstGeom prst="rect">
+            <a:avLst/>
+          </a:prstGeom>
+          <a:noFill/>
+          <a:ln/>
+        </p:spPr>
+        <p:txBody>
+          <a:bodyPr wrap="square" lIns="0" tIns="0" rIns="0" bIns="0" rtlCol="0" anchor="ctr"/>
+          <a:lstStyle/>
+          <a:p>
+            <a:pPr algn="ctr" indent="0" marL="0">
+              <a:buNone/>
+            </a:pPr>
+            <a:r>
+              <a:rPr lang="en-US" sz="1600" b="1" dirty="0">
+                <a:solidFill>
+                  <a:schemeClr val="bg1"/>
+                </a:solidFill>
+                <a:latin typeface="Yu Gothic" pitchFamily="34" charset="0"/>
+                <a:ea typeface="Yu Gothic" pitchFamily="34" charset="-122"/>
+                <a:cs typeface="Yu Gothic" pitchFamily="34" charset="-120"/>
+              </a:rPr>
+              <a:t>5</a:t>
+            </a:r>
+            <a:endParaRPr lang="en-US" sz="1600" dirty="0"/>
+          </a:p>
+        </p:txBody>
+      </p:sp>
+      <p:sp>
+        <p:nvSpPr>
+          <p:cNvPr id="21" name="Text 19"/>
+          <p:cNvSpPr txBox="1"/>
+          <p:nvPr/>
+        </p:nvSpPr>
+        <p:spPr>
+          <a:xfrm>
+            <a:off x="1280160" y="4617720"/>
+            <a:ext cx="2651760" cy="640080"/>
+          </a:xfrm>
+          <a:prstGeom prst="rect">
+            <a:avLst/>
+          </a:prstGeom>
+          <a:noFill/>
+          <a:ln/>
+        </p:spPr>
+        <p:txBody>
+          <a:bodyPr wrap="square" lIns="0" tIns="0" rIns="0" bIns="0" rtlCol="0" anchor="ctr"/>
+          <a:lstStyle/>
+          <a:p>
+            <a:pPr indent="0" marL="0">
+              <a:buNone/>
+            </a:pPr>
+            <a:r>
+              <a:rPr lang="en-US" sz="1800" b="1" dirty="0">
+                <a:solidFill>
+                  <a:schemeClr val="tx2"/>
+                </a:solidFill>
+                <a:latin typeface="Yu Gothic" pitchFamily="34" charset="0"/>
+                <a:ea typeface="Yu Gothic" pitchFamily="34" charset="-122"/>
+                <a:cs typeface="Yu Gothic" pitchFamily="34" charset="-120"/>
+              </a:rPr>
+              <a:t>CI に組み込む</a:t>
+            </a:r>
+            <a:endParaRPr lang="en-US" sz="1800" dirty="0"/>
+          </a:p>
+        </p:txBody>
+      </p:sp>
+      <p:sp>
+        <p:nvSpPr>
+          <p:cNvPr id="22" name="Text 20"/>
+          <p:cNvSpPr txBox="1"/>
+          <p:nvPr/>
+        </p:nvSpPr>
+        <p:spPr>
+          <a:xfrm>
+            <a:off x="3931920" y="4617720"/>
+            <a:ext cx="3566160" cy="640080"/>
+          </a:xfrm>
+          <a:prstGeom prst="rect">
+            <a:avLst/>
+          </a:prstGeom>
+          <a:noFill/>
+          <a:ln/>
+        </p:spPr>
+        <p:txBody>
+          <a:bodyPr wrap="square" lIns="0" tIns="0" rIns="0" bIns="0" rtlCol="0" anchor="ctr"/>
+          <a:lstStyle/>
+          <a:p>
+            <a:pPr indent="0" marL="0">
+              <a:buNone/>
+            </a:pPr>
+            <a:r>
+              <a:rPr lang="en-US" sz="1400" dirty="0">
+                <a:solidFill>
+                  <a:schemeClr val="tx1"/>
+                </a:solidFill>
+                <a:latin typeface="Yu Gothic" pitchFamily="34" charset="0"/>
+                <a:ea typeface="Yu Gothic" pitchFamily="34" charset="-122"/>
+                <a:cs typeface="Yu Gothic" pitchFamily="34" charset="-120"/>
+              </a:rPr>
+              <a:t>自動で探して照合し、要約にも表示</a:t>
+            </a:r>
+            <a:endParaRPr lang="en-US" sz="1400" dirty="0"/>
+          </a:p>
+        </p:txBody>
+      </p:sp>
+      <p:sp>
+        <p:nvSpPr>
+          <p:cNvPr id="23" name="段階の円 6"/>
+          <p:cNvSpPr/>
+          <p:nvPr/>
+        </p:nvSpPr>
+        <p:spPr>
+          <a:xfrm>
+            <a:off x="548640" y="5468112"/>
+            <a:ext cx="502920" cy="502920"/>
+          </a:xfrm>
+          <a:prstGeom prst="ellipse">
+            <a:avLst/>
+          </a:prstGeom>
+          <a:solidFill>
+            <a:schemeClr val="accent1"/>
+          </a:solidFill>
+          <a:ln/>
+        </p:spPr>
+      </p:sp>
+      <p:sp>
+        <p:nvSpPr>
+          <p:cNvPr id="24" name="Text 22"/>
+          <p:cNvSpPr txBox="1"/>
+          <p:nvPr/>
+        </p:nvSpPr>
+        <p:spPr>
+          <a:xfrm>
+            <a:off x="548640" y="5468112"/>
+            <a:ext cx="502920" cy="502920"/>
+          </a:xfrm>
+          <a:prstGeom prst="rect">
+            <a:avLst/>
+          </a:prstGeom>
+          <a:noFill/>
+          <a:ln/>
+        </p:spPr>
+        <p:txBody>
+          <a:bodyPr wrap="square" lIns="0" tIns="0" rIns="0" bIns="0" rtlCol="0" anchor="ctr"/>
+          <a:lstStyle/>
+          <a:p>
+            <a:pPr algn="ctr" indent="0" marL="0">
+              <a:buNone/>
+            </a:pPr>
+            <a:r>
+              <a:rPr lang="en-US" sz="1600" b="1" dirty="0">
+                <a:solidFill>
+                  <a:schemeClr val="bg1"/>
+                </a:solidFill>
+                <a:latin typeface="Yu Gothic" pitchFamily="34" charset="0"/>
+                <a:ea typeface="Yu Gothic" pitchFamily="34" charset="-122"/>
+                <a:cs typeface="Yu Gothic" pitchFamily="34" charset="-120"/>
+              </a:rPr>
+              <a:t>6</a:t>
+            </a:r>
+            <a:endParaRPr lang="en-US" sz="1600" dirty="0"/>
+          </a:p>
+        </p:txBody>
+      </p:sp>
+      <p:sp>
+        <p:nvSpPr>
+          <p:cNvPr id="25" name="Text 23"/>
+          <p:cNvSpPr txBox="1"/>
+          <p:nvPr/>
+        </p:nvSpPr>
+        <p:spPr>
+          <a:xfrm>
+            <a:off x="1280160" y="5394960"/>
+            <a:ext cx="2651760" cy="640080"/>
+          </a:xfrm>
+          <a:prstGeom prst="rect">
+            <a:avLst/>
+          </a:prstGeom>
+          <a:noFill/>
+          <a:ln/>
+        </p:spPr>
+        <p:txBody>
+          <a:bodyPr wrap="square" lIns="0" tIns="0" rIns="0" bIns="0" rtlCol="0" anchor="ctr"/>
+          <a:lstStyle/>
+          <a:p>
+            <a:pPr indent="0" marL="0">
+              <a:buNone/>
+            </a:pPr>
+            <a:r>
+              <a:rPr lang="en-US" sz="1800" b="1" dirty="0">
+                <a:solidFill>
+                  <a:schemeClr val="tx2"/>
+                </a:solidFill>
+                <a:latin typeface="Yu Gothic" pitchFamily="34" charset="0"/>
+                <a:ea typeface="Yu Gothic" pitchFamily="34" charset="-122"/>
+                <a:cs typeface="Yu Gothic" pitchFamily="34" charset="-120"/>
+              </a:rPr>
+              <a:t>GHSA と突き合わせる</a:t>
+            </a:r>
+            <a:endParaRPr lang="en-US" sz="1800" dirty="0"/>
+          </a:p>
+        </p:txBody>
+      </p:sp>
+      <p:sp>
+        <p:nvSpPr>
+          <p:cNvPr id="26" name="Text 24"/>
+          <p:cNvSpPr txBox="1"/>
+          <p:nvPr/>
+        </p:nvSpPr>
+        <p:spPr>
+          <a:xfrm>
+            <a:off x="3931920" y="5394960"/>
+            <a:ext cx="3566160" cy="640080"/>
+          </a:xfrm>
+          <a:prstGeom prst="rect">
+            <a:avLst/>
+          </a:prstGeom>
+          <a:noFill/>
+          <a:ln/>
+        </p:spPr>
+        <p:txBody>
+          <a:bodyPr wrap="square" lIns="0" tIns="0" rIns="0" bIns="0" rtlCol="0" anchor="ctr"/>
+          <a:lstStyle/>
+          <a:p>
+            <a:pPr indent="0" marL="0">
+              <a:buNone/>
+            </a:pPr>
+            <a:r>
+              <a:rPr lang="en-US" sz="1400" dirty="0">
+                <a:solidFill>
+                  <a:schemeClr val="tx1"/>
+                </a:solidFill>
+                <a:latin typeface="Yu Gothic" pitchFamily="34" charset="0"/>
+                <a:ea typeface="Yu Gothic" pitchFamily="34" charset="-122"/>
+                <a:cs typeface="Yu Gothic" pitchFamily="34" charset="-120"/>
+              </a:rPr>
+              <a:t>実データで、16 件中 14 件が一致</a:t>
+            </a:r>
+            <a:endParaRPr lang="en-US" sz="1400" dirty="0"/>
+          </a:p>
+        </p:txBody>
+      </p:sp>
+      <p:sp>
+        <p:nvSpPr>
+          <p:cNvPr id="27" name="数字のカード 1"/>
+          <p:cNvSpPr/>
+          <p:nvPr/>
+        </p:nvSpPr>
+        <p:spPr>
+          <a:xfrm>
+            <a:off x="7863840" y="1554480"/>
+            <a:ext cx="3749040" cy="2103120"/>
           </a:xfrm>
           <a:prstGeom prst="roundRect">
             <a:avLst>
-              <a:gd name="adj" fmla="val 5000"/>
+              <a:gd name="adj" fmla="val 5217"/>
             </a:avLst>
           </a:prstGeom>
           <a:solidFill>
@@ -7120,140 +8562,96 @@
       </p:sp>
       <p:sp>
         <p:nvSpPr>
-          <p:cNvPr id="4" name="モック 円"/>
+          <p:cNvPr id="28" name="Text 26"/>
+          <p:cNvSpPr txBox="1"/>
+          <p:nvPr/>
+        </p:nvSpPr>
+        <p:spPr>
+          <a:xfrm>
+            <a:off x="8138160" y="1828800"/>
+            <a:ext cx="3200400" cy="1005840"/>
+          </a:xfrm>
+          <a:prstGeom prst="rect">
+            <a:avLst/>
+          </a:prstGeom>
+          <a:noFill/>
+          <a:ln/>
+        </p:spPr>
+        <p:txBody>
+          <a:bodyPr wrap="square" lIns="0" tIns="0" rIns="0" bIns="0" rtlCol="0" anchor="ctr"/>
+          <a:lstStyle/>
+          <a:p>
+            <a:pPr indent="0" marL="0">
+              <a:buNone/>
+            </a:pPr>
+            <a:r>
+              <a:rPr lang="en-US" sz="4800" b="1" dirty="0">
+                <a:solidFill>
+                  <a:schemeClr val="accent1"/>
+                </a:solidFill>
+                <a:latin typeface="Yu Gothic" pitchFamily="34" charset="0"/>
+                <a:ea typeface="Yu Gothic" pitchFamily="34" charset="-122"/>
+                <a:cs typeface="Yu Gothic" pitchFamily="34" charset="-120"/>
+              </a:rPr>
+              <a:t>22 → 11</a:t>
+            </a:r>
+            <a:endParaRPr lang="en-US" sz="4800" dirty="0"/>
+          </a:p>
+        </p:txBody>
+      </p:sp>
+      <p:sp>
+        <p:nvSpPr>
+          <p:cNvPr id="29" name="Text 27"/>
+          <p:cNvSpPr txBox="1"/>
+          <p:nvPr/>
+        </p:nvSpPr>
+        <p:spPr>
+          <a:xfrm>
+            <a:off x="8138160" y="2880360"/>
+            <a:ext cx="3200400" cy="640080"/>
+          </a:xfrm>
+          <a:prstGeom prst="rect">
+            <a:avLst/>
+          </a:prstGeom>
+          <a:noFill/>
+          <a:ln/>
+        </p:spPr>
+        <p:txBody>
+          <a:bodyPr wrap="square" lIns="0" tIns="0" rIns="0" bIns="0" rtlCol="0" anchor="t"/>
+          <a:lstStyle/>
+          <a:p>
+            <a:pPr indent="0" marL="0">
+              <a:buNone/>
+            </a:pPr>
+            <a:r>
+              <a:rPr lang="en-US" sz="1400" dirty="0">
+                <a:solidFill>
+                  <a:schemeClr val="tx1"/>
+                </a:solidFill>
+                <a:latin typeface="Yu Gothic" pitchFamily="34" charset="0"/>
+                <a:ea typeface="Yu Gothic" pitchFamily="34" charset="-122"/>
+                <a:cs typeface="Yu Gothic" pitchFamily="34" charset="-120"/>
+              </a:rPr>
+              <a:t>CVE の重複を解消(件数)</a:t>
+            </a:r>
+            <a:endParaRPr lang="en-US" sz="1400" dirty="0"/>
+          </a:p>
+        </p:txBody>
+      </p:sp>
+      <p:sp>
+        <p:nvSpPr>
+          <p:cNvPr id="30" name="数字のカード 2"/>
           <p:cNvSpPr/>
           <p:nvPr/>
         </p:nvSpPr>
         <p:spPr>
           <a:xfrm>
-            <a:off x="822960" y="1737360"/>
-            <a:ext cx="685800" cy="685800"/>
-          </a:xfrm>
-          <a:prstGeom prst="ellipse">
-            <a:avLst/>
-          </a:prstGeom>
-          <a:solidFill>
-            <a:schemeClr val="accent1"/>
-          </a:solidFill>
-          <a:ln/>
-        </p:spPr>
-      </p:sp>
-      <p:pic>
-        <p:nvPicPr>
-          <p:cNvPr id="5" name="Image 0" descr="モック">    </p:cNvPr>
-          <p:cNvPicPr>
-            <a:picLocks noChangeAspect="1"/>
-          </p:cNvPicPr>
-          <p:nvPr/>
-        </p:nvPicPr>
-        <p:blipFill>
-          <a:blip r:embed="rId1"/>
-          <a:stretch>
-            <a:fillRect/>
-          </a:stretch>
-        </p:blipFill>
-        <p:spPr>
-          <a:xfrm>
-            <a:off x="994410" y="1908810"/>
-            <a:ext cx="342900" cy="342900"/>
-          </a:xfrm>
-          <a:prstGeom prst="rect">
-            <a:avLst/>
-          </a:prstGeom>
-        </p:spPr>
-      </p:pic>
-      <p:sp>
-        <p:nvSpPr>
-          <p:cNvPr id="6" name="Text 3"/>
-          <p:cNvSpPr txBox="1"/>
-          <p:nvPr/>
-        </p:nvSpPr>
-        <p:spPr>
-          <a:xfrm>
-            <a:off x="1691640" y="1737360"/>
-            <a:ext cx="2286000" cy="685800"/>
-          </a:xfrm>
-          <a:prstGeom prst="rect">
-            <a:avLst/>
-          </a:prstGeom>
-          <a:noFill/>
-          <a:ln/>
-        </p:spPr>
-        <p:txBody>
-          <a:bodyPr wrap="square" lIns="0" tIns="0" rIns="0" bIns="0" rtlCol="0" anchor="ctr"/>
-          <a:lstStyle/>
-          <a:p>
-            <a:pPr indent="0" marL="0">
-              <a:buNone/>
-            </a:pPr>
-            <a:r>
-              <a:rPr lang="en-US" sz="1800" b="1" dirty="0">
-                <a:solidFill>
-                  <a:schemeClr val="tx2"/>
-                </a:solidFill>
-                <a:latin typeface="Yu Gothic" pitchFamily="34" charset="0"/>
-                <a:ea typeface="Yu Gothic" pitchFamily="34" charset="-122"/>
-                <a:cs typeface="Yu Gothic" pitchFamily="34" charset="-120"/>
-              </a:rPr>
-              <a:t>モック</a:t>
-            </a:r>
-            <a:endParaRPr lang="en-US" sz="1800" dirty="0"/>
-          </a:p>
-        </p:txBody>
-      </p:sp>
-      <p:sp>
-        <p:nvSpPr>
-          <p:cNvPr id="7" name="Text 4"/>
-          <p:cNvSpPr txBox="1"/>
-          <p:nvPr/>
-        </p:nvSpPr>
-        <p:spPr>
-          <a:xfrm>
-            <a:off x="822960" y="2651760"/>
-            <a:ext cx="3063240" cy="868680"/>
-          </a:xfrm>
-          <a:prstGeom prst="rect">
-            <a:avLst/>
-          </a:prstGeom>
-          <a:noFill/>
-          <a:ln/>
-        </p:spPr>
-        <p:txBody>
-          <a:bodyPr wrap="square" lIns="0" tIns="0" rIns="0" bIns="0" rtlCol="0" anchor="t"/>
-          <a:lstStyle/>
-          <a:p>
-            <a:pPr indent="0" marL="0">
-              <a:buNone/>
-            </a:pPr>
-            <a:r>
-              <a:rPr lang="en-US" sz="1400" dirty="0">
-                <a:solidFill>
-                  <a:schemeClr val="tx1"/>
-                </a:solidFill>
-                <a:latin typeface="Yu Gothic" pitchFamily="34" charset="0"/>
-                <a:ea typeface="Yu Gothic" pitchFamily="34" charset="-122"/>
-                <a:cs typeface="Yu Gothic" pitchFamily="34" charset="-120"/>
-              </a:rPr>
-              <a:t>外部通信を差し替えて確認</a:t>
-            </a:r>
-            <a:endParaRPr lang="en-US" sz="1400" dirty="0"/>
-          </a:p>
-        </p:txBody>
-      </p:sp>
-      <p:sp>
-        <p:nvSpPr>
-          <p:cNvPr id="8" name="テストのカード 2"/>
-          <p:cNvSpPr/>
-          <p:nvPr/>
-        </p:nvSpPr>
-        <p:spPr>
-          <a:xfrm>
-            <a:off x="4297680" y="1463040"/>
-            <a:ext cx="3566160" cy="2194560"/>
+            <a:off x="7863840" y="3886200"/>
+            <a:ext cx="3749040" cy="2103120"/>
           </a:xfrm>
           <a:prstGeom prst="roundRect">
             <a:avLst>
-              <a:gd name="adj" fmla="val 5000"/>
+              <a:gd name="adj" fmla="val 5217"/>
             </a:avLst>
           </a:prstGeom>
           <a:solidFill>
@@ -7264,58 +8662,14 @@
       </p:sp>
       <p:sp>
         <p:nvSpPr>
-          <p:cNvPr id="9" name="正解つきの的 円"/>
-          <p:cNvSpPr/>
-          <p:nvPr/>
-        </p:nvSpPr>
-        <p:spPr>
-          <a:xfrm>
-            <a:off x="4572000" y="1737360"/>
-            <a:ext cx="685800" cy="685800"/>
-          </a:xfrm>
-          <a:prstGeom prst="ellipse">
-            <a:avLst/>
-          </a:prstGeom>
-          <a:solidFill>
-            <a:schemeClr val="accent1"/>
-          </a:solidFill>
-          <a:ln/>
-        </p:spPr>
-      </p:sp>
-      <p:pic>
-        <p:nvPicPr>
-          <p:cNvPr id="10" name="Image 1" descr="正解つきの的">    </p:cNvPr>
-          <p:cNvPicPr>
-            <a:picLocks noChangeAspect="1"/>
-          </p:cNvPicPr>
-          <p:nvPr/>
-        </p:nvPicPr>
-        <p:blipFill>
-          <a:blip r:embed="rId2"/>
-          <a:stretch>
-            <a:fillRect/>
-          </a:stretch>
-        </p:blipFill>
-        <p:spPr>
-          <a:xfrm>
-            <a:off x="4743450" y="1908810"/>
-            <a:ext cx="342900" cy="342900"/>
-          </a:xfrm>
-          <a:prstGeom prst="rect">
-            <a:avLst/>
-          </a:prstGeom>
-        </p:spPr>
-      </p:pic>
-      <p:sp>
-        <p:nvSpPr>
-          <p:cNvPr id="11" name="Text 7"/>
+          <p:cNvPr id="31" name="Text 29"/>
           <p:cNvSpPr txBox="1"/>
           <p:nvPr/>
         </p:nvSpPr>
         <p:spPr>
           <a:xfrm>
-            <a:off x="5440680" y="1737360"/>
-            <a:ext cx="2286000" cy="685800"/>
+            <a:off x="8138160" y="4160520"/>
+            <a:ext cx="3200400" cy="1005840"/>
           </a:xfrm>
           <a:prstGeom prst="rect">
             <a:avLst/>
@@ -7331,30 +8685,30 @@
               <a:buNone/>
             </a:pPr>
             <a:r>
-              <a:rPr lang="en-US" sz="1800" b="1" dirty="0">
-                <a:solidFill>
-                  <a:schemeClr val="tx2"/>
-                </a:solidFill>
-                <a:latin typeface="Yu Gothic" pitchFamily="34" charset="0"/>
-                <a:ea typeface="Yu Gothic" pitchFamily="34" charset="-122"/>
-                <a:cs typeface="Yu Gothic" pitchFamily="34" charset="-120"/>
-              </a:rPr>
-              <a:t>正解つきの的</a:t>
-            </a:r>
-            <a:endParaRPr lang="en-US" sz="1800" dirty="0"/>
-          </a:p>
-        </p:txBody>
-      </p:sp>
-      <p:sp>
-        <p:nvSpPr>
-          <p:cNvPr id="12" name="Text 8"/>
+              <a:rPr lang="en-US" sz="4800" b="1" dirty="0">
+                <a:solidFill>
+                  <a:schemeClr val="accent1"/>
+                </a:solidFill>
+                <a:latin typeface="Yu Gothic" pitchFamily="34" charset="0"/>
+                <a:ea typeface="Yu Gothic" pitchFamily="34" charset="-122"/>
+                <a:cs typeface="Yu Gothic" pitchFamily="34" charset="-120"/>
+              </a:rPr>
+              <a:t>14 / 16</a:t>
+            </a:r>
+            <a:endParaRPr lang="en-US" sz="4800" dirty="0"/>
+          </a:p>
+        </p:txBody>
+      </p:sp>
+      <p:sp>
+        <p:nvSpPr>
+          <p:cNvPr id="32" name="Text 30"/>
           <p:cNvSpPr txBox="1"/>
           <p:nvPr/>
         </p:nvSpPr>
         <p:spPr>
           <a:xfrm>
-            <a:off x="4572000" y="2651760"/>
-            <a:ext cx="3063240" cy="868680"/>
+            <a:off x="8138160" y="5212080"/>
+            <a:ext cx="3200400" cy="640080"/>
           </a:xfrm>
           <a:prstGeom prst="rect">
             <a:avLst/>
@@ -7378,583 +8732,7 @@
                 <a:ea typeface="Yu Gothic" pitchFamily="34" charset="-122"/>
                 <a:cs typeface="Yu Gothic" pitchFamily="34" charset="-120"/>
               </a:rPr>
-              <a:t>11 種類を、脆弱版と修正版で比較</a:t>
-            </a:r>
-            <a:endParaRPr lang="en-US" sz="1400" dirty="0"/>
-          </a:p>
-        </p:txBody>
-      </p:sp>
-      <p:sp>
-        <p:nvSpPr>
-          <p:cNvPr id="13" name="テストのカード 3"/>
-          <p:cNvSpPr/>
-          <p:nvPr/>
-        </p:nvSpPr>
-        <p:spPr>
-          <a:xfrm>
-            <a:off x="8046720" y="1463040"/>
-            <a:ext cx="3566160" cy="2194560"/>
-          </a:xfrm>
-          <a:prstGeom prst="roundRect">
-            <a:avLst>
-              <a:gd name="adj" fmla="val 5000"/>
-            </a:avLst>
-          </a:prstGeom>
-          <a:solidFill>
-            <a:schemeClr val="bg2"/>
-          </a:solidFill>
-          <a:ln/>
-        </p:spPr>
-      </p:sp>
-      <p:sp>
-        <p:nvSpPr>
-          <p:cNvPr id="14" name="回帰テスト 円"/>
-          <p:cNvSpPr/>
-          <p:nvPr/>
-        </p:nvSpPr>
-        <p:spPr>
-          <a:xfrm>
-            <a:off x="8321040" y="1737360"/>
-            <a:ext cx="685800" cy="685800"/>
-          </a:xfrm>
-          <a:prstGeom prst="ellipse">
-            <a:avLst/>
-          </a:prstGeom>
-          <a:solidFill>
-            <a:schemeClr val="accent1"/>
-          </a:solidFill>
-          <a:ln/>
-        </p:spPr>
-      </p:sp>
-      <p:pic>
-        <p:nvPicPr>
-          <p:cNvPr id="15" name="Image 2" descr="回帰テスト">    </p:cNvPr>
-          <p:cNvPicPr>
-            <a:picLocks noChangeAspect="1"/>
-          </p:cNvPicPr>
-          <p:nvPr/>
-        </p:nvPicPr>
-        <p:blipFill>
-          <a:blip r:embed="rId3"/>
-          <a:stretch>
-            <a:fillRect/>
-          </a:stretch>
-        </p:blipFill>
-        <p:spPr>
-          <a:xfrm>
-            <a:off x="8492490" y="1908810"/>
-            <a:ext cx="342900" cy="342900"/>
-          </a:xfrm>
-          <a:prstGeom prst="rect">
-            <a:avLst/>
-          </a:prstGeom>
-        </p:spPr>
-      </p:pic>
-      <p:sp>
-        <p:nvSpPr>
-          <p:cNvPr id="16" name="Text 11"/>
-          <p:cNvSpPr txBox="1"/>
-          <p:nvPr/>
-        </p:nvSpPr>
-        <p:spPr>
-          <a:xfrm>
-            <a:off x="9189720" y="1737360"/>
-            <a:ext cx="2286000" cy="685800"/>
-          </a:xfrm>
-          <a:prstGeom prst="rect">
-            <a:avLst/>
-          </a:prstGeom>
-          <a:noFill/>
-          <a:ln/>
-        </p:spPr>
-        <p:txBody>
-          <a:bodyPr wrap="square" lIns="0" tIns="0" rIns="0" bIns="0" rtlCol="0" anchor="ctr"/>
-          <a:lstStyle/>
-          <a:p>
-            <a:pPr indent="0" marL="0">
-              <a:buNone/>
-            </a:pPr>
-            <a:r>
-              <a:rPr lang="en-US" sz="1800" b="1" dirty="0">
-                <a:solidFill>
-                  <a:schemeClr val="tx2"/>
-                </a:solidFill>
-                <a:latin typeface="Yu Gothic" pitchFamily="34" charset="0"/>
-                <a:ea typeface="Yu Gothic" pitchFamily="34" charset="-122"/>
-                <a:cs typeface="Yu Gothic" pitchFamily="34" charset="-120"/>
-              </a:rPr>
-              <a:t>回帰テスト</a:t>
-            </a:r>
-            <a:endParaRPr lang="en-US" sz="1800" dirty="0"/>
-          </a:p>
-        </p:txBody>
-      </p:sp>
-      <p:sp>
-        <p:nvSpPr>
-          <p:cNvPr id="17" name="Text 12"/>
-          <p:cNvSpPr txBox="1"/>
-          <p:nvPr/>
-        </p:nvSpPr>
-        <p:spPr>
-          <a:xfrm>
-            <a:off x="8321040" y="2651760"/>
-            <a:ext cx="3063240" cy="868680"/>
-          </a:xfrm>
-          <a:prstGeom prst="rect">
-            <a:avLst/>
-          </a:prstGeom>
-          <a:noFill/>
-          <a:ln/>
-        </p:spPr>
-        <p:txBody>
-          <a:bodyPr wrap="square" lIns="0" tIns="0" rIns="0" bIns="0" rtlCol="0" anchor="t"/>
-          <a:lstStyle/>
-          <a:p>
-            <a:pPr indent="0" marL="0">
-              <a:buNone/>
-            </a:pPr>
-            <a:r>
-              <a:rPr lang="en-US" sz="1400" dirty="0">
-                <a:solidFill>
-                  <a:schemeClr val="tx1"/>
-                </a:solidFill>
-                <a:latin typeface="Yu Gothic" pitchFamily="34" charset="0"/>
-                <a:ea typeface="Yu Gothic" pitchFamily="34" charset="-122"/>
-                <a:cs typeface="Yu Gothic" pitchFamily="34" charset="-120"/>
-              </a:rPr>
-              <a:t>全 22 パターンを CI で確認</a:t>
-            </a:r>
-            <a:endParaRPr lang="en-US" sz="1400" dirty="0"/>
-          </a:p>
-        </p:txBody>
-      </p:sp>
-      <p:sp>
-        <p:nvSpPr>
-          <p:cNvPr id="18" name="テストのカード 4"/>
-          <p:cNvSpPr/>
-          <p:nvPr/>
-        </p:nvSpPr>
-        <p:spPr>
-          <a:xfrm>
-            <a:off x="548640" y="3886200"/>
-            <a:ext cx="3566160" cy="2194560"/>
-          </a:xfrm>
-          <a:prstGeom prst="roundRect">
-            <a:avLst>
-              <a:gd name="adj" fmla="val 5000"/>
-            </a:avLst>
-          </a:prstGeom>
-          <a:solidFill>
-            <a:schemeClr val="bg2"/>
-          </a:solidFill>
-          <a:ln/>
-        </p:spPr>
-      </p:sp>
-      <p:sp>
-        <p:nvSpPr>
-          <p:cNvPr id="19" name="実ログのデータ 円"/>
-          <p:cNvSpPr/>
-          <p:nvPr/>
-        </p:nvSpPr>
-        <p:spPr>
-          <a:xfrm>
-            <a:off x="822960" y="4160520"/>
-            <a:ext cx="685800" cy="685800"/>
-          </a:xfrm>
-          <a:prstGeom prst="ellipse">
-            <a:avLst/>
-          </a:prstGeom>
-          <a:solidFill>
-            <a:schemeClr val="accent1"/>
-          </a:solidFill>
-          <a:ln/>
-        </p:spPr>
-      </p:sp>
-      <p:pic>
-        <p:nvPicPr>
-          <p:cNvPr id="20" name="Image 3" descr="実ログのデータ">    </p:cNvPr>
-          <p:cNvPicPr>
-            <a:picLocks noChangeAspect="1"/>
-          </p:cNvPicPr>
-          <p:nvPr/>
-        </p:nvPicPr>
-        <p:blipFill>
-          <a:blip r:embed="rId4"/>
-          <a:stretch>
-            <a:fillRect/>
-          </a:stretch>
-        </p:blipFill>
-        <p:spPr>
-          <a:xfrm>
-            <a:off x="994410" y="4331970"/>
-            <a:ext cx="342900" cy="342900"/>
-          </a:xfrm>
-          <a:prstGeom prst="rect">
-            <a:avLst/>
-          </a:prstGeom>
-        </p:spPr>
-      </p:pic>
-      <p:sp>
-        <p:nvSpPr>
-          <p:cNvPr id="21" name="Text 15"/>
-          <p:cNvSpPr txBox="1"/>
-          <p:nvPr/>
-        </p:nvSpPr>
-        <p:spPr>
-          <a:xfrm>
-            <a:off x="1691640" y="4160520"/>
-            <a:ext cx="2286000" cy="685800"/>
-          </a:xfrm>
-          <a:prstGeom prst="rect">
-            <a:avLst/>
-          </a:prstGeom>
-          <a:noFill/>
-          <a:ln/>
-        </p:spPr>
-        <p:txBody>
-          <a:bodyPr wrap="square" lIns="0" tIns="0" rIns="0" bIns="0" rtlCol="0" anchor="ctr"/>
-          <a:lstStyle/>
-          <a:p>
-            <a:pPr indent="0" marL="0">
-              <a:buNone/>
-            </a:pPr>
-            <a:r>
-              <a:rPr lang="en-US" sz="1800" b="1" dirty="0">
-                <a:solidFill>
-                  <a:schemeClr val="tx2"/>
-                </a:solidFill>
-                <a:latin typeface="Yu Gothic" pitchFamily="34" charset="0"/>
-                <a:ea typeface="Yu Gothic" pitchFamily="34" charset="-122"/>
-                <a:cs typeface="Yu Gothic" pitchFamily="34" charset="-120"/>
-              </a:rPr>
-              <a:t>実ログのデータ</a:t>
-            </a:r>
-            <a:endParaRPr lang="en-US" sz="1800" dirty="0"/>
-          </a:p>
-        </p:txBody>
-      </p:sp>
-      <p:sp>
-        <p:nvSpPr>
-          <p:cNvPr id="22" name="Text 16"/>
-          <p:cNvSpPr txBox="1"/>
-          <p:nvPr/>
-        </p:nvSpPr>
-        <p:spPr>
-          <a:xfrm>
-            <a:off x="822960" y="5074920"/>
-            <a:ext cx="3063240" cy="868680"/>
-          </a:xfrm>
-          <a:prstGeom prst="rect">
-            <a:avLst/>
-          </a:prstGeom>
-          <a:noFill/>
-          <a:ln/>
-        </p:spPr>
-        <p:txBody>
-          <a:bodyPr wrap="square" lIns="0" tIns="0" rIns="0" bIns="0" rtlCol="0" anchor="t"/>
-          <a:lstStyle/>
-          <a:p>
-            <a:pPr indent="0" marL="0">
-              <a:buNone/>
-            </a:pPr>
-            <a:r>
-              <a:rPr lang="en-US" sz="1400" dirty="0">
-                <a:solidFill>
-                  <a:schemeClr val="tx1"/>
-                </a:solidFill>
-                <a:latin typeface="Yu Gothic" pitchFamily="34" charset="0"/>
-                <a:ea typeface="Yu Gothic" pitchFamily="34" charset="-122"/>
-                <a:cs typeface="Yu Gothic" pitchFamily="34" charset="-120"/>
-              </a:rPr>
-              <a:t>Actions の出力で、数え方を確認</a:t>
-            </a:r>
-            <a:endParaRPr lang="en-US" sz="1400" dirty="0"/>
-          </a:p>
-        </p:txBody>
-      </p:sp>
-      <p:sp>
-        <p:nvSpPr>
-          <p:cNvPr id="23" name="テストのカード 5"/>
-          <p:cNvSpPr/>
-          <p:nvPr/>
-        </p:nvSpPr>
-        <p:spPr>
-          <a:xfrm>
-            <a:off x="4297680" y="3886200"/>
-            <a:ext cx="3566160" cy="2194560"/>
-          </a:xfrm>
-          <a:prstGeom prst="roundRect">
-            <a:avLst>
-              <a:gd name="adj" fmla="val 5000"/>
-            </a:avLst>
-          </a:prstGeom>
-          <a:solidFill>
-            <a:schemeClr val="bg2"/>
-          </a:solidFill>
-          <a:ln/>
-        </p:spPr>
-      </p:sp>
-      <p:sp>
-        <p:nvSpPr>
-          <p:cNvPr id="24" name="実物のファイル 円"/>
-          <p:cNvSpPr/>
-          <p:nvPr/>
-        </p:nvSpPr>
-        <p:spPr>
-          <a:xfrm>
-            <a:off x="4572000" y="4160520"/>
-            <a:ext cx="685800" cy="685800"/>
-          </a:xfrm>
-          <a:prstGeom prst="ellipse">
-            <a:avLst/>
-          </a:prstGeom>
-          <a:solidFill>
-            <a:schemeClr val="accent1"/>
-          </a:solidFill>
-          <a:ln/>
-        </p:spPr>
-      </p:sp>
-      <p:pic>
-        <p:nvPicPr>
-          <p:cNvPr id="25" name="Image 4" descr="実物のファイル">    </p:cNvPr>
-          <p:cNvPicPr>
-            <a:picLocks noChangeAspect="1"/>
-          </p:cNvPicPr>
-          <p:nvPr/>
-        </p:nvPicPr>
-        <p:blipFill>
-          <a:blip r:embed="rId5"/>
-          <a:stretch>
-            <a:fillRect/>
-          </a:stretch>
-        </p:blipFill>
-        <p:spPr>
-          <a:xfrm>
-            <a:off x="4743450" y="4331970"/>
-            <a:ext cx="342900" cy="342900"/>
-          </a:xfrm>
-          <a:prstGeom prst="rect">
-            <a:avLst/>
-          </a:prstGeom>
-        </p:spPr>
-      </p:pic>
-      <p:sp>
-        <p:nvSpPr>
-          <p:cNvPr id="26" name="Text 19"/>
-          <p:cNvSpPr txBox="1"/>
-          <p:nvPr/>
-        </p:nvSpPr>
-        <p:spPr>
-          <a:xfrm>
-            <a:off x="5440680" y="4160520"/>
-            <a:ext cx="2286000" cy="685800"/>
-          </a:xfrm>
-          <a:prstGeom prst="rect">
-            <a:avLst/>
-          </a:prstGeom>
-          <a:noFill/>
-          <a:ln/>
-        </p:spPr>
-        <p:txBody>
-          <a:bodyPr wrap="square" lIns="0" tIns="0" rIns="0" bIns="0" rtlCol="0" anchor="ctr"/>
-          <a:lstStyle/>
-          <a:p>
-            <a:pPr indent="0" marL="0">
-              <a:buNone/>
-            </a:pPr>
-            <a:r>
-              <a:rPr lang="en-US" sz="1800" b="1" dirty="0">
-                <a:solidFill>
-                  <a:schemeClr val="tx2"/>
-                </a:solidFill>
-                <a:latin typeface="Yu Gothic" pitchFamily="34" charset="0"/>
-                <a:ea typeface="Yu Gothic" pitchFamily="34" charset="-122"/>
-                <a:cs typeface="Yu Gothic" pitchFamily="34" charset="-120"/>
-              </a:rPr>
-              <a:t>実物のファイル</a:t>
-            </a:r>
-            <a:endParaRPr lang="en-US" sz="1800" dirty="0"/>
-          </a:p>
-        </p:txBody>
-      </p:sp>
-      <p:sp>
-        <p:nvSpPr>
-          <p:cNvPr id="27" name="Text 20"/>
-          <p:cNvSpPr txBox="1"/>
-          <p:nvPr/>
-        </p:nvSpPr>
-        <p:spPr>
-          <a:xfrm>
-            <a:off x="4572000" y="5074920"/>
-            <a:ext cx="3063240" cy="868680"/>
-          </a:xfrm>
-          <a:prstGeom prst="rect">
-            <a:avLst/>
-          </a:prstGeom>
-          <a:noFill/>
-          <a:ln/>
-        </p:spPr>
-        <p:txBody>
-          <a:bodyPr wrap="square" lIns="0" tIns="0" rIns="0" bIns="0" rtlCol="0" anchor="t"/>
-          <a:lstStyle/>
-          <a:p>
-            <a:pPr indent="0" marL="0">
-              <a:buNone/>
-            </a:pPr>
-            <a:r>
-              <a:rPr lang="en-US" sz="1400" dirty="0">
-                <a:solidFill>
-                  <a:schemeClr val="tx1"/>
-                </a:solidFill>
-                <a:latin typeface="Yu Gothic" pitchFamily="34" charset="0"/>
-                <a:ea typeface="Yu Gothic" pitchFamily="34" charset="-122"/>
-                <a:cs typeface="Yu Gothic" pitchFamily="34" charset="-120"/>
-              </a:rPr>
-              <a:t>uv・poetry・go・dotnet 製</a:t>
-            </a:r>
-            <a:endParaRPr lang="en-US" sz="1400" dirty="0"/>
-          </a:p>
-        </p:txBody>
-      </p:sp>
-      <p:sp>
-        <p:nvSpPr>
-          <p:cNvPr id="28" name="テストのカード 6"/>
-          <p:cNvSpPr/>
-          <p:nvPr/>
-        </p:nvSpPr>
-        <p:spPr>
-          <a:xfrm>
-            <a:off x="8046720" y="3886200"/>
-            <a:ext cx="3566160" cy="2194560"/>
-          </a:xfrm>
-          <a:prstGeom prst="roundRect">
-            <a:avLst>
-              <a:gd name="adj" fmla="val 5000"/>
-            </a:avLst>
-          </a:prstGeom>
-          <a:solidFill>
-            <a:schemeClr val="bg2"/>
-          </a:solidFill>
-          <a:ln/>
-        </p:spPr>
-      </p:sp>
-      <p:sp>
-        <p:nvSpPr>
-          <p:cNvPr id="29" name="ばらつきを測る 円"/>
-          <p:cNvSpPr/>
-          <p:nvPr/>
-        </p:nvSpPr>
-        <p:spPr>
-          <a:xfrm>
-            <a:off x="8321040" y="4160520"/>
-            <a:ext cx="685800" cy="685800"/>
-          </a:xfrm>
-          <a:prstGeom prst="ellipse">
-            <a:avLst/>
-          </a:prstGeom>
-          <a:solidFill>
-            <a:schemeClr val="accent1"/>
-          </a:solidFill>
-          <a:ln/>
-        </p:spPr>
-      </p:sp>
-      <p:pic>
-        <p:nvPicPr>
-          <p:cNvPr id="30" name="Image 5" descr="ばらつきを測る">    </p:cNvPr>
-          <p:cNvPicPr>
-            <a:picLocks noChangeAspect="1"/>
-          </p:cNvPicPr>
-          <p:nvPr/>
-        </p:nvPicPr>
-        <p:blipFill>
-          <a:blip r:embed="rId6"/>
-          <a:stretch>
-            <a:fillRect/>
-          </a:stretch>
-        </p:blipFill>
-        <p:spPr>
-          <a:xfrm>
-            <a:off x="8492490" y="4331970"/>
-            <a:ext cx="342900" cy="342900"/>
-          </a:xfrm>
-          <a:prstGeom prst="rect">
-            <a:avLst/>
-          </a:prstGeom>
-        </p:spPr>
-      </p:pic>
-      <p:sp>
-        <p:nvSpPr>
-          <p:cNvPr id="31" name="Text 23"/>
-          <p:cNvSpPr txBox="1"/>
-          <p:nvPr/>
-        </p:nvSpPr>
-        <p:spPr>
-          <a:xfrm>
-            <a:off x="9189720" y="4160520"/>
-            <a:ext cx="2286000" cy="685800"/>
-          </a:xfrm>
-          <a:prstGeom prst="rect">
-            <a:avLst/>
-          </a:prstGeom>
-          <a:noFill/>
-          <a:ln/>
-        </p:spPr>
-        <p:txBody>
-          <a:bodyPr wrap="square" lIns="0" tIns="0" rIns="0" bIns="0" rtlCol="0" anchor="ctr"/>
-          <a:lstStyle/>
-          <a:p>
-            <a:pPr indent="0" marL="0">
-              <a:buNone/>
-            </a:pPr>
-            <a:r>
-              <a:rPr lang="en-US" sz="1800" b="1" dirty="0">
-                <a:solidFill>
-                  <a:schemeClr val="tx2"/>
-                </a:solidFill>
-                <a:latin typeface="Yu Gothic" pitchFamily="34" charset="0"/>
-                <a:ea typeface="Yu Gothic" pitchFamily="34" charset="-122"/>
-                <a:cs typeface="Yu Gothic" pitchFamily="34" charset="-120"/>
-              </a:rPr>
-              <a:t>ばらつきを測る</a:t>
-            </a:r>
-            <a:endParaRPr lang="en-US" sz="1800" dirty="0"/>
-          </a:p>
-        </p:txBody>
-      </p:sp>
-      <p:sp>
-        <p:nvSpPr>
-          <p:cNvPr id="32" name="Text 24"/>
-          <p:cNvSpPr txBox="1"/>
-          <p:nvPr/>
-        </p:nvSpPr>
-        <p:spPr>
-          <a:xfrm>
-            <a:off x="8321040" y="5074920"/>
-            <a:ext cx="3063240" cy="868680"/>
-          </a:xfrm>
-          <a:prstGeom prst="rect">
-            <a:avLst/>
-          </a:prstGeom>
-          <a:noFill/>
-          <a:ln/>
-        </p:spPr>
-        <p:txBody>
-          <a:bodyPr wrap="square" lIns="0" tIns="0" rIns="0" bIns="0" rtlCol="0" anchor="t"/>
-          <a:lstStyle/>
-          <a:p>
-            <a:pPr indent="0" marL="0">
-              <a:buNone/>
-            </a:pPr>
-            <a:r>
-              <a:rPr lang="en-US" sz="1400" dirty="0">
-                <a:solidFill>
-                  <a:schemeClr val="tx1"/>
-                </a:solidFill>
-                <a:latin typeface="Yu Gothic" pitchFamily="34" charset="0"/>
-                <a:ea typeface="Yu Gothic" pitchFamily="34" charset="-122"/>
-                <a:cs typeface="Yu Gothic" pitchFamily="34" charset="-120"/>
-              </a:rPr>
-              <a:t>同じ条件で複数回、分布を見る</a:t>
+              <a:t>OSV と GHSA の修正版が一致</a:t>
             </a:r>
             <a:endParaRPr lang="en-US" sz="1400" dirty="0"/>
           </a:p>
@@ -8062,6 +8840,978 @@
                   <a:schemeClr val="tx2"/>
                 </a:solidFill>
               </a:rPr>
+              <a:t>テストの方法</a:t>
+            </a:r>
+            <a:endParaRPr lang="en-US" sz="3400" dirty="0"/>
+          </a:p>
+        </p:txBody>
+      </p:sp>
+      <p:sp>
+        <p:nvSpPr>
+          <p:cNvPr id="3" name="テストのカード 1"/>
+          <p:cNvSpPr/>
+          <p:nvPr/>
+        </p:nvSpPr>
+        <p:spPr>
+          <a:xfrm>
+            <a:off x="548640" y="1463040"/>
+            <a:ext cx="3566160" cy="2194560"/>
+          </a:xfrm>
+          <a:prstGeom prst="roundRect">
+            <a:avLst>
+              <a:gd name="adj" fmla="val 5000"/>
+            </a:avLst>
+          </a:prstGeom>
+          <a:solidFill>
+            <a:schemeClr val="bg2"/>
+          </a:solidFill>
+          <a:ln/>
+        </p:spPr>
+      </p:sp>
+      <p:sp>
+        <p:nvSpPr>
+          <p:cNvPr id="4" name="モック 円"/>
+          <p:cNvSpPr/>
+          <p:nvPr/>
+        </p:nvSpPr>
+        <p:spPr>
+          <a:xfrm>
+            <a:off x="822960" y="1737360"/>
+            <a:ext cx="685800" cy="685800"/>
+          </a:xfrm>
+          <a:prstGeom prst="ellipse">
+            <a:avLst/>
+          </a:prstGeom>
+          <a:solidFill>
+            <a:schemeClr val="accent1"/>
+          </a:solidFill>
+          <a:ln/>
+        </p:spPr>
+      </p:sp>
+      <p:pic>
+        <p:nvPicPr>
+          <p:cNvPr id="5" name="Image 0" descr="モック">    </p:cNvPr>
+          <p:cNvPicPr>
+            <a:picLocks noChangeAspect="1"/>
+          </p:cNvPicPr>
+          <p:nvPr/>
+        </p:nvPicPr>
+        <p:blipFill>
+          <a:blip r:embed="rId1"/>
+          <a:stretch>
+            <a:fillRect/>
+          </a:stretch>
+        </p:blipFill>
+        <p:spPr>
+          <a:xfrm>
+            <a:off x="994410" y="1908810"/>
+            <a:ext cx="342900" cy="342900"/>
+          </a:xfrm>
+          <a:prstGeom prst="rect">
+            <a:avLst/>
+          </a:prstGeom>
+        </p:spPr>
+      </p:pic>
+      <p:sp>
+        <p:nvSpPr>
+          <p:cNvPr id="6" name="Text 3"/>
+          <p:cNvSpPr txBox="1"/>
+          <p:nvPr/>
+        </p:nvSpPr>
+        <p:spPr>
+          <a:xfrm>
+            <a:off x="1691640" y="1737360"/>
+            <a:ext cx="2286000" cy="685800"/>
+          </a:xfrm>
+          <a:prstGeom prst="rect">
+            <a:avLst/>
+          </a:prstGeom>
+          <a:noFill/>
+          <a:ln/>
+        </p:spPr>
+        <p:txBody>
+          <a:bodyPr wrap="square" lIns="0" tIns="0" rIns="0" bIns="0" rtlCol="0" anchor="ctr"/>
+          <a:lstStyle/>
+          <a:p>
+            <a:pPr indent="0" marL="0">
+              <a:buNone/>
+            </a:pPr>
+            <a:r>
+              <a:rPr lang="en-US" sz="1800" b="1" dirty="0">
+                <a:solidFill>
+                  <a:schemeClr val="tx2"/>
+                </a:solidFill>
+                <a:latin typeface="Yu Gothic" pitchFamily="34" charset="0"/>
+                <a:ea typeface="Yu Gothic" pitchFamily="34" charset="-122"/>
+                <a:cs typeface="Yu Gothic" pitchFamily="34" charset="-120"/>
+              </a:rPr>
+              <a:t>モック</a:t>
+            </a:r>
+            <a:endParaRPr lang="en-US" sz="1800" dirty="0"/>
+          </a:p>
+        </p:txBody>
+      </p:sp>
+      <p:sp>
+        <p:nvSpPr>
+          <p:cNvPr id="7" name="Text 4"/>
+          <p:cNvSpPr txBox="1"/>
+          <p:nvPr/>
+        </p:nvSpPr>
+        <p:spPr>
+          <a:xfrm>
+            <a:off x="822960" y="2651760"/>
+            <a:ext cx="3063240" cy="868680"/>
+          </a:xfrm>
+          <a:prstGeom prst="rect">
+            <a:avLst/>
+          </a:prstGeom>
+          <a:noFill/>
+          <a:ln/>
+        </p:spPr>
+        <p:txBody>
+          <a:bodyPr wrap="square" lIns="0" tIns="0" rIns="0" bIns="0" rtlCol="0" anchor="t"/>
+          <a:lstStyle/>
+          <a:p>
+            <a:pPr indent="0" marL="0">
+              <a:buNone/>
+            </a:pPr>
+            <a:r>
+              <a:rPr lang="en-US" sz="1400" dirty="0">
+                <a:solidFill>
+                  <a:schemeClr val="tx1"/>
+                </a:solidFill>
+                <a:latin typeface="Yu Gothic" pitchFamily="34" charset="0"/>
+                <a:ea typeface="Yu Gothic" pitchFamily="34" charset="-122"/>
+                <a:cs typeface="Yu Gothic" pitchFamily="34" charset="-120"/>
+              </a:rPr>
+              <a:t>外部通信を差し替えて確認</a:t>
+            </a:r>
+            <a:endParaRPr lang="en-US" sz="1400" dirty="0"/>
+          </a:p>
+        </p:txBody>
+      </p:sp>
+      <p:sp>
+        <p:nvSpPr>
+          <p:cNvPr id="8" name="テストのカード 2"/>
+          <p:cNvSpPr/>
+          <p:nvPr/>
+        </p:nvSpPr>
+        <p:spPr>
+          <a:xfrm>
+            <a:off x="4297680" y="1463040"/>
+            <a:ext cx="3566160" cy="2194560"/>
+          </a:xfrm>
+          <a:prstGeom prst="roundRect">
+            <a:avLst>
+              <a:gd name="adj" fmla="val 5000"/>
+            </a:avLst>
+          </a:prstGeom>
+          <a:solidFill>
+            <a:schemeClr val="bg2"/>
+          </a:solidFill>
+          <a:ln/>
+        </p:spPr>
+      </p:sp>
+      <p:sp>
+        <p:nvSpPr>
+          <p:cNvPr id="9" name="正解つきの的 円"/>
+          <p:cNvSpPr/>
+          <p:nvPr/>
+        </p:nvSpPr>
+        <p:spPr>
+          <a:xfrm>
+            <a:off x="4572000" y="1737360"/>
+            <a:ext cx="685800" cy="685800"/>
+          </a:xfrm>
+          <a:prstGeom prst="ellipse">
+            <a:avLst/>
+          </a:prstGeom>
+          <a:solidFill>
+            <a:schemeClr val="accent1"/>
+          </a:solidFill>
+          <a:ln/>
+        </p:spPr>
+      </p:sp>
+      <p:pic>
+        <p:nvPicPr>
+          <p:cNvPr id="10" name="Image 1" descr="正解つきの的">    </p:cNvPr>
+          <p:cNvPicPr>
+            <a:picLocks noChangeAspect="1"/>
+          </p:cNvPicPr>
+          <p:nvPr/>
+        </p:nvPicPr>
+        <p:blipFill>
+          <a:blip r:embed="rId2"/>
+          <a:stretch>
+            <a:fillRect/>
+          </a:stretch>
+        </p:blipFill>
+        <p:spPr>
+          <a:xfrm>
+            <a:off x="4743450" y="1908810"/>
+            <a:ext cx="342900" cy="342900"/>
+          </a:xfrm>
+          <a:prstGeom prst="rect">
+            <a:avLst/>
+          </a:prstGeom>
+        </p:spPr>
+      </p:pic>
+      <p:sp>
+        <p:nvSpPr>
+          <p:cNvPr id="11" name="Text 7"/>
+          <p:cNvSpPr txBox="1"/>
+          <p:nvPr/>
+        </p:nvSpPr>
+        <p:spPr>
+          <a:xfrm>
+            <a:off x="5440680" y="1737360"/>
+            <a:ext cx="2286000" cy="685800"/>
+          </a:xfrm>
+          <a:prstGeom prst="rect">
+            <a:avLst/>
+          </a:prstGeom>
+          <a:noFill/>
+          <a:ln/>
+        </p:spPr>
+        <p:txBody>
+          <a:bodyPr wrap="square" lIns="0" tIns="0" rIns="0" bIns="0" rtlCol="0" anchor="ctr"/>
+          <a:lstStyle/>
+          <a:p>
+            <a:pPr indent="0" marL="0">
+              <a:buNone/>
+            </a:pPr>
+            <a:r>
+              <a:rPr lang="en-US" sz="1800" b="1" dirty="0">
+                <a:solidFill>
+                  <a:schemeClr val="tx2"/>
+                </a:solidFill>
+                <a:latin typeface="Yu Gothic" pitchFamily="34" charset="0"/>
+                <a:ea typeface="Yu Gothic" pitchFamily="34" charset="-122"/>
+                <a:cs typeface="Yu Gothic" pitchFamily="34" charset="-120"/>
+              </a:rPr>
+              <a:t>正解つきの的</a:t>
+            </a:r>
+            <a:endParaRPr lang="en-US" sz="1800" dirty="0"/>
+          </a:p>
+        </p:txBody>
+      </p:sp>
+      <p:sp>
+        <p:nvSpPr>
+          <p:cNvPr id="12" name="Text 8"/>
+          <p:cNvSpPr txBox="1"/>
+          <p:nvPr/>
+        </p:nvSpPr>
+        <p:spPr>
+          <a:xfrm>
+            <a:off x="4572000" y="2651760"/>
+            <a:ext cx="3063240" cy="868680"/>
+          </a:xfrm>
+          <a:prstGeom prst="rect">
+            <a:avLst/>
+          </a:prstGeom>
+          <a:noFill/>
+          <a:ln/>
+        </p:spPr>
+        <p:txBody>
+          <a:bodyPr wrap="square" lIns="0" tIns="0" rIns="0" bIns="0" rtlCol="0" anchor="t"/>
+          <a:lstStyle/>
+          <a:p>
+            <a:pPr indent="0" marL="0">
+              <a:buNone/>
+            </a:pPr>
+            <a:r>
+              <a:rPr lang="en-US" sz="1400" dirty="0">
+                <a:solidFill>
+                  <a:schemeClr val="tx1"/>
+                </a:solidFill>
+                <a:latin typeface="Yu Gothic" pitchFamily="34" charset="0"/>
+                <a:ea typeface="Yu Gothic" pitchFamily="34" charset="-122"/>
+                <a:cs typeface="Yu Gothic" pitchFamily="34" charset="-120"/>
+              </a:rPr>
+              <a:t>11 種類を、脆弱版と修正版で比較</a:t>
+            </a:r>
+            <a:endParaRPr lang="en-US" sz="1400" dirty="0"/>
+          </a:p>
+        </p:txBody>
+      </p:sp>
+      <p:sp>
+        <p:nvSpPr>
+          <p:cNvPr id="13" name="テストのカード 3"/>
+          <p:cNvSpPr/>
+          <p:nvPr/>
+        </p:nvSpPr>
+        <p:spPr>
+          <a:xfrm>
+            <a:off x="8046720" y="1463040"/>
+            <a:ext cx="3566160" cy="2194560"/>
+          </a:xfrm>
+          <a:prstGeom prst="roundRect">
+            <a:avLst>
+              <a:gd name="adj" fmla="val 5000"/>
+            </a:avLst>
+          </a:prstGeom>
+          <a:solidFill>
+            <a:schemeClr val="bg2"/>
+          </a:solidFill>
+          <a:ln/>
+        </p:spPr>
+      </p:sp>
+      <p:sp>
+        <p:nvSpPr>
+          <p:cNvPr id="14" name="回帰テスト 円"/>
+          <p:cNvSpPr/>
+          <p:nvPr/>
+        </p:nvSpPr>
+        <p:spPr>
+          <a:xfrm>
+            <a:off x="8321040" y="1737360"/>
+            <a:ext cx="685800" cy="685800"/>
+          </a:xfrm>
+          <a:prstGeom prst="ellipse">
+            <a:avLst/>
+          </a:prstGeom>
+          <a:solidFill>
+            <a:schemeClr val="accent1"/>
+          </a:solidFill>
+          <a:ln/>
+        </p:spPr>
+      </p:sp>
+      <p:pic>
+        <p:nvPicPr>
+          <p:cNvPr id="15" name="Image 2" descr="回帰テスト">    </p:cNvPr>
+          <p:cNvPicPr>
+            <a:picLocks noChangeAspect="1"/>
+          </p:cNvPicPr>
+          <p:nvPr/>
+        </p:nvPicPr>
+        <p:blipFill>
+          <a:blip r:embed="rId3"/>
+          <a:stretch>
+            <a:fillRect/>
+          </a:stretch>
+        </p:blipFill>
+        <p:spPr>
+          <a:xfrm>
+            <a:off x="8492490" y="1908810"/>
+            <a:ext cx="342900" cy="342900"/>
+          </a:xfrm>
+          <a:prstGeom prst="rect">
+            <a:avLst/>
+          </a:prstGeom>
+        </p:spPr>
+      </p:pic>
+      <p:sp>
+        <p:nvSpPr>
+          <p:cNvPr id="16" name="Text 11"/>
+          <p:cNvSpPr txBox="1"/>
+          <p:nvPr/>
+        </p:nvSpPr>
+        <p:spPr>
+          <a:xfrm>
+            <a:off x="9189720" y="1737360"/>
+            <a:ext cx="2286000" cy="685800"/>
+          </a:xfrm>
+          <a:prstGeom prst="rect">
+            <a:avLst/>
+          </a:prstGeom>
+          <a:noFill/>
+          <a:ln/>
+        </p:spPr>
+        <p:txBody>
+          <a:bodyPr wrap="square" lIns="0" tIns="0" rIns="0" bIns="0" rtlCol="0" anchor="ctr"/>
+          <a:lstStyle/>
+          <a:p>
+            <a:pPr indent="0" marL="0">
+              <a:buNone/>
+            </a:pPr>
+            <a:r>
+              <a:rPr lang="en-US" sz="1800" b="1" dirty="0">
+                <a:solidFill>
+                  <a:schemeClr val="tx2"/>
+                </a:solidFill>
+                <a:latin typeface="Yu Gothic" pitchFamily="34" charset="0"/>
+                <a:ea typeface="Yu Gothic" pitchFamily="34" charset="-122"/>
+                <a:cs typeface="Yu Gothic" pitchFamily="34" charset="-120"/>
+              </a:rPr>
+              <a:t>回帰テスト</a:t>
+            </a:r>
+            <a:endParaRPr lang="en-US" sz="1800" dirty="0"/>
+          </a:p>
+        </p:txBody>
+      </p:sp>
+      <p:sp>
+        <p:nvSpPr>
+          <p:cNvPr id="17" name="Text 12"/>
+          <p:cNvSpPr txBox="1"/>
+          <p:nvPr/>
+        </p:nvSpPr>
+        <p:spPr>
+          <a:xfrm>
+            <a:off x="8321040" y="2651760"/>
+            <a:ext cx="3063240" cy="868680"/>
+          </a:xfrm>
+          <a:prstGeom prst="rect">
+            <a:avLst/>
+          </a:prstGeom>
+          <a:noFill/>
+          <a:ln/>
+        </p:spPr>
+        <p:txBody>
+          <a:bodyPr wrap="square" lIns="0" tIns="0" rIns="0" bIns="0" rtlCol="0" anchor="t"/>
+          <a:lstStyle/>
+          <a:p>
+            <a:pPr indent="0" marL="0">
+              <a:buNone/>
+            </a:pPr>
+            <a:r>
+              <a:rPr lang="en-US" sz="1400" dirty="0">
+                <a:solidFill>
+                  <a:schemeClr val="tx1"/>
+                </a:solidFill>
+                <a:latin typeface="Yu Gothic" pitchFamily="34" charset="0"/>
+                <a:ea typeface="Yu Gothic" pitchFamily="34" charset="-122"/>
+                <a:cs typeface="Yu Gothic" pitchFamily="34" charset="-120"/>
+              </a:rPr>
+              <a:t>全 22 パターンを CI で確認</a:t>
+            </a:r>
+            <a:endParaRPr lang="en-US" sz="1400" dirty="0"/>
+          </a:p>
+        </p:txBody>
+      </p:sp>
+      <p:sp>
+        <p:nvSpPr>
+          <p:cNvPr id="18" name="テストのカード 4"/>
+          <p:cNvSpPr/>
+          <p:nvPr/>
+        </p:nvSpPr>
+        <p:spPr>
+          <a:xfrm>
+            <a:off x="548640" y="3886200"/>
+            <a:ext cx="3566160" cy="2194560"/>
+          </a:xfrm>
+          <a:prstGeom prst="roundRect">
+            <a:avLst>
+              <a:gd name="adj" fmla="val 5000"/>
+            </a:avLst>
+          </a:prstGeom>
+          <a:solidFill>
+            <a:schemeClr val="bg2"/>
+          </a:solidFill>
+          <a:ln/>
+        </p:spPr>
+      </p:sp>
+      <p:sp>
+        <p:nvSpPr>
+          <p:cNvPr id="19" name="実ログのデータ 円"/>
+          <p:cNvSpPr/>
+          <p:nvPr/>
+        </p:nvSpPr>
+        <p:spPr>
+          <a:xfrm>
+            <a:off x="822960" y="4160520"/>
+            <a:ext cx="685800" cy="685800"/>
+          </a:xfrm>
+          <a:prstGeom prst="ellipse">
+            <a:avLst/>
+          </a:prstGeom>
+          <a:solidFill>
+            <a:schemeClr val="accent1"/>
+          </a:solidFill>
+          <a:ln/>
+        </p:spPr>
+      </p:sp>
+      <p:pic>
+        <p:nvPicPr>
+          <p:cNvPr id="20" name="Image 3" descr="実ログのデータ">    </p:cNvPr>
+          <p:cNvPicPr>
+            <a:picLocks noChangeAspect="1"/>
+          </p:cNvPicPr>
+          <p:nvPr/>
+        </p:nvPicPr>
+        <p:blipFill>
+          <a:blip r:embed="rId4"/>
+          <a:stretch>
+            <a:fillRect/>
+          </a:stretch>
+        </p:blipFill>
+        <p:spPr>
+          <a:xfrm>
+            <a:off x="994410" y="4331970"/>
+            <a:ext cx="342900" cy="342900"/>
+          </a:xfrm>
+          <a:prstGeom prst="rect">
+            <a:avLst/>
+          </a:prstGeom>
+        </p:spPr>
+      </p:pic>
+      <p:sp>
+        <p:nvSpPr>
+          <p:cNvPr id="21" name="Text 15"/>
+          <p:cNvSpPr txBox="1"/>
+          <p:nvPr/>
+        </p:nvSpPr>
+        <p:spPr>
+          <a:xfrm>
+            <a:off x="1691640" y="4160520"/>
+            <a:ext cx="2286000" cy="685800"/>
+          </a:xfrm>
+          <a:prstGeom prst="rect">
+            <a:avLst/>
+          </a:prstGeom>
+          <a:noFill/>
+          <a:ln/>
+        </p:spPr>
+        <p:txBody>
+          <a:bodyPr wrap="square" lIns="0" tIns="0" rIns="0" bIns="0" rtlCol="0" anchor="ctr"/>
+          <a:lstStyle/>
+          <a:p>
+            <a:pPr indent="0" marL="0">
+              <a:buNone/>
+            </a:pPr>
+            <a:r>
+              <a:rPr lang="en-US" sz="1800" b="1" dirty="0">
+                <a:solidFill>
+                  <a:schemeClr val="tx2"/>
+                </a:solidFill>
+                <a:latin typeface="Yu Gothic" pitchFamily="34" charset="0"/>
+                <a:ea typeface="Yu Gothic" pitchFamily="34" charset="-122"/>
+                <a:cs typeface="Yu Gothic" pitchFamily="34" charset="-120"/>
+              </a:rPr>
+              <a:t>実ログのデータ</a:t>
+            </a:r>
+            <a:endParaRPr lang="en-US" sz="1800" dirty="0"/>
+          </a:p>
+        </p:txBody>
+      </p:sp>
+      <p:sp>
+        <p:nvSpPr>
+          <p:cNvPr id="22" name="Text 16"/>
+          <p:cNvSpPr txBox="1"/>
+          <p:nvPr/>
+        </p:nvSpPr>
+        <p:spPr>
+          <a:xfrm>
+            <a:off x="822960" y="5074920"/>
+            <a:ext cx="3063240" cy="868680"/>
+          </a:xfrm>
+          <a:prstGeom prst="rect">
+            <a:avLst/>
+          </a:prstGeom>
+          <a:noFill/>
+          <a:ln/>
+        </p:spPr>
+        <p:txBody>
+          <a:bodyPr wrap="square" lIns="0" tIns="0" rIns="0" bIns="0" rtlCol="0" anchor="t"/>
+          <a:lstStyle/>
+          <a:p>
+            <a:pPr indent="0" marL="0">
+              <a:buNone/>
+            </a:pPr>
+            <a:r>
+              <a:rPr lang="en-US" sz="1400" dirty="0">
+                <a:solidFill>
+                  <a:schemeClr val="tx1"/>
+                </a:solidFill>
+                <a:latin typeface="Yu Gothic" pitchFamily="34" charset="0"/>
+                <a:ea typeface="Yu Gothic" pitchFamily="34" charset="-122"/>
+                <a:cs typeface="Yu Gothic" pitchFamily="34" charset="-120"/>
+              </a:rPr>
+              <a:t>Actions の出力で、数え方を確認</a:t>
+            </a:r>
+            <a:endParaRPr lang="en-US" sz="1400" dirty="0"/>
+          </a:p>
+        </p:txBody>
+      </p:sp>
+      <p:sp>
+        <p:nvSpPr>
+          <p:cNvPr id="23" name="テストのカード 5"/>
+          <p:cNvSpPr/>
+          <p:nvPr/>
+        </p:nvSpPr>
+        <p:spPr>
+          <a:xfrm>
+            <a:off x="4297680" y="3886200"/>
+            <a:ext cx="3566160" cy="2194560"/>
+          </a:xfrm>
+          <a:prstGeom prst="roundRect">
+            <a:avLst>
+              <a:gd name="adj" fmla="val 5000"/>
+            </a:avLst>
+          </a:prstGeom>
+          <a:solidFill>
+            <a:schemeClr val="bg2"/>
+          </a:solidFill>
+          <a:ln/>
+        </p:spPr>
+      </p:sp>
+      <p:sp>
+        <p:nvSpPr>
+          <p:cNvPr id="24" name="実物のファイル 円"/>
+          <p:cNvSpPr/>
+          <p:nvPr/>
+        </p:nvSpPr>
+        <p:spPr>
+          <a:xfrm>
+            <a:off x="4572000" y="4160520"/>
+            <a:ext cx="685800" cy="685800"/>
+          </a:xfrm>
+          <a:prstGeom prst="ellipse">
+            <a:avLst/>
+          </a:prstGeom>
+          <a:solidFill>
+            <a:schemeClr val="accent1"/>
+          </a:solidFill>
+          <a:ln/>
+        </p:spPr>
+      </p:sp>
+      <p:pic>
+        <p:nvPicPr>
+          <p:cNvPr id="25" name="Image 4" descr="実物のファイル">    </p:cNvPr>
+          <p:cNvPicPr>
+            <a:picLocks noChangeAspect="1"/>
+          </p:cNvPicPr>
+          <p:nvPr/>
+        </p:nvPicPr>
+        <p:blipFill>
+          <a:blip r:embed="rId5"/>
+          <a:stretch>
+            <a:fillRect/>
+          </a:stretch>
+        </p:blipFill>
+        <p:spPr>
+          <a:xfrm>
+            <a:off x="4743450" y="4331970"/>
+            <a:ext cx="342900" cy="342900"/>
+          </a:xfrm>
+          <a:prstGeom prst="rect">
+            <a:avLst/>
+          </a:prstGeom>
+        </p:spPr>
+      </p:pic>
+      <p:sp>
+        <p:nvSpPr>
+          <p:cNvPr id="26" name="Text 19"/>
+          <p:cNvSpPr txBox="1"/>
+          <p:nvPr/>
+        </p:nvSpPr>
+        <p:spPr>
+          <a:xfrm>
+            <a:off x="5440680" y="4160520"/>
+            <a:ext cx="2286000" cy="685800"/>
+          </a:xfrm>
+          <a:prstGeom prst="rect">
+            <a:avLst/>
+          </a:prstGeom>
+          <a:noFill/>
+          <a:ln/>
+        </p:spPr>
+        <p:txBody>
+          <a:bodyPr wrap="square" lIns="0" tIns="0" rIns="0" bIns="0" rtlCol="0" anchor="ctr"/>
+          <a:lstStyle/>
+          <a:p>
+            <a:pPr indent="0" marL="0">
+              <a:buNone/>
+            </a:pPr>
+            <a:r>
+              <a:rPr lang="en-US" sz="1800" b="1" dirty="0">
+                <a:solidFill>
+                  <a:schemeClr val="tx2"/>
+                </a:solidFill>
+                <a:latin typeface="Yu Gothic" pitchFamily="34" charset="0"/>
+                <a:ea typeface="Yu Gothic" pitchFamily="34" charset="-122"/>
+                <a:cs typeface="Yu Gothic" pitchFamily="34" charset="-120"/>
+              </a:rPr>
+              <a:t>実物のファイル</a:t>
+            </a:r>
+            <a:endParaRPr lang="en-US" sz="1800" dirty="0"/>
+          </a:p>
+        </p:txBody>
+      </p:sp>
+      <p:sp>
+        <p:nvSpPr>
+          <p:cNvPr id="27" name="Text 20"/>
+          <p:cNvSpPr txBox="1"/>
+          <p:nvPr/>
+        </p:nvSpPr>
+        <p:spPr>
+          <a:xfrm>
+            <a:off x="4572000" y="5074920"/>
+            <a:ext cx="3063240" cy="868680"/>
+          </a:xfrm>
+          <a:prstGeom prst="rect">
+            <a:avLst/>
+          </a:prstGeom>
+          <a:noFill/>
+          <a:ln/>
+        </p:spPr>
+        <p:txBody>
+          <a:bodyPr wrap="square" lIns="0" tIns="0" rIns="0" bIns="0" rtlCol="0" anchor="t"/>
+          <a:lstStyle/>
+          <a:p>
+            <a:pPr indent="0" marL="0">
+              <a:buNone/>
+            </a:pPr>
+            <a:r>
+              <a:rPr lang="en-US" sz="1400" dirty="0">
+                <a:solidFill>
+                  <a:schemeClr val="tx1"/>
+                </a:solidFill>
+                <a:latin typeface="Yu Gothic" pitchFamily="34" charset="0"/>
+                <a:ea typeface="Yu Gothic" pitchFamily="34" charset="-122"/>
+                <a:cs typeface="Yu Gothic" pitchFamily="34" charset="-120"/>
+              </a:rPr>
+              <a:t>uv・poetry・go・dotnet 製</a:t>
+            </a:r>
+            <a:endParaRPr lang="en-US" sz="1400" dirty="0"/>
+          </a:p>
+        </p:txBody>
+      </p:sp>
+      <p:sp>
+        <p:nvSpPr>
+          <p:cNvPr id="28" name="テストのカード 6"/>
+          <p:cNvSpPr/>
+          <p:nvPr/>
+        </p:nvSpPr>
+        <p:spPr>
+          <a:xfrm>
+            <a:off x="8046720" y="3886200"/>
+            <a:ext cx="3566160" cy="2194560"/>
+          </a:xfrm>
+          <a:prstGeom prst="roundRect">
+            <a:avLst>
+              <a:gd name="adj" fmla="val 5000"/>
+            </a:avLst>
+          </a:prstGeom>
+          <a:solidFill>
+            <a:schemeClr val="bg2"/>
+          </a:solidFill>
+          <a:ln/>
+        </p:spPr>
+      </p:sp>
+      <p:sp>
+        <p:nvSpPr>
+          <p:cNvPr id="29" name="ばらつきを測る 円"/>
+          <p:cNvSpPr/>
+          <p:nvPr/>
+        </p:nvSpPr>
+        <p:spPr>
+          <a:xfrm>
+            <a:off x="8321040" y="4160520"/>
+            <a:ext cx="685800" cy="685800"/>
+          </a:xfrm>
+          <a:prstGeom prst="ellipse">
+            <a:avLst/>
+          </a:prstGeom>
+          <a:solidFill>
+            <a:schemeClr val="accent1"/>
+          </a:solidFill>
+          <a:ln/>
+        </p:spPr>
+      </p:sp>
+      <p:pic>
+        <p:nvPicPr>
+          <p:cNvPr id="30" name="Image 5" descr="ばらつきを測る">    </p:cNvPr>
+          <p:cNvPicPr>
+            <a:picLocks noChangeAspect="1"/>
+          </p:cNvPicPr>
+          <p:nvPr/>
+        </p:nvPicPr>
+        <p:blipFill>
+          <a:blip r:embed="rId6"/>
+          <a:stretch>
+            <a:fillRect/>
+          </a:stretch>
+        </p:blipFill>
+        <p:spPr>
+          <a:xfrm>
+            <a:off x="8492490" y="4331970"/>
+            <a:ext cx="342900" cy="342900"/>
+          </a:xfrm>
+          <a:prstGeom prst="rect">
+            <a:avLst/>
+          </a:prstGeom>
+        </p:spPr>
+      </p:pic>
+      <p:sp>
+        <p:nvSpPr>
+          <p:cNvPr id="31" name="Text 23"/>
+          <p:cNvSpPr txBox="1"/>
+          <p:nvPr/>
+        </p:nvSpPr>
+        <p:spPr>
+          <a:xfrm>
+            <a:off x="9189720" y="4160520"/>
+            <a:ext cx="2286000" cy="685800"/>
+          </a:xfrm>
+          <a:prstGeom prst="rect">
+            <a:avLst/>
+          </a:prstGeom>
+          <a:noFill/>
+          <a:ln/>
+        </p:spPr>
+        <p:txBody>
+          <a:bodyPr wrap="square" lIns="0" tIns="0" rIns="0" bIns="0" rtlCol="0" anchor="ctr"/>
+          <a:lstStyle/>
+          <a:p>
+            <a:pPr indent="0" marL="0">
+              <a:buNone/>
+            </a:pPr>
+            <a:r>
+              <a:rPr lang="en-US" sz="1800" b="1" dirty="0">
+                <a:solidFill>
+                  <a:schemeClr val="tx2"/>
+                </a:solidFill>
+                <a:latin typeface="Yu Gothic" pitchFamily="34" charset="0"/>
+                <a:ea typeface="Yu Gothic" pitchFamily="34" charset="-122"/>
+                <a:cs typeface="Yu Gothic" pitchFamily="34" charset="-120"/>
+              </a:rPr>
+              <a:t>ばらつきを測る</a:t>
+            </a:r>
+            <a:endParaRPr lang="en-US" sz="1800" dirty="0"/>
+          </a:p>
+        </p:txBody>
+      </p:sp>
+      <p:sp>
+        <p:nvSpPr>
+          <p:cNvPr id="32" name="Text 24"/>
+          <p:cNvSpPr txBox="1"/>
+          <p:nvPr/>
+        </p:nvSpPr>
+        <p:spPr>
+          <a:xfrm>
+            <a:off x="8321040" y="5074920"/>
+            <a:ext cx="3063240" cy="868680"/>
+          </a:xfrm>
+          <a:prstGeom prst="rect">
+            <a:avLst/>
+          </a:prstGeom>
+          <a:noFill/>
+          <a:ln/>
+        </p:spPr>
+        <p:txBody>
+          <a:bodyPr wrap="square" lIns="0" tIns="0" rIns="0" bIns="0" rtlCol="0" anchor="t"/>
+          <a:lstStyle/>
+          <a:p>
+            <a:pPr indent="0" marL="0">
+              <a:buNone/>
+            </a:pPr>
+            <a:r>
+              <a:rPr lang="en-US" sz="1400" dirty="0">
+                <a:solidFill>
+                  <a:schemeClr val="tx1"/>
+                </a:solidFill>
+                <a:latin typeface="Yu Gothic" pitchFamily="34" charset="0"/>
+                <a:ea typeface="Yu Gothic" pitchFamily="34" charset="-122"/>
+                <a:cs typeface="Yu Gothic" pitchFamily="34" charset="-120"/>
+              </a:rPr>
+              <a:t>同じ条件で複数回、分布を見る</a:t>
+            </a:r>
+            <a:endParaRPr lang="en-US" sz="1400" dirty="0"/>
+          </a:p>
+        </p:txBody>
+      </p:sp>
+      <p:sp>
+        <p:nvSpPr>
+          <p:cNvPr id="25" name="Slide Number Placeholder 0"/>
+          <p:cNvSpPr>
+            <a:spLocks noGrp="1"/>
+          </p:cNvSpPr>
+          <p:nvPr>
+            <p:ph type="sldNum" sz="quarter" idx="4294967295"/>
+          </p:nvPr>
+        </p:nvSpPr>
+        <p:spPr>
+          <a:xfrm>
+            <a:off x="10972800" y="6355080"/>
+            <a:ext cx="640080" cy="274320"/>
+          </a:xfrm>
+          <a:prstGeom prst="rect">
+            <a:avLst/>
+          </a:prstGeom>
+          <a:extLst>
+            <a:ext uri="{C572A759-6A51-4108-AA02-DFA0A04FC94B}">
+              <ma14:wrappingTextBoxFlag xmlns:ma14="http://schemas.microsoft.com/office/mac/drawingml/2011/main" val="0"/>
+            </a:ext>
+          </a:extLst>
+        </p:spPr>
+        <p:txBody>
+          <a:bodyPr/>
+          <a:lstStyle>
+            <a:lvl1pPr>
+              <a:defRPr sz="1100">
+                <a:solidFill>
+                  <a:schemeClr val="accent3"/>
+                </a:solidFill>
+              </a:defRPr>
+            </a:lvl1pPr>
+          </a:lstStyle>
+          <a:p>
+            <a:pPr algn="r"/>
+            <a:fld id="{F7021451-1387-4CA6-816F-3879F97B5CBC}" type="slidenum">
+              <a:rPr b="0" lang="en-US"/>
+              <a:t>7</a:t>
+            </a:fld>
+            <a:endParaRPr lang="en-US"/>
+          </a:p>
+        </p:txBody>
+      </p:sp>
+    </p:spTree>
+  </p:cSld>
+  <p:clrMapOvr>
+    <a:masterClrMapping/>
+  </p:clrMapOvr>
+</p:sld>
+</file>
+
+<file path=ppt/slides/slide8.xml><?xml version="1.0" encoding="utf-8"?>
+<p:sld xmlns:a="http://schemas.openxmlformats.org/drawingml/2006/main" xmlns:r="http://schemas.openxmlformats.org/officeDocument/2006/relationships" xmlns:p="http://schemas.openxmlformats.org/presentationml/2006/main">
+  <p:cSld name="Slide 8">
+    <p:spTree>
+      <p:nvGrpSpPr>
+        <p:cNvPr id="1" name=""/>
+        <p:cNvGrpSpPr/>
+        <p:nvPr/>
+      </p:nvGrpSpPr>
+      <p:grpSpPr>
+        <a:xfrm>
+          <a:off x="0" y="0"/>
+          <a:ext cx="0" cy="0"/>
+          <a:chOff x="0" y="0"/>
+          <a:chExt cx="0" cy="0"/>
+        </a:xfrm>
+      </p:grpSpPr>
+      <p:sp>
+        <p:nvSpPr>
+          <p:cNvPr id="2" name="Text 0"/>
+          <p:cNvSpPr/>
+          <p:nvPr>
+            <p:ph idx="100" type="title" hasCustomPrompt="1"/>
+          </p:nvPr>
+        </p:nvSpPr>
+        <p:spPr>
+          <a:xfrm>
+            <a:off x="548640" y="365760"/>
+            <a:ext cx="11064240" cy="822960"/>
+          </a:xfrm>
+          <a:prstGeom prst="rect">
+            <a:avLst/>
+          </a:prstGeom>
+          <a:noFill/>
+          <a:ln/>
+        </p:spPr>
+        <p:txBody>
+          <a:bodyPr wrap="square" lIns="0" tIns="0" rIns="0" bIns="0" rtlCol="0" anchor="ctr"/>
+          <a:lstStyle/>
+          <a:p>
+            <a:pPr algn="l" indent="0" marL="0">
+              <a:buNone/>
+            </a:pPr>
+            <a:r>
+              <a:rPr lang="en-US" sz="3400" b="1" dirty="0">
+                <a:solidFill>
+                  <a:schemeClr val="tx2"/>
+                </a:solidFill>
+              </a:rPr>
               <a:t>動かして初めて見つかった不具合</a:t>
             </a:r>
             <a:endParaRPr lang="en-US" sz="3400" dirty="0"/>
@@ -8070,7 +9820,7 @@
       </p:sp>
       <p:graphicFrame>
         <p:nvGraphicFramePr>
-          <p:cNvPr id="8" name="Table 0"/>
+          <p:cNvPr id="9" name="Table 0"/>
           <p:cNvGraphicFramePr>
             <a:graphicFrameLocks noGrp="1"/>
           </p:cNvGraphicFramePr>
@@ -8767,291 +10517,6 @@
             <a:pPr algn="r"/>
             <a:fld id="{F7021451-1387-4CA6-816F-3879F97B5CBC}" type="slidenum">
               <a:rPr b="0" lang="en-US"/>
-              <a:t>7</a:t>
-            </a:fld>
-            <a:endParaRPr lang="en-US"/>
-          </a:p>
-        </p:txBody>
-      </p:sp>
-    </p:spTree>
-  </p:cSld>
-  <p:clrMapOvr>
-    <a:masterClrMapping/>
-  </p:clrMapOvr>
-</p:sld>
-</file>
-
-<file path=ppt/slides/slide8.xml><?xml version="1.0" encoding="utf-8"?>
-<p:sld xmlns:a="http://schemas.openxmlformats.org/drawingml/2006/main" xmlns:r="http://schemas.openxmlformats.org/officeDocument/2006/relationships" xmlns:p="http://schemas.openxmlformats.org/presentationml/2006/main">
-  <p:cSld name="Slide 8">
-    <p:spTree>
-      <p:nvGrpSpPr>
-        <p:cNvPr id="1" name=""/>
-        <p:cNvGrpSpPr/>
-        <p:nvPr/>
-      </p:nvGrpSpPr>
-      <p:grpSpPr>
-        <a:xfrm>
-          <a:off x="0" y="0"/>
-          <a:ext cx="0" cy="0"/>
-          <a:chOff x="0" y="0"/>
-          <a:chExt cx="0" cy="0"/>
-        </a:xfrm>
-      </p:grpSpPr>
-      <p:sp>
-        <p:nvSpPr>
-          <p:cNvPr id="2" name="Text 0"/>
-          <p:cNvSpPr/>
-          <p:nvPr>
-            <p:ph idx="100" type="title" hasCustomPrompt="1"/>
-          </p:nvPr>
-        </p:nvSpPr>
-        <p:spPr>
-          <a:xfrm>
-            <a:off x="548640" y="365760"/>
-            <a:ext cx="11064240" cy="822960"/>
-          </a:xfrm>
-          <a:prstGeom prst="rect">
-            <a:avLst/>
-          </a:prstGeom>
-          <a:noFill/>
-          <a:ln/>
-        </p:spPr>
-        <p:txBody>
-          <a:bodyPr wrap="square" lIns="0" tIns="0" rIns="0" bIns="0" rtlCol="0" anchor="ctr"/>
-          <a:lstStyle/>
-          <a:p>
-            <a:pPr algn="l" indent="0" marL="0">
-              <a:buNone/>
-            </a:pPr>
-            <a:r>
-              <a:rPr lang="en-US" sz="3400" b="1" dirty="0">
-                <a:solidFill>
-                  <a:schemeClr val="tx2"/>
-                </a:solidFill>
-              </a:rPr>
-              <a:t>AI の出力は、毎回変わる</a:t>
-            </a:r>
-            <a:endParaRPr lang="en-US" sz="3400" dirty="0"/>
-          </a:p>
-        </p:txBody>
-      </p:sp>
-      <p:graphicFrame>
-        <p:nvGraphicFramePr>
-          <p:cNvPr id="3" name="Chart 0" descr=""/>
-          <p:cNvGraphicFramePr/>
-          <p:nvPr/>
-        </p:nvGraphicFramePr>
-        <p:xfrm>
-          <a:off x="548640" y="1371600"/>
-          <a:ext cx="6766560" cy="4754880"/>
-        </p:xfrm>
-        <a:graphic xmlns:a="http://schemas.openxmlformats.org/drawingml/2006/main">
-          <a:graphicData uri="http://schemas.openxmlformats.org/drawingml/2006/chart">
-            <c:chart xmlns:c="http://schemas.openxmlformats.org/drawingml/2006/chart" r:id="rId1"/>
-          </a:graphicData>
-        </a:graphic>
-      </p:graphicFrame>
-      <p:sp>
-        <p:nvSpPr>
-          <p:cNvPr id="4" name="気づきのカード"/>
-          <p:cNvSpPr/>
-          <p:nvPr/>
-        </p:nvSpPr>
-        <p:spPr>
-          <a:xfrm>
-            <a:off x="7589520" y="1371600"/>
-            <a:ext cx="4023360" cy="2011680"/>
-          </a:xfrm>
-          <a:prstGeom prst="roundRect">
-            <a:avLst>
-              <a:gd name="adj" fmla="val 5455"/>
-            </a:avLst>
-          </a:prstGeom>
-          <a:solidFill>
-            <a:schemeClr val="bg2"/>
-          </a:solidFill>
-          <a:ln/>
-        </p:spPr>
-      </p:sp>
-      <p:sp>
-        <p:nvSpPr>
-          <p:cNvPr id="5" name="Text 2"/>
-          <p:cNvSpPr txBox="1"/>
-          <p:nvPr/>
-        </p:nvSpPr>
-        <p:spPr>
-          <a:xfrm>
-            <a:off x="7818120" y="1554480"/>
-            <a:ext cx="3566160" cy="1691640"/>
-          </a:xfrm>
-          <a:prstGeom prst="rect">
-            <a:avLst/>
-          </a:prstGeom>
-          <a:noFill/>
-          <a:ln/>
-        </p:spPr>
-        <p:txBody>
-          <a:bodyPr wrap="square" lIns="0" tIns="0" rIns="0" bIns="0" rtlCol="0" anchor="t"/>
-          <a:lstStyle/>
-          <a:p>
-            <a:pPr indent="0" marL="0">
-              <a:buNone/>
-            </a:pPr>
-            <a:r>
-              <a:rPr lang="en-US" sz="1800" dirty="0">
-                <a:solidFill>
-                  <a:schemeClr val="tx1"/>
-                </a:solidFill>
-                <a:latin typeface="Yu Gothic" pitchFamily="34" charset="0"/>
-                <a:ea typeface="Yu Gothic" pitchFamily="34" charset="-122"/>
-                <a:cs typeface="Yu Gothic" pitchFamily="34" charset="-120"/>
-              </a:rPr>
-              <a:t>2 回目は、AI が本物の脆弱性を「誤検知」と判定して、打ち消した</a:t>
-            </a:r>
-            <a:endParaRPr lang="en-US" sz="1800" dirty="0"/>
-          </a:p>
-        </p:txBody>
-      </p:sp>
-      <p:sp>
-        <p:nvSpPr>
-          <p:cNvPr id="6" name="教訓の帯"/>
-          <p:cNvSpPr/>
-          <p:nvPr/>
-        </p:nvSpPr>
-        <p:spPr>
-          <a:xfrm>
-            <a:off x="7589520" y="3611880"/>
-            <a:ext cx="4023360" cy="1188720"/>
-          </a:xfrm>
-          <a:prstGeom prst="roundRect">
-            <a:avLst>
-              <a:gd name="adj" fmla="val 9231"/>
-            </a:avLst>
-          </a:prstGeom>
-          <a:solidFill>
-            <a:schemeClr val="accent2"/>
-          </a:solidFill>
-          <a:ln/>
-        </p:spPr>
-      </p:sp>
-      <p:sp>
-        <p:nvSpPr>
-          <p:cNvPr id="7" name="Text 4"/>
-          <p:cNvSpPr txBox="1"/>
-          <p:nvPr/>
-        </p:nvSpPr>
-        <p:spPr>
-          <a:xfrm>
-            <a:off x="7818120" y="3611880"/>
-            <a:ext cx="3566160" cy="1188720"/>
-          </a:xfrm>
-          <a:prstGeom prst="rect">
-            <a:avLst/>
-          </a:prstGeom>
-          <a:noFill/>
-          <a:ln/>
-        </p:spPr>
-        <p:txBody>
-          <a:bodyPr wrap="square" lIns="0" tIns="0" rIns="0" bIns="0" rtlCol="0" anchor="ctr"/>
-          <a:lstStyle/>
-          <a:p>
-            <a:pPr indent="0" marL="0">
-              <a:buNone/>
-            </a:pPr>
-            <a:r>
-              <a:rPr lang="en-US" sz="1800" b="1" dirty="0">
-                <a:solidFill>
-                  <a:schemeClr val="tx1"/>
-                </a:solidFill>
-                <a:latin typeface="Yu Gothic" pitchFamily="34" charset="0"/>
-                <a:ea typeface="Yu Gothic" pitchFamily="34" charset="-122"/>
-                <a:cs typeface="Yu Gothic" pitchFamily="34" charset="-120"/>
-              </a:rPr>
-              <a:t>AI の「誤検知」判定を、確認せずに捨てない</a:t>
-            </a:r>
-            <a:endParaRPr lang="en-US" sz="1800" dirty="0"/>
-          </a:p>
-        </p:txBody>
-      </p:sp>
-      <p:sp>
-        <p:nvSpPr>
-          <p:cNvPr id="8" name="Text 5"/>
-          <p:cNvSpPr txBox="1"/>
-          <p:nvPr/>
-        </p:nvSpPr>
-        <p:spPr>
-          <a:xfrm>
-            <a:off x="7589520" y="5029200"/>
-            <a:ext cx="4023360" cy="1005840"/>
-          </a:xfrm>
-          <a:prstGeom prst="rect">
-            <a:avLst/>
-          </a:prstGeom>
-          <a:noFill/>
-          <a:ln/>
-        </p:spPr>
-        <p:txBody>
-          <a:bodyPr wrap="square" lIns="0" tIns="0" rIns="0" bIns="0" rtlCol="0" anchor="t"/>
-          <a:lstStyle/>
-          <a:p>
-            <a:pPr indent="0" marL="0">
-              <a:buNone/>
-            </a:pPr>
-            <a:r>
-              <a:rPr lang="en-US" sz="1400" dirty="0">
-                <a:solidFill>
-                  <a:schemeClr val="accent3"/>
-                </a:solidFill>
-                <a:latin typeface="Yu Gothic" pitchFamily="34" charset="0"/>
-                <a:ea typeface="Yu Gothic" pitchFamily="34" charset="-122"/>
-                <a:cs typeface="Yu Gothic" pitchFamily="34" charset="-120"/>
-              </a:rPr>
-              <a:t>1 つのモデル、1 つのアプリの結果。5 回の実行は集計中</a:t>
-            </a:r>
-            <a:endParaRPr lang="en-US" sz="1400" dirty="0"/>
-          </a:p>
-        </p:txBody>
-      </p:sp>
-      <p:sp>
-        <p:nvSpPr>
-          <p:cNvPr id="25" name="Slide Number Placeholder 0"/>
-          <p:cNvSpPr>
-            <a:spLocks noGrp="1"/>
-          </p:cNvSpPr>
-          <p:nvPr>
-            <p:ph type="sldNum" sz="quarter" idx="4294967295"/>
-          </p:nvPr>
-        </p:nvSpPr>
-        <p:spPr>
-          <a:xfrm>
-            <a:off x="10972800" y="6355080"/>
-            <a:ext cx="640080" cy="274320"/>
-          </a:xfrm>
-          <a:prstGeom prst="rect">
-            <a:avLst/>
-          </a:prstGeom>
-          <a:extLst>
-            <a:ext uri="{C572A759-6A51-4108-AA02-DFA0A04FC94B}">
-              <ma14:wrappingTextBoxFlag xmlns:ma14="http://schemas.microsoft.com/office/mac/drawingml/2011/main" val="0"/>
-            </a:ext>
-          </a:extLst>
-        </p:spPr>
-        <p:txBody>
-          <a:bodyPr/>
-          <a:lstStyle>
-            <a:lvl1pPr>
-              <a:defRPr sz="1100">
-                <a:solidFill>
-                  <a:schemeClr val="accent3"/>
-                </a:solidFill>
-              </a:defRPr>
-            </a:lvl1pPr>
-          </a:lstStyle>
-          <a:p>
-            <a:pPr algn="r"/>
-            <a:fld id="{F7021451-1387-4CA6-816F-3879F97B5CBC}" type="slidenum">
-              <a:rPr b="0" lang="en-US"/>
               <a:t>8</a:t>
             </a:fld>
             <a:endParaRPr lang="en-US"/>
@@ -9115,614 +10580,42 @@
                   <a:schemeClr val="tx2"/>
                 </a:solidFill>
               </a:rPr>
-              <a:t>AI との進め方</a:t>
+              <a:t>AI の出力は、毎回変わる</a:t>
             </a:r>
             <a:endParaRPr lang="en-US" sz="3400" dirty="0"/>
           </a:p>
         </p:txBody>
       </p:sp>
-      <p:sp>
-        <p:nvSpPr>
-          <p:cNvPr id="3" name="手順の円 1"/>
+      <p:graphicFrame>
+        <p:nvGraphicFramePr>
+          <p:cNvPr id="3" name="Chart 0" descr=""/>
+          <p:cNvGraphicFramePr/>
+          <p:nvPr/>
+        </p:nvGraphicFramePr>
+        <p:xfrm>
+          <a:off x="548640" y="1371600"/>
+          <a:ext cx="6766560" cy="4754880"/>
+        </p:xfrm>
+        <a:graphic xmlns:a="http://schemas.openxmlformats.org/drawingml/2006/main">
+          <a:graphicData uri="http://schemas.openxmlformats.org/drawingml/2006/chart">
+            <c:chart xmlns:c="http://schemas.openxmlformats.org/drawingml/2006/chart" r:id="rId1"/>
+          </a:graphicData>
+        </a:graphic>
+      </p:graphicFrame>
+      <p:sp>
+        <p:nvSpPr>
+          <p:cNvPr id="4" name="気づきのカード"/>
           <p:cNvSpPr/>
           <p:nvPr/>
         </p:nvSpPr>
         <p:spPr>
           <a:xfrm>
-            <a:off x="548640" y="1527048"/>
-            <a:ext cx="502920" cy="502920"/>
-          </a:xfrm>
-          <a:prstGeom prst="ellipse">
-            <a:avLst/>
-          </a:prstGeom>
-          <a:solidFill>
-            <a:schemeClr val="accent1"/>
-          </a:solidFill>
-          <a:ln/>
-        </p:spPr>
-      </p:sp>
-      <p:sp>
-        <p:nvSpPr>
-          <p:cNvPr id="4" name="Text 2"/>
-          <p:cNvSpPr txBox="1"/>
-          <p:nvPr/>
-        </p:nvSpPr>
-        <p:spPr>
-          <a:xfrm>
-            <a:off x="548640" y="1527048"/>
-            <a:ext cx="502920" cy="502920"/>
-          </a:xfrm>
-          <a:prstGeom prst="rect">
-            <a:avLst/>
-          </a:prstGeom>
-          <a:noFill/>
-          <a:ln/>
-        </p:spPr>
-        <p:txBody>
-          <a:bodyPr wrap="square" lIns="0" tIns="0" rIns="0" bIns="0" rtlCol="0" anchor="ctr"/>
-          <a:lstStyle/>
-          <a:p>
-            <a:pPr algn="ctr" indent="0" marL="0">
-              <a:buNone/>
-            </a:pPr>
-            <a:r>
-              <a:rPr lang="en-US" sz="1600" b="1" dirty="0">
-                <a:solidFill>
-                  <a:schemeClr val="bg1"/>
-                </a:solidFill>
-                <a:latin typeface="Yu Gothic" pitchFamily="34" charset="0"/>
-                <a:ea typeface="Yu Gothic" pitchFamily="34" charset="-122"/>
-                <a:cs typeface="Yu Gothic" pitchFamily="34" charset="-120"/>
-              </a:rPr>
-              <a:t>1</a:t>
-            </a:r>
-            <a:endParaRPr lang="en-US" sz="1600" dirty="0"/>
-          </a:p>
-        </p:txBody>
-      </p:sp>
-      <p:sp>
-        <p:nvSpPr>
-          <p:cNvPr id="5" name="Text 3"/>
-          <p:cNvSpPr txBox="1"/>
-          <p:nvPr/>
-        </p:nvSpPr>
-        <p:spPr>
-          <a:xfrm>
-            <a:off x="1280160" y="1463040"/>
-            <a:ext cx="5669280" cy="640080"/>
-          </a:xfrm>
-          <a:prstGeom prst="rect">
-            <a:avLst/>
-          </a:prstGeom>
-          <a:noFill/>
-          <a:ln/>
-        </p:spPr>
-        <p:txBody>
-          <a:bodyPr wrap="square" lIns="0" tIns="0" rIns="0" bIns="0" rtlCol="0" anchor="ctr"/>
-          <a:lstStyle/>
-          <a:p>
-            <a:pPr indent="0" marL="0">
-              <a:buNone/>
-            </a:pPr>
-            <a:r>
-              <a:rPr lang="en-US" sz="1600" dirty="0">
-                <a:solidFill>
-                  <a:schemeClr val="tx1"/>
-                </a:solidFill>
-                <a:latin typeface="Yu Gothic" pitchFamily="34" charset="0"/>
-                <a:ea typeface="Yu Gothic" pitchFamily="34" charset="-122"/>
-                <a:cs typeface="Yu Gothic" pitchFamily="34" charset="-120"/>
-              </a:rPr>
-              <a:t>目的を伝える</a:t>
-            </a:r>
-            <a:endParaRPr lang="en-US" sz="1600" dirty="0"/>
-          </a:p>
-        </p:txBody>
-      </p:sp>
-      <p:sp>
-        <p:nvSpPr>
-          <p:cNvPr id="6" name="手順の円 2"/>
-          <p:cNvSpPr/>
-          <p:nvPr/>
-        </p:nvSpPr>
-        <p:spPr>
-          <a:xfrm>
-            <a:off x="548640" y="2304288"/>
-            <a:ext cx="502920" cy="502920"/>
-          </a:xfrm>
-          <a:prstGeom prst="ellipse">
-            <a:avLst/>
-          </a:prstGeom>
-          <a:solidFill>
-            <a:schemeClr val="accent1"/>
-          </a:solidFill>
-          <a:ln/>
-        </p:spPr>
-      </p:sp>
-      <p:sp>
-        <p:nvSpPr>
-          <p:cNvPr id="7" name="Text 5"/>
-          <p:cNvSpPr txBox="1"/>
-          <p:nvPr/>
-        </p:nvSpPr>
-        <p:spPr>
-          <a:xfrm>
-            <a:off x="548640" y="2304288"/>
-            <a:ext cx="502920" cy="502920"/>
-          </a:xfrm>
-          <a:prstGeom prst="rect">
-            <a:avLst/>
-          </a:prstGeom>
-          <a:noFill/>
-          <a:ln/>
-        </p:spPr>
-        <p:txBody>
-          <a:bodyPr wrap="square" lIns="0" tIns="0" rIns="0" bIns="0" rtlCol="0" anchor="ctr"/>
-          <a:lstStyle/>
-          <a:p>
-            <a:pPr algn="ctr" indent="0" marL="0">
-              <a:buNone/>
-            </a:pPr>
-            <a:r>
-              <a:rPr lang="en-US" sz="1600" b="1" dirty="0">
-                <a:solidFill>
-                  <a:schemeClr val="bg1"/>
-                </a:solidFill>
-                <a:latin typeface="Yu Gothic" pitchFamily="34" charset="0"/>
-                <a:ea typeface="Yu Gothic" pitchFamily="34" charset="-122"/>
-                <a:cs typeface="Yu Gothic" pitchFamily="34" charset="-120"/>
-              </a:rPr>
-              <a:t>2</a:t>
-            </a:r>
-            <a:endParaRPr lang="en-US" sz="1600" dirty="0"/>
-          </a:p>
-        </p:txBody>
-      </p:sp>
-      <p:sp>
-        <p:nvSpPr>
-          <p:cNvPr id="8" name="Text 6"/>
-          <p:cNvSpPr txBox="1"/>
-          <p:nvPr/>
-        </p:nvSpPr>
-        <p:spPr>
-          <a:xfrm>
-            <a:off x="1280160" y="2240280"/>
-            <a:ext cx="5669280" cy="640080"/>
-          </a:xfrm>
-          <a:prstGeom prst="rect">
-            <a:avLst/>
-          </a:prstGeom>
-          <a:noFill/>
-          <a:ln/>
-        </p:spPr>
-        <p:txBody>
-          <a:bodyPr wrap="square" lIns="0" tIns="0" rIns="0" bIns="0" rtlCol="0" anchor="ctr"/>
-          <a:lstStyle/>
-          <a:p>
-            <a:pPr indent="0" marL="0">
-              <a:buNone/>
-            </a:pPr>
-            <a:r>
-              <a:rPr lang="en-US" sz="1600" dirty="0">
-                <a:solidFill>
-                  <a:schemeClr val="tx1"/>
-                </a:solidFill>
-                <a:latin typeface="Yu Gothic" pitchFamily="34" charset="0"/>
-                <a:ea typeface="Yu Gothic" pitchFamily="34" charset="-122"/>
-                <a:cs typeface="Yu Gothic" pitchFamily="34" charset="-120"/>
-              </a:rPr>
-              <a:t>AI が、コードとドキュメントを読んで調べる</a:t>
-            </a:r>
-            <a:endParaRPr lang="en-US" sz="1600" dirty="0"/>
-          </a:p>
-        </p:txBody>
-      </p:sp>
-      <p:sp>
-        <p:nvSpPr>
-          <p:cNvPr id="9" name="手順の円 3"/>
-          <p:cNvSpPr/>
-          <p:nvPr/>
-        </p:nvSpPr>
-        <p:spPr>
-          <a:xfrm>
-            <a:off x="548640" y="3081528"/>
-            <a:ext cx="502920" cy="502920"/>
-          </a:xfrm>
-          <a:prstGeom prst="ellipse">
-            <a:avLst/>
-          </a:prstGeom>
-          <a:solidFill>
-            <a:schemeClr val="accent1"/>
-          </a:solidFill>
-          <a:ln/>
-        </p:spPr>
-      </p:sp>
-      <p:sp>
-        <p:nvSpPr>
-          <p:cNvPr id="10" name="Text 8"/>
-          <p:cNvSpPr txBox="1"/>
-          <p:nvPr/>
-        </p:nvSpPr>
-        <p:spPr>
-          <a:xfrm>
-            <a:off x="548640" y="3081528"/>
-            <a:ext cx="502920" cy="502920"/>
-          </a:xfrm>
-          <a:prstGeom prst="rect">
-            <a:avLst/>
-          </a:prstGeom>
-          <a:noFill/>
-          <a:ln/>
-        </p:spPr>
-        <p:txBody>
-          <a:bodyPr wrap="square" lIns="0" tIns="0" rIns="0" bIns="0" rtlCol="0" anchor="ctr"/>
-          <a:lstStyle/>
-          <a:p>
-            <a:pPr algn="ctr" indent="0" marL="0">
-              <a:buNone/>
-            </a:pPr>
-            <a:r>
-              <a:rPr lang="en-US" sz="1600" b="1" dirty="0">
-                <a:solidFill>
-                  <a:schemeClr val="bg1"/>
-                </a:solidFill>
-                <a:latin typeface="Yu Gothic" pitchFamily="34" charset="0"/>
-                <a:ea typeface="Yu Gothic" pitchFamily="34" charset="-122"/>
-                <a:cs typeface="Yu Gothic" pitchFamily="34" charset="-120"/>
-              </a:rPr>
-              <a:t>3</a:t>
-            </a:r>
-            <a:endParaRPr lang="en-US" sz="1600" dirty="0"/>
-          </a:p>
-        </p:txBody>
-      </p:sp>
-      <p:sp>
-        <p:nvSpPr>
-          <p:cNvPr id="11" name="Text 9"/>
-          <p:cNvSpPr txBox="1"/>
-          <p:nvPr/>
-        </p:nvSpPr>
-        <p:spPr>
-          <a:xfrm>
-            <a:off x="1280160" y="3017520"/>
-            <a:ext cx="5669280" cy="640080"/>
-          </a:xfrm>
-          <a:prstGeom prst="rect">
-            <a:avLst/>
-          </a:prstGeom>
-          <a:noFill/>
-          <a:ln/>
-        </p:spPr>
-        <p:txBody>
-          <a:bodyPr wrap="square" lIns="0" tIns="0" rIns="0" bIns="0" rtlCol="0" anchor="ctr"/>
-          <a:lstStyle/>
-          <a:p>
-            <a:pPr indent="0" marL="0">
-              <a:buNone/>
-            </a:pPr>
-            <a:r>
-              <a:rPr lang="en-US" sz="1600" dirty="0">
-                <a:solidFill>
-                  <a:schemeClr val="tx1"/>
-                </a:solidFill>
-                <a:latin typeface="Yu Gothic" pitchFamily="34" charset="0"/>
-                <a:ea typeface="Yu Gothic" pitchFamily="34" charset="-122"/>
-                <a:cs typeface="Yu Gothic" pitchFamily="34" charset="-120"/>
-              </a:rPr>
-              <a:t>小さく実装して、作業環境で動かす</a:t>
-            </a:r>
-            <a:endParaRPr lang="en-US" sz="1600" dirty="0"/>
-          </a:p>
-        </p:txBody>
-      </p:sp>
-      <p:sp>
-        <p:nvSpPr>
-          <p:cNvPr id="12" name="手順の円 4"/>
-          <p:cNvSpPr/>
-          <p:nvPr/>
-        </p:nvSpPr>
-        <p:spPr>
-          <a:xfrm>
-            <a:off x="548640" y="3858768"/>
-            <a:ext cx="502920" cy="502920"/>
-          </a:xfrm>
-          <a:prstGeom prst="ellipse">
-            <a:avLst/>
-          </a:prstGeom>
-          <a:solidFill>
-            <a:schemeClr val="accent1"/>
-          </a:solidFill>
-          <a:ln/>
-        </p:spPr>
-      </p:sp>
-      <p:sp>
-        <p:nvSpPr>
-          <p:cNvPr id="13" name="Text 11"/>
-          <p:cNvSpPr txBox="1"/>
-          <p:nvPr/>
-        </p:nvSpPr>
-        <p:spPr>
-          <a:xfrm>
-            <a:off x="548640" y="3858768"/>
-            <a:ext cx="502920" cy="502920"/>
-          </a:xfrm>
-          <a:prstGeom prst="rect">
-            <a:avLst/>
-          </a:prstGeom>
-          <a:noFill/>
-          <a:ln/>
-        </p:spPr>
-        <p:txBody>
-          <a:bodyPr wrap="square" lIns="0" tIns="0" rIns="0" bIns="0" rtlCol="0" anchor="ctr"/>
-          <a:lstStyle/>
-          <a:p>
-            <a:pPr algn="ctr" indent="0" marL="0">
-              <a:buNone/>
-            </a:pPr>
-            <a:r>
-              <a:rPr lang="en-US" sz="1600" b="1" dirty="0">
-                <a:solidFill>
-                  <a:schemeClr val="bg1"/>
-                </a:solidFill>
-                <a:latin typeface="Yu Gothic" pitchFamily="34" charset="0"/>
-                <a:ea typeface="Yu Gothic" pitchFamily="34" charset="-122"/>
-                <a:cs typeface="Yu Gothic" pitchFamily="34" charset="-120"/>
-              </a:rPr>
-              <a:t>4</a:t>
-            </a:r>
-            <a:endParaRPr lang="en-US" sz="1600" dirty="0"/>
-          </a:p>
-        </p:txBody>
-      </p:sp>
-      <p:sp>
-        <p:nvSpPr>
-          <p:cNvPr id="14" name="Text 12"/>
-          <p:cNvSpPr txBox="1"/>
-          <p:nvPr/>
-        </p:nvSpPr>
-        <p:spPr>
-          <a:xfrm>
-            <a:off x="1280160" y="3794760"/>
-            <a:ext cx="5669280" cy="640080"/>
-          </a:xfrm>
-          <a:prstGeom prst="rect">
-            <a:avLst/>
-          </a:prstGeom>
-          <a:noFill/>
-          <a:ln/>
-        </p:spPr>
-        <p:txBody>
-          <a:bodyPr wrap="square" lIns="0" tIns="0" rIns="0" bIns="0" rtlCol="0" anchor="ctr"/>
-          <a:lstStyle/>
-          <a:p>
-            <a:pPr indent="0" marL="0">
-              <a:buNone/>
-            </a:pPr>
-            <a:r>
-              <a:rPr lang="en-US" sz="1600" dirty="0">
-                <a:solidFill>
-                  <a:schemeClr val="tx1"/>
-                </a:solidFill>
-                <a:latin typeface="Yu Gothic" pitchFamily="34" charset="0"/>
-                <a:ea typeface="Yu Gothic" pitchFamily="34" charset="-122"/>
-                <a:cs typeface="Yu Gothic" pitchFamily="34" charset="-120"/>
-              </a:rPr>
-              <a:t>PC や Actions で、実通信を確認する(出力を貼る)</a:t>
-            </a:r>
-            <a:endParaRPr lang="en-US" sz="1600" dirty="0"/>
-          </a:p>
-        </p:txBody>
-      </p:sp>
-      <p:sp>
-        <p:nvSpPr>
-          <p:cNvPr id="15" name="手順の円 5"/>
-          <p:cNvSpPr/>
-          <p:nvPr/>
-        </p:nvSpPr>
-        <p:spPr>
-          <a:xfrm>
-            <a:off x="548640" y="4636008"/>
-            <a:ext cx="502920" cy="502920"/>
-          </a:xfrm>
-          <a:prstGeom prst="ellipse">
-            <a:avLst/>
-          </a:prstGeom>
-          <a:solidFill>
-            <a:schemeClr val="accent1"/>
-          </a:solidFill>
-          <a:ln/>
-        </p:spPr>
-      </p:sp>
-      <p:sp>
-        <p:nvSpPr>
-          <p:cNvPr id="16" name="Text 14"/>
-          <p:cNvSpPr txBox="1"/>
-          <p:nvPr/>
-        </p:nvSpPr>
-        <p:spPr>
-          <a:xfrm>
-            <a:off x="548640" y="4636008"/>
-            <a:ext cx="502920" cy="502920"/>
-          </a:xfrm>
-          <a:prstGeom prst="rect">
-            <a:avLst/>
-          </a:prstGeom>
-          <a:noFill/>
-          <a:ln/>
-        </p:spPr>
-        <p:txBody>
-          <a:bodyPr wrap="square" lIns="0" tIns="0" rIns="0" bIns="0" rtlCol="0" anchor="ctr"/>
-          <a:lstStyle/>
-          <a:p>
-            <a:pPr algn="ctr" indent="0" marL="0">
-              <a:buNone/>
-            </a:pPr>
-            <a:r>
-              <a:rPr lang="en-US" sz="1600" b="1" dirty="0">
-                <a:solidFill>
-                  <a:schemeClr val="bg1"/>
-                </a:solidFill>
-                <a:latin typeface="Yu Gothic" pitchFamily="34" charset="0"/>
-                <a:ea typeface="Yu Gothic" pitchFamily="34" charset="-122"/>
-                <a:cs typeface="Yu Gothic" pitchFamily="34" charset="-120"/>
-              </a:rPr>
-              <a:t>5</a:t>
-            </a:r>
-            <a:endParaRPr lang="en-US" sz="1600" dirty="0"/>
-          </a:p>
-        </p:txBody>
-      </p:sp>
-      <p:sp>
-        <p:nvSpPr>
-          <p:cNvPr id="17" name="Text 15"/>
-          <p:cNvSpPr txBox="1"/>
-          <p:nvPr/>
-        </p:nvSpPr>
-        <p:spPr>
-          <a:xfrm>
-            <a:off x="1280160" y="4572000"/>
-            <a:ext cx="5669280" cy="640080"/>
-          </a:xfrm>
-          <a:prstGeom prst="rect">
-            <a:avLst/>
-          </a:prstGeom>
-          <a:noFill/>
-          <a:ln/>
-        </p:spPr>
-        <p:txBody>
-          <a:bodyPr wrap="square" lIns="0" tIns="0" rIns="0" bIns="0" rtlCol="0" anchor="ctr"/>
-          <a:lstStyle/>
-          <a:p>
-            <a:pPr indent="0" marL="0">
-              <a:buNone/>
-            </a:pPr>
-            <a:r>
-              <a:rPr lang="en-US" sz="1600" dirty="0">
-                <a:solidFill>
-                  <a:schemeClr val="tx1"/>
-                </a:solidFill>
-                <a:latin typeface="Yu Gothic" pitchFamily="34" charset="0"/>
-                <a:ea typeface="Yu Gothic" pitchFamily="34" charset="-122"/>
-                <a:cs typeface="Yu Gothic" pitchFamily="34" charset="-120"/>
-              </a:rPr>
-              <a:t>AI が出力を読んで、不具合を直す</a:t>
-            </a:r>
-            <a:endParaRPr lang="en-US" sz="1600" dirty="0"/>
-          </a:p>
-        </p:txBody>
-      </p:sp>
-      <p:sp>
-        <p:nvSpPr>
-          <p:cNvPr id="18" name="手順の円 6"/>
-          <p:cNvSpPr/>
-          <p:nvPr/>
-        </p:nvSpPr>
-        <p:spPr>
-          <a:xfrm>
-            <a:off x="548640" y="5413248"/>
-            <a:ext cx="502920" cy="502920"/>
-          </a:xfrm>
-          <a:prstGeom prst="ellipse">
-            <a:avLst/>
-          </a:prstGeom>
-          <a:solidFill>
-            <a:schemeClr val="accent1"/>
-          </a:solidFill>
-          <a:ln/>
-        </p:spPr>
-      </p:sp>
-      <p:sp>
-        <p:nvSpPr>
-          <p:cNvPr id="19" name="Text 17"/>
-          <p:cNvSpPr txBox="1"/>
-          <p:nvPr/>
-        </p:nvSpPr>
-        <p:spPr>
-          <a:xfrm>
-            <a:off x="548640" y="5413248"/>
-            <a:ext cx="502920" cy="502920"/>
-          </a:xfrm>
-          <a:prstGeom prst="rect">
-            <a:avLst/>
-          </a:prstGeom>
-          <a:noFill/>
-          <a:ln/>
-        </p:spPr>
-        <p:txBody>
-          <a:bodyPr wrap="square" lIns="0" tIns="0" rIns="0" bIns="0" rtlCol="0" anchor="ctr"/>
-          <a:lstStyle/>
-          <a:p>
-            <a:pPr algn="ctr" indent="0" marL="0">
-              <a:buNone/>
-            </a:pPr>
-            <a:r>
-              <a:rPr lang="en-US" sz="1600" b="1" dirty="0">
-                <a:solidFill>
-                  <a:schemeClr val="bg1"/>
-                </a:solidFill>
-                <a:latin typeface="Yu Gothic" pitchFamily="34" charset="0"/>
-                <a:ea typeface="Yu Gothic" pitchFamily="34" charset="-122"/>
-                <a:cs typeface="Yu Gothic" pitchFamily="34" charset="-120"/>
-              </a:rPr>
-              <a:t>6</a:t>
-            </a:r>
-            <a:endParaRPr lang="en-US" sz="1600" dirty="0"/>
-          </a:p>
-        </p:txBody>
-      </p:sp>
-      <p:sp>
-        <p:nvSpPr>
-          <p:cNvPr id="20" name="Text 18"/>
-          <p:cNvSpPr txBox="1"/>
-          <p:nvPr/>
-        </p:nvSpPr>
-        <p:spPr>
-          <a:xfrm>
-            <a:off x="1280160" y="5349240"/>
-            <a:ext cx="5669280" cy="640080"/>
-          </a:xfrm>
-          <a:prstGeom prst="rect">
-            <a:avLst/>
-          </a:prstGeom>
-          <a:noFill/>
-          <a:ln/>
-        </p:spPr>
-        <p:txBody>
-          <a:bodyPr wrap="square" lIns="0" tIns="0" rIns="0" bIns="0" rtlCol="0" anchor="ctr"/>
-          <a:lstStyle/>
-          <a:p>
-            <a:pPr indent="0" marL="0">
-              <a:buNone/>
-            </a:pPr>
-            <a:r>
-              <a:rPr lang="en-US" sz="1600" dirty="0">
-                <a:solidFill>
-                  <a:schemeClr val="tx1"/>
-                </a:solidFill>
-                <a:latin typeface="Yu Gothic" pitchFamily="34" charset="0"/>
-                <a:ea typeface="Yu Gothic" pitchFamily="34" charset="-122"/>
-                <a:cs typeface="Yu Gothic" pitchFamily="34" charset="-120"/>
-              </a:rPr>
-              <a:t>確認できたことと未確認を、ノートと PR に残す</a:t>
-            </a:r>
-            <a:endParaRPr lang="en-US" sz="1600" dirty="0"/>
-          </a:p>
-        </p:txBody>
-      </p:sp>
-      <p:sp>
-        <p:nvSpPr>
-          <p:cNvPr id="21" name="コツのカード"/>
-          <p:cNvSpPr/>
-          <p:nvPr/>
-        </p:nvSpPr>
-        <p:spPr>
-          <a:xfrm>
-            <a:off x="7315200" y="1463040"/>
-            <a:ext cx="4297680" cy="4572000"/>
+            <a:off x="7589520" y="1371600"/>
+            <a:ext cx="4023360" cy="2011680"/>
           </a:xfrm>
           <a:prstGeom prst="roundRect">
             <a:avLst>
-              <a:gd name="adj" fmla="val 2553"/>
+              <a:gd name="adj" fmla="val 5455"/>
             </a:avLst>
           </a:prstGeom>
           <a:solidFill>
@@ -9733,17 +10626,58 @@
       </p:sp>
       <p:sp>
         <p:nvSpPr>
-          <p:cNvPr id="22" name="コツ 円"/>
+          <p:cNvPr id="5" name="Text 2"/>
+          <p:cNvSpPr txBox="1"/>
+          <p:nvPr/>
+        </p:nvSpPr>
+        <p:spPr>
+          <a:xfrm>
+            <a:off x="7818120" y="1554480"/>
+            <a:ext cx="3566160" cy="1691640"/>
+          </a:xfrm>
+          <a:prstGeom prst="rect">
+            <a:avLst/>
+          </a:prstGeom>
+          <a:noFill/>
+          <a:ln/>
+        </p:spPr>
+        <p:txBody>
+          <a:bodyPr wrap="square" lIns="0" tIns="0" rIns="0" bIns="0" rtlCol="0" anchor="t"/>
+          <a:lstStyle/>
+          <a:p>
+            <a:pPr indent="0" marL="0">
+              <a:buNone/>
+            </a:pPr>
+            <a:r>
+              <a:rPr lang="en-US" sz="1800" dirty="0">
+                <a:solidFill>
+                  <a:schemeClr val="tx1"/>
+                </a:solidFill>
+                <a:latin typeface="Yu Gothic" pitchFamily="34" charset="0"/>
+                <a:ea typeface="Yu Gothic" pitchFamily="34" charset="-122"/>
+                <a:cs typeface="Yu Gothic" pitchFamily="34" charset="-120"/>
+              </a:rPr>
+              <a:t>2 回目は、AI が本物の脆弱性を「誤検知」と判定して、打ち消した</a:t>
+            </a:r>
+            <a:endParaRPr lang="en-US" sz="1800" dirty="0"/>
+          </a:p>
+        </p:txBody>
+      </p:sp>
+      <p:sp>
+        <p:nvSpPr>
+          <p:cNvPr id="6" name="教訓の帯"/>
           <p:cNvSpPr/>
           <p:nvPr/>
         </p:nvSpPr>
         <p:spPr>
           <a:xfrm>
-            <a:off x="7635240" y="1737360"/>
-            <a:ext cx="685800" cy="685800"/>
-          </a:xfrm>
-          <a:prstGeom prst="ellipse">
-            <a:avLst/>
+            <a:off x="7589520" y="3611880"/>
+            <a:ext cx="4023360" cy="1188720"/>
+          </a:xfrm>
+          <a:prstGeom prst="roundRect">
+            <a:avLst>
+              <a:gd name="adj" fmla="val 9231"/>
+            </a:avLst>
           </a:prstGeom>
           <a:solidFill>
             <a:schemeClr val="accent2"/>
@@ -9751,40 +10685,16 @@
           <a:ln/>
         </p:spPr>
       </p:sp>
-      <p:pic>
-        <p:nvPicPr>
-          <p:cNvPr id="23" name="Image 0" descr="コツ">    </p:cNvPr>
-          <p:cNvPicPr>
-            <a:picLocks noChangeAspect="1"/>
-          </p:cNvPicPr>
-          <p:nvPr/>
-        </p:nvPicPr>
-        <p:blipFill>
-          <a:blip r:embed="rId1"/>
-          <a:stretch>
-            <a:fillRect/>
-          </a:stretch>
-        </p:blipFill>
-        <p:spPr>
-          <a:xfrm>
-            <a:off x="7806690" y="1908810"/>
-            <a:ext cx="342900" cy="342900"/>
-          </a:xfrm>
-          <a:prstGeom prst="rect">
-            <a:avLst/>
-          </a:prstGeom>
-        </p:spPr>
-      </p:pic>
-      <p:sp>
-        <p:nvSpPr>
-          <p:cNvPr id="24" name="Text 21"/>
+      <p:sp>
+        <p:nvSpPr>
+          <p:cNvPr id="7" name="Text 4"/>
           <p:cNvSpPr txBox="1"/>
           <p:nvPr/>
         </p:nvSpPr>
         <p:spPr>
           <a:xfrm>
-            <a:off x="8503920" y="1737360"/>
-            <a:ext cx="2926080" cy="685800"/>
+            <a:off x="7818120" y="3611880"/>
+            <a:ext cx="3566160" cy="1188720"/>
           </a:xfrm>
           <a:prstGeom prst="rect">
             <a:avLst/>
@@ -9800,30 +10710,30 @@
               <a:buNone/>
             </a:pPr>
             <a:r>
-              <a:rPr lang="en-US" sz="2200" b="1" dirty="0">
-                <a:solidFill>
-                  <a:schemeClr val="tx2"/>
-                </a:solidFill>
-                <a:latin typeface="Yu Gothic" pitchFamily="34" charset="0"/>
-                <a:ea typeface="Yu Gothic" pitchFamily="34" charset="-122"/>
-                <a:cs typeface="Yu Gothic" pitchFamily="34" charset="-120"/>
-              </a:rPr>
-              <a:t>コツ</a:t>
-            </a:r>
-            <a:endParaRPr lang="en-US" sz="2200" dirty="0"/>
-          </a:p>
-        </p:txBody>
-      </p:sp>
-      <p:sp>
-        <p:nvSpPr>
-          <p:cNvPr id="25" name="Text 22"/>
+              <a:rPr lang="en-US" sz="1800" b="1" dirty="0">
+                <a:solidFill>
+                  <a:schemeClr val="tx1"/>
+                </a:solidFill>
+                <a:latin typeface="Yu Gothic" pitchFamily="34" charset="0"/>
+                <a:ea typeface="Yu Gothic" pitchFamily="34" charset="-122"/>
+                <a:cs typeface="Yu Gothic" pitchFamily="34" charset="-120"/>
+              </a:rPr>
+              <a:t>AI の「誤検知」判定を、確認せずに捨てない</a:t>
+            </a:r>
+            <a:endParaRPr lang="en-US" sz="1800" dirty="0"/>
+          </a:p>
+        </p:txBody>
+      </p:sp>
+      <p:sp>
+        <p:nvSpPr>
+          <p:cNvPr id="8" name="Text 5"/>
           <p:cNvSpPr txBox="1"/>
           <p:nvPr/>
         </p:nvSpPr>
         <p:spPr>
           <a:xfrm>
-            <a:off x="7635240" y="2743200"/>
-            <a:ext cx="3657600" cy="3108960"/>
+            <a:off x="7589520" y="5029200"/>
+            <a:ext cx="4023360" cy="1005840"/>
           </a:xfrm>
           <a:prstGeom prst="rect">
             <a:avLst/>
@@ -9835,67 +10745,21 @@
           <a:bodyPr wrap="square" lIns="0" tIns="0" rIns="0" bIns="0" rtlCol="0" anchor="t"/>
           <a:lstStyle/>
           <a:p>
-            <a:pPr marL="342900" indent="-342900">
-              <a:spcAft>
-                <a:spcPts val="1400"/>
-              </a:spcAft>
-              <a:buSzPct val="100000"/>
-              <a:buChar char="•"/>
-            </a:pPr>
-            <a:r>
-              <a:rPr lang="en-US" sz="1800" dirty="0">
-                <a:solidFill>
-                  <a:schemeClr val="tx1"/>
-                </a:solidFill>
-                <a:latin typeface="Yu Gothic" pitchFamily="34" charset="0"/>
-                <a:ea typeface="Yu Gothic" pitchFamily="34" charset="-122"/>
-                <a:cs typeface="Yu Gothic" pitchFamily="34" charset="-120"/>
-              </a:rPr>
-              <a:t>出力は、省略せずに貼る</a:t>
-            </a:r>
-            <a:endParaRPr lang="en-US" sz="1800" dirty="0"/>
-          </a:p>
-          <a:p>
-            <a:pPr marL="342900" indent="-342900">
-              <a:spcAft>
-                <a:spcPts val="1400"/>
-              </a:spcAft>
-              <a:buSzPct val="100000"/>
-              <a:buChar char="•"/>
-            </a:pPr>
-            <a:r>
-              <a:rPr lang="en-US" sz="1800" dirty="0">
-                <a:solidFill>
-                  <a:schemeClr val="tx1"/>
-                </a:solidFill>
-                <a:latin typeface="Yu Gothic" pitchFamily="34" charset="0"/>
-                <a:ea typeface="Yu Gothic" pitchFamily="34" charset="-122"/>
-                <a:cs typeface="Yu Gothic" pitchFamily="34" charset="-120"/>
-              </a:rPr>
-              <a:t>どこで実行するか(Windows か WSL か)を、コマンドごとに明記してもらう</a:t>
-            </a:r>
-            <a:endParaRPr lang="en-US" sz="1800" dirty="0"/>
-          </a:p>
-          <a:p>
-            <a:pPr marL="342900" indent="-342900">
-              <a:spcAft>
-                <a:spcPts val="1400"/>
-              </a:spcAft>
-              <a:buSzPct val="100000"/>
-              <a:buChar char="•"/>
-            </a:pPr>
-            <a:r>
-              <a:rPr lang="en-US" sz="1800" dirty="0">
-                <a:solidFill>
-                  <a:schemeClr val="tx1"/>
-                </a:solidFill>
-                <a:latin typeface="Yu Gothic" pitchFamily="34" charset="0"/>
-                <a:ea typeface="Yu Gothic" pitchFamily="34" charset="-122"/>
-                <a:cs typeface="Yu Gothic" pitchFamily="34" charset="-120"/>
-              </a:rPr>
-              <a:t>AI の説明が、推測か確認済みかを聞く</a:t>
-            </a:r>
-            <a:endParaRPr lang="en-US" sz="1800" dirty="0"/>
+            <a:pPr indent="0" marL="0">
+              <a:buNone/>
+            </a:pPr>
+            <a:r>
+              <a:rPr lang="en-US" sz="1400" dirty="0">
+                <a:solidFill>
+                  <a:schemeClr val="accent3"/>
+                </a:solidFill>
+                <a:latin typeface="Yu Gothic" pitchFamily="34" charset="0"/>
+                <a:ea typeface="Yu Gothic" pitchFamily="34" charset="-122"/>
+                <a:cs typeface="Yu Gothic" pitchFamily="34" charset="-120"/>
+              </a:rPr>
+              <a:t>1 つのモデル、1 つのアプリの結果。5 回の実行は集計中</a:t>
+            </a:r>
+            <a:endParaRPr lang="en-US" sz="1400" dirty="0"/>
           </a:p>
         </p:txBody>
       </p:sp>

--- a/docs/ai-built-tools-process.pptx
+++ b/docs/ai-built-tools-process.pptx
@@ -16,9 +16,10 @@
     <p:sldId id="264" r:id="rId10"/>
     <p:sldId id="265" r:id="rId11"/>
     <p:sldId id="266" r:id="rId12"/>
+    <p:sldId id="267" r:id="rId13"/>
   </p:sldIdLst>
   <p:notesMasterIdLst>
-    <p:notesMasterId r:id="rId13"/>
+    <p:notesMasterId r:id="rId14"/>
   </p:notesMasterIdLst>
   <p:sldSz cx="12192000" cy="6858000"/>
   <p:notesSz cx="6858000" cy="12192000"/>
@@ -117,13 +118,13 @@
   <p:extLst>
     <p:ext uri="{521415D9-36F7-43E2-AB2F-B90AF26B5E84}">
       <p14:sectionLst xmlns:p14="http://schemas.microsoft.com/office/powerpoint/2010/main">
-        <p14:section name="導入" id="{9f06d225-3c2f-85eb-91fd-62ffbe827449}">
+        <p14:section name="導入" id="{7aa4da58-d2fb-b780-278f-2f0d0f3d5637}">
           <p14:sldIdLst>
             <p14:sldId id="256"/>
             <p14:sldId id="257"/>
           </p14:sldIdLst>
         </p14:section>
-        <p14:section name="工程" id="{4a8239ad-b855-700c-12b9-a8133757f982}">
+        <p14:section name="工程" id="{1f29aff3-4ce0-67bf-e0f7-dccd1ecb27b5}">
           <p14:sldIdLst>
             <p14:sldId id="258"/>
             <p14:sldId id="259"/>
@@ -132,16 +133,17 @@
             <p14:sldId id="262"/>
           </p14:sldIdLst>
         </p14:section>
-        <p14:section name="結果" id="{37ec8711-8cd7-c687-160f-3fd22523fb97}">
+        <p14:section name="結果" id="{3cb6d174-2361-a0e1-4874-ae81545120d3}">
           <p14:sldIdLst>
             <p14:sldId id="263"/>
             <p14:sldId id="264"/>
           </p14:sldIdLst>
         </p14:section>
-        <p14:section name="まとめ" id="{e76955b7-6d85-f3e3-0e7e-9b16009b85c7}">
+        <p14:section name="まとめ" id="{10b2a5df-ba97-6af7-77a7-68993449cd44}">
           <p14:sldIdLst>
             <p14:sldId id="265"/>
             <p14:sldId id="266"/>
+            <p14:sldId id="267"/>
           </p14:sldIdLst>
         </p14:section>
       </p14:sectionLst>
@@ -1011,7 +1013,7 @@
           <a:p>
             <a:r>
               <a:rPr lang="en-US" dirty="0"/>
-              <a:t>今日も、PowerShell 用のコマンドを WSL に貼ってしまう場面がありました。どこで実行するかを、毎回明記してもらうと、防げます。</a:t>
+              <a:t>モックは両方の仕事です。『本物なしで確かめたい』という発想は人の問いから出て、具体的なコードは AI が書くことが多いです。ただし、AI が作る主役でも、実機での確認と、マージ・公開の判断は、人が持ちます。今日も、PowerShell 用のコマンドを WSL に貼ってしまう場面や、ポートの衝突など、PC でしか分からないことがありました。</a:t>
             </a:r>
             <a:endParaRPr lang="en-US" dirty="0"/>
           </a:p>
@@ -1099,7 +1101,7 @@
           <a:p>
             <a:r>
               <a:rPr lang="en-US" dirty="0"/>
-              <a:t>公開するときは、この 4 点を確認します。残りの作業は、docs/remaining-tasks.ja.md に、まとめてあります。</a:t>
+              <a:t>今日も、PowerShell 用のコマンドを WSL に貼ってしまう場面がありました。どこで実行するかを、毎回明記してもらうと、防げます。</a:t>
             </a:r>
             <a:endParaRPr lang="en-US" dirty="0"/>
           </a:p>
@@ -1123,6 +1125,94 @@
             <a:fld id="{F7021451-1387-4CA6-816F-3879F97B5CBC}" type="slidenum">
               <a:rPr lang="en-US"/>
               <a:t>11</a:t>
+            </a:fld>
+            <a:endParaRPr lang="en-US"/>
+          </a:p>
+        </p:txBody>
+      </p:sp>
+    </p:spTree>
+    <p:extLst>
+      <p:ext uri="{BB962C8B-B14F-4D97-AF65-F5344CB8AC3E}">
+        <p14:creationId xmlns:p14="http://schemas.microsoft.com/office/powerpoint/2010/main" val="1024086991"/>
+      </p:ext>
+    </p:extLst>
+  </p:cSld>
+  <p:clrMapOvr>
+    <a:masterClrMapping/>
+  </p:clrMapOvr>
+</p:notes>
+</file>
+
+<file path=ppt/notesSlides/notesSlide12.xml><?xml version="1.0" encoding="utf-8"?>
+<p:notes xmlns:a="http://schemas.openxmlformats.org/drawingml/2006/main" xmlns:r="http://schemas.openxmlformats.org/officeDocument/2006/relationships" xmlns:p="http://schemas.openxmlformats.org/presentationml/2006/main">
+  <p:cSld>
+    <p:spTree>
+      <p:nvGrpSpPr>
+        <p:cNvPr id="1" name=""/>
+        <p:cNvGrpSpPr/>
+        <p:nvPr/>
+      </p:nvGrpSpPr>
+      <p:grpSpPr>
+        <a:xfrm>
+          <a:off x="0" y="0"/>
+          <a:ext cx="0" cy="0"/>
+          <a:chOff x="0" y="0"/>
+          <a:chExt cx="0" cy="0"/>
+        </a:xfrm>
+      </p:grpSpPr>
+      <p:sp>
+        <p:nvSpPr>
+          <p:cNvPr id="2" name="Slide Image Placeholder 1"/>
+          <p:cNvSpPr>
+            <a:spLocks noGrp="1" noRot="1" noChangeAspect="1"/>
+          </p:cNvSpPr>
+          <p:nvPr>
+            <p:ph type="sldImg"/>
+          </p:nvPr>
+        </p:nvSpPr>
+        <p:spPr/>
+      </p:sp>
+      <p:sp>
+        <p:nvSpPr>
+          <p:cNvPr id="3" name="Notes Placeholder 2"/>
+          <p:cNvSpPr>
+            <a:spLocks noGrp="1"/>
+          </p:cNvSpPr>
+          <p:nvPr>
+            <p:ph type="body" idx="1"/>
+          </p:nvPr>
+        </p:nvSpPr>
+        <p:spPr/>
+        <p:txBody>
+          <a:bodyPr/>
+          <a:lstStyle/>
+          <a:p>
+            <a:r>
+              <a:rPr lang="en-US" dirty="0"/>
+              <a:t>公開するときは、この 4 点を確認します。残りの作業は、docs/remaining-tasks.ja.md に、まとめてあります。</a:t>
+            </a:r>
+            <a:endParaRPr lang="en-US" dirty="0"/>
+          </a:p>
+        </p:txBody>
+      </p:sp>
+      <p:sp>
+        <p:nvSpPr>
+          <p:cNvPr id="4" name="Slide Number Placeholder 3"/>
+          <p:cNvSpPr>
+            <a:spLocks noGrp="1"/>
+          </p:cNvSpPr>
+          <p:nvPr>
+            <p:ph type="sldNum" sz="quarter" idx="10"/>
+          </p:nvPr>
+        </p:nvSpPr>
+        <p:spPr/>
+        <p:txBody>
+          <a:bodyPr/>
+          <a:lstStyle/>
+          <a:p>
+            <a:fld id="{F7021451-1387-4CA6-816F-3879F97B5CBC}" type="slidenum">
+              <a:rPr lang="en-US"/>
+              <a:t>12</a:t>
             </a:fld>
             <a:endParaRPr lang="en-US"/>
           </a:p>
@@ -2781,7 +2871,7 @@
                   <a:schemeClr val="tx2"/>
                 </a:solidFill>
               </a:rPr>
-              <a:t>AI との進め方</a:t>
+              <a:t>人と AI の分担</a:t>
             </a:r>
             <a:endParaRPr lang="en-US" sz="3400" dirty="0"/>
           </a:p>
@@ -2789,606 +2879,18 @@
       </p:sp>
       <p:sp>
         <p:nvSpPr>
-          <p:cNvPr id="3" name="手順の円 1"/>
+          <p:cNvPr id="3" name="人(あなた) のカード"/>
           <p:cNvSpPr/>
           <p:nvPr/>
         </p:nvSpPr>
         <p:spPr>
           <a:xfrm>
-            <a:off x="548640" y="1527048"/>
-            <a:ext cx="502920" cy="502920"/>
-          </a:xfrm>
-          <a:prstGeom prst="ellipse">
-            <a:avLst/>
-          </a:prstGeom>
-          <a:solidFill>
-            <a:schemeClr val="accent1"/>
-          </a:solidFill>
-          <a:ln/>
-        </p:spPr>
-      </p:sp>
-      <p:sp>
-        <p:nvSpPr>
-          <p:cNvPr id="4" name="Text 2"/>
-          <p:cNvSpPr txBox="1"/>
-          <p:nvPr/>
-        </p:nvSpPr>
-        <p:spPr>
-          <a:xfrm>
-            <a:off x="548640" y="1527048"/>
-            <a:ext cx="502920" cy="502920"/>
-          </a:xfrm>
-          <a:prstGeom prst="rect">
-            <a:avLst/>
-          </a:prstGeom>
-          <a:noFill/>
-          <a:ln/>
-        </p:spPr>
-        <p:txBody>
-          <a:bodyPr wrap="square" lIns="0" tIns="0" rIns="0" bIns="0" rtlCol="0" anchor="ctr"/>
-          <a:lstStyle/>
-          <a:p>
-            <a:pPr algn="ctr" indent="0" marL="0">
-              <a:buNone/>
-            </a:pPr>
-            <a:r>
-              <a:rPr lang="en-US" sz="1600" b="1" dirty="0">
-                <a:solidFill>
-                  <a:schemeClr val="bg1"/>
-                </a:solidFill>
-                <a:latin typeface="Yu Gothic" pitchFamily="34" charset="0"/>
-                <a:ea typeface="Yu Gothic" pitchFamily="34" charset="-122"/>
-                <a:cs typeface="Yu Gothic" pitchFamily="34" charset="-120"/>
-              </a:rPr>
-              <a:t>1</a:t>
-            </a:r>
-            <a:endParaRPr lang="en-US" sz="1600" dirty="0"/>
-          </a:p>
-        </p:txBody>
-      </p:sp>
-      <p:sp>
-        <p:nvSpPr>
-          <p:cNvPr id="5" name="Text 3"/>
-          <p:cNvSpPr txBox="1"/>
-          <p:nvPr/>
-        </p:nvSpPr>
-        <p:spPr>
-          <a:xfrm>
-            <a:off x="1280160" y="1463040"/>
-            <a:ext cx="5669280" cy="640080"/>
-          </a:xfrm>
-          <a:prstGeom prst="rect">
-            <a:avLst/>
-          </a:prstGeom>
-          <a:noFill/>
-          <a:ln/>
-        </p:spPr>
-        <p:txBody>
-          <a:bodyPr wrap="square" lIns="0" tIns="0" rIns="0" bIns="0" rtlCol="0" anchor="ctr"/>
-          <a:lstStyle/>
-          <a:p>
-            <a:pPr indent="0" marL="0">
-              <a:buNone/>
-            </a:pPr>
-            <a:r>
-              <a:rPr lang="en-US" sz="1600" dirty="0">
-                <a:solidFill>
-                  <a:schemeClr val="tx1"/>
-                </a:solidFill>
-                <a:latin typeface="Yu Gothic" pitchFamily="34" charset="0"/>
-                <a:ea typeface="Yu Gothic" pitchFamily="34" charset="-122"/>
-                <a:cs typeface="Yu Gothic" pitchFamily="34" charset="-120"/>
-              </a:rPr>
-              <a:t>目的を伝える</a:t>
-            </a:r>
-            <a:endParaRPr lang="en-US" sz="1600" dirty="0"/>
-          </a:p>
-        </p:txBody>
-      </p:sp>
-      <p:sp>
-        <p:nvSpPr>
-          <p:cNvPr id="6" name="手順の円 2"/>
-          <p:cNvSpPr/>
-          <p:nvPr/>
-        </p:nvSpPr>
-        <p:spPr>
-          <a:xfrm>
-            <a:off x="548640" y="2304288"/>
-            <a:ext cx="502920" cy="502920"/>
-          </a:xfrm>
-          <a:prstGeom prst="ellipse">
-            <a:avLst/>
-          </a:prstGeom>
-          <a:solidFill>
-            <a:schemeClr val="accent1"/>
-          </a:solidFill>
-          <a:ln/>
-        </p:spPr>
-      </p:sp>
-      <p:sp>
-        <p:nvSpPr>
-          <p:cNvPr id="7" name="Text 5"/>
-          <p:cNvSpPr txBox="1"/>
-          <p:nvPr/>
-        </p:nvSpPr>
-        <p:spPr>
-          <a:xfrm>
-            <a:off x="548640" y="2304288"/>
-            <a:ext cx="502920" cy="502920"/>
-          </a:xfrm>
-          <a:prstGeom prst="rect">
-            <a:avLst/>
-          </a:prstGeom>
-          <a:noFill/>
-          <a:ln/>
-        </p:spPr>
-        <p:txBody>
-          <a:bodyPr wrap="square" lIns="0" tIns="0" rIns="0" bIns="0" rtlCol="0" anchor="ctr"/>
-          <a:lstStyle/>
-          <a:p>
-            <a:pPr algn="ctr" indent="0" marL="0">
-              <a:buNone/>
-            </a:pPr>
-            <a:r>
-              <a:rPr lang="en-US" sz="1600" b="1" dirty="0">
-                <a:solidFill>
-                  <a:schemeClr val="bg1"/>
-                </a:solidFill>
-                <a:latin typeface="Yu Gothic" pitchFamily="34" charset="0"/>
-                <a:ea typeface="Yu Gothic" pitchFamily="34" charset="-122"/>
-                <a:cs typeface="Yu Gothic" pitchFamily="34" charset="-120"/>
-              </a:rPr>
-              <a:t>2</a:t>
-            </a:r>
-            <a:endParaRPr lang="en-US" sz="1600" dirty="0"/>
-          </a:p>
-        </p:txBody>
-      </p:sp>
-      <p:sp>
-        <p:nvSpPr>
-          <p:cNvPr id="8" name="Text 6"/>
-          <p:cNvSpPr txBox="1"/>
-          <p:nvPr/>
-        </p:nvSpPr>
-        <p:spPr>
-          <a:xfrm>
-            <a:off x="1280160" y="2240280"/>
-            <a:ext cx="5669280" cy="640080"/>
-          </a:xfrm>
-          <a:prstGeom prst="rect">
-            <a:avLst/>
-          </a:prstGeom>
-          <a:noFill/>
-          <a:ln/>
-        </p:spPr>
-        <p:txBody>
-          <a:bodyPr wrap="square" lIns="0" tIns="0" rIns="0" bIns="0" rtlCol="0" anchor="ctr"/>
-          <a:lstStyle/>
-          <a:p>
-            <a:pPr indent="0" marL="0">
-              <a:buNone/>
-            </a:pPr>
-            <a:r>
-              <a:rPr lang="en-US" sz="1600" dirty="0">
-                <a:solidFill>
-                  <a:schemeClr val="tx1"/>
-                </a:solidFill>
-                <a:latin typeface="Yu Gothic" pitchFamily="34" charset="0"/>
-                <a:ea typeface="Yu Gothic" pitchFamily="34" charset="-122"/>
-                <a:cs typeface="Yu Gothic" pitchFamily="34" charset="-120"/>
-              </a:rPr>
-              <a:t>AI が、コードとドキュメントを読んで調べる</a:t>
-            </a:r>
-            <a:endParaRPr lang="en-US" sz="1600" dirty="0"/>
-          </a:p>
-        </p:txBody>
-      </p:sp>
-      <p:sp>
-        <p:nvSpPr>
-          <p:cNvPr id="9" name="手順の円 3"/>
-          <p:cNvSpPr/>
-          <p:nvPr/>
-        </p:nvSpPr>
-        <p:spPr>
-          <a:xfrm>
-            <a:off x="548640" y="3081528"/>
-            <a:ext cx="502920" cy="502920"/>
-          </a:xfrm>
-          <a:prstGeom prst="ellipse">
-            <a:avLst/>
-          </a:prstGeom>
-          <a:solidFill>
-            <a:schemeClr val="accent1"/>
-          </a:solidFill>
-          <a:ln/>
-        </p:spPr>
-      </p:sp>
-      <p:sp>
-        <p:nvSpPr>
-          <p:cNvPr id="10" name="Text 8"/>
-          <p:cNvSpPr txBox="1"/>
-          <p:nvPr/>
-        </p:nvSpPr>
-        <p:spPr>
-          <a:xfrm>
-            <a:off x="548640" y="3081528"/>
-            <a:ext cx="502920" cy="502920"/>
-          </a:xfrm>
-          <a:prstGeom prst="rect">
-            <a:avLst/>
-          </a:prstGeom>
-          <a:noFill/>
-          <a:ln/>
-        </p:spPr>
-        <p:txBody>
-          <a:bodyPr wrap="square" lIns="0" tIns="0" rIns="0" bIns="0" rtlCol="0" anchor="ctr"/>
-          <a:lstStyle/>
-          <a:p>
-            <a:pPr algn="ctr" indent="0" marL="0">
-              <a:buNone/>
-            </a:pPr>
-            <a:r>
-              <a:rPr lang="en-US" sz="1600" b="1" dirty="0">
-                <a:solidFill>
-                  <a:schemeClr val="bg1"/>
-                </a:solidFill>
-                <a:latin typeface="Yu Gothic" pitchFamily="34" charset="0"/>
-                <a:ea typeface="Yu Gothic" pitchFamily="34" charset="-122"/>
-                <a:cs typeface="Yu Gothic" pitchFamily="34" charset="-120"/>
-              </a:rPr>
-              <a:t>3</a:t>
-            </a:r>
-            <a:endParaRPr lang="en-US" sz="1600" dirty="0"/>
-          </a:p>
-        </p:txBody>
-      </p:sp>
-      <p:sp>
-        <p:nvSpPr>
-          <p:cNvPr id="11" name="Text 9"/>
-          <p:cNvSpPr txBox="1"/>
-          <p:nvPr/>
-        </p:nvSpPr>
-        <p:spPr>
-          <a:xfrm>
-            <a:off x="1280160" y="3017520"/>
-            <a:ext cx="5669280" cy="640080"/>
-          </a:xfrm>
-          <a:prstGeom prst="rect">
-            <a:avLst/>
-          </a:prstGeom>
-          <a:noFill/>
-          <a:ln/>
-        </p:spPr>
-        <p:txBody>
-          <a:bodyPr wrap="square" lIns="0" tIns="0" rIns="0" bIns="0" rtlCol="0" anchor="ctr"/>
-          <a:lstStyle/>
-          <a:p>
-            <a:pPr indent="0" marL="0">
-              <a:buNone/>
-            </a:pPr>
-            <a:r>
-              <a:rPr lang="en-US" sz="1600" dirty="0">
-                <a:solidFill>
-                  <a:schemeClr val="tx1"/>
-                </a:solidFill>
-                <a:latin typeface="Yu Gothic" pitchFamily="34" charset="0"/>
-                <a:ea typeface="Yu Gothic" pitchFamily="34" charset="-122"/>
-                <a:cs typeface="Yu Gothic" pitchFamily="34" charset="-120"/>
-              </a:rPr>
-              <a:t>小さく実装して、作業環境で動かす</a:t>
-            </a:r>
-            <a:endParaRPr lang="en-US" sz="1600" dirty="0"/>
-          </a:p>
-        </p:txBody>
-      </p:sp>
-      <p:sp>
-        <p:nvSpPr>
-          <p:cNvPr id="12" name="手順の円 4"/>
-          <p:cNvSpPr/>
-          <p:nvPr/>
-        </p:nvSpPr>
-        <p:spPr>
-          <a:xfrm>
-            <a:off x="548640" y="3858768"/>
-            <a:ext cx="502920" cy="502920"/>
-          </a:xfrm>
-          <a:prstGeom prst="ellipse">
-            <a:avLst/>
-          </a:prstGeom>
-          <a:solidFill>
-            <a:schemeClr val="accent1"/>
-          </a:solidFill>
-          <a:ln/>
-        </p:spPr>
-      </p:sp>
-      <p:sp>
-        <p:nvSpPr>
-          <p:cNvPr id="13" name="Text 11"/>
-          <p:cNvSpPr txBox="1"/>
-          <p:nvPr/>
-        </p:nvSpPr>
-        <p:spPr>
-          <a:xfrm>
-            <a:off x="548640" y="3858768"/>
-            <a:ext cx="502920" cy="502920"/>
-          </a:xfrm>
-          <a:prstGeom prst="rect">
-            <a:avLst/>
-          </a:prstGeom>
-          <a:noFill/>
-          <a:ln/>
-        </p:spPr>
-        <p:txBody>
-          <a:bodyPr wrap="square" lIns="0" tIns="0" rIns="0" bIns="0" rtlCol="0" anchor="ctr"/>
-          <a:lstStyle/>
-          <a:p>
-            <a:pPr algn="ctr" indent="0" marL="0">
-              <a:buNone/>
-            </a:pPr>
-            <a:r>
-              <a:rPr lang="en-US" sz="1600" b="1" dirty="0">
-                <a:solidFill>
-                  <a:schemeClr val="bg1"/>
-                </a:solidFill>
-                <a:latin typeface="Yu Gothic" pitchFamily="34" charset="0"/>
-                <a:ea typeface="Yu Gothic" pitchFamily="34" charset="-122"/>
-                <a:cs typeface="Yu Gothic" pitchFamily="34" charset="-120"/>
-              </a:rPr>
-              <a:t>4</a:t>
-            </a:r>
-            <a:endParaRPr lang="en-US" sz="1600" dirty="0"/>
-          </a:p>
-        </p:txBody>
-      </p:sp>
-      <p:sp>
-        <p:nvSpPr>
-          <p:cNvPr id="14" name="Text 12"/>
-          <p:cNvSpPr txBox="1"/>
-          <p:nvPr/>
-        </p:nvSpPr>
-        <p:spPr>
-          <a:xfrm>
-            <a:off x="1280160" y="3794760"/>
-            <a:ext cx="5669280" cy="640080"/>
-          </a:xfrm>
-          <a:prstGeom prst="rect">
-            <a:avLst/>
-          </a:prstGeom>
-          <a:noFill/>
-          <a:ln/>
-        </p:spPr>
-        <p:txBody>
-          <a:bodyPr wrap="square" lIns="0" tIns="0" rIns="0" bIns="0" rtlCol="0" anchor="ctr"/>
-          <a:lstStyle/>
-          <a:p>
-            <a:pPr indent="0" marL="0">
-              <a:buNone/>
-            </a:pPr>
-            <a:r>
-              <a:rPr lang="en-US" sz="1600" dirty="0">
-                <a:solidFill>
-                  <a:schemeClr val="tx1"/>
-                </a:solidFill>
-                <a:latin typeface="Yu Gothic" pitchFamily="34" charset="0"/>
-                <a:ea typeface="Yu Gothic" pitchFamily="34" charset="-122"/>
-                <a:cs typeface="Yu Gothic" pitchFamily="34" charset="-120"/>
-              </a:rPr>
-              <a:t>PC や Actions で、実通信を確認する(出力を貼る)</a:t>
-            </a:r>
-            <a:endParaRPr lang="en-US" sz="1600" dirty="0"/>
-          </a:p>
-        </p:txBody>
-      </p:sp>
-      <p:sp>
-        <p:nvSpPr>
-          <p:cNvPr id="15" name="手順の円 5"/>
-          <p:cNvSpPr/>
-          <p:nvPr/>
-        </p:nvSpPr>
-        <p:spPr>
-          <a:xfrm>
-            <a:off x="548640" y="4636008"/>
-            <a:ext cx="502920" cy="502920"/>
-          </a:xfrm>
-          <a:prstGeom prst="ellipse">
-            <a:avLst/>
-          </a:prstGeom>
-          <a:solidFill>
-            <a:schemeClr val="accent1"/>
-          </a:solidFill>
-          <a:ln/>
-        </p:spPr>
-      </p:sp>
-      <p:sp>
-        <p:nvSpPr>
-          <p:cNvPr id="16" name="Text 14"/>
-          <p:cNvSpPr txBox="1"/>
-          <p:nvPr/>
-        </p:nvSpPr>
-        <p:spPr>
-          <a:xfrm>
-            <a:off x="548640" y="4636008"/>
-            <a:ext cx="502920" cy="502920"/>
-          </a:xfrm>
-          <a:prstGeom prst="rect">
-            <a:avLst/>
-          </a:prstGeom>
-          <a:noFill/>
-          <a:ln/>
-        </p:spPr>
-        <p:txBody>
-          <a:bodyPr wrap="square" lIns="0" tIns="0" rIns="0" bIns="0" rtlCol="0" anchor="ctr"/>
-          <a:lstStyle/>
-          <a:p>
-            <a:pPr algn="ctr" indent="0" marL="0">
-              <a:buNone/>
-            </a:pPr>
-            <a:r>
-              <a:rPr lang="en-US" sz="1600" b="1" dirty="0">
-                <a:solidFill>
-                  <a:schemeClr val="bg1"/>
-                </a:solidFill>
-                <a:latin typeface="Yu Gothic" pitchFamily="34" charset="0"/>
-                <a:ea typeface="Yu Gothic" pitchFamily="34" charset="-122"/>
-                <a:cs typeface="Yu Gothic" pitchFamily="34" charset="-120"/>
-              </a:rPr>
-              <a:t>5</a:t>
-            </a:r>
-            <a:endParaRPr lang="en-US" sz="1600" dirty="0"/>
-          </a:p>
-        </p:txBody>
-      </p:sp>
-      <p:sp>
-        <p:nvSpPr>
-          <p:cNvPr id="17" name="Text 15"/>
-          <p:cNvSpPr txBox="1"/>
-          <p:nvPr/>
-        </p:nvSpPr>
-        <p:spPr>
-          <a:xfrm>
-            <a:off x="1280160" y="4572000"/>
-            <a:ext cx="5669280" cy="640080"/>
-          </a:xfrm>
-          <a:prstGeom prst="rect">
-            <a:avLst/>
-          </a:prstGeom>
-          <a:noFill/>
-          <a:ln/>
-        </p:spPr>
-        <p:txBody>
-          <a:bodyPr wrap="square" lIns="0" tIns="0" rIns="0" bIns="0" rtlCol="0" anchor="ctr"/>
-          <a:lstStyle/>
-          <a:p>
-            <a:pPr indent="0" marL="0">
-              <a:buNone/>
-            </a:pPr>
-            <a:r>
-              <a:rPr lang="en-US" sz="1600" dirty="0">
-                <a:solidFill>
-                  <a:schemeClr val="tx1"/>
-                </a:solidFill>
-                <a:latin typeface="Yu Gothic" pitchFamily="34" charset="0"/>
-                <a:ea typeface="Yu Gothic" pitchFamily="34" charset="-122"/>
-                <a:cs typeface="Yu Gothic" pitchFamily="34" charset="-120"/>
-              </a:rPr>
-              <a:t>AI が出力を読んで、不具合を直す</a:t>
-            </a:r>
-            <a:endParaRPr lang="en-US" sz="1600" dirty="0"/>
-          </a:p>
-        </p:txBody>
-      </p:sp>
-      <p:sp>
-        <p:nvSpPr>
-          <p:cNvPr id="18" name="手順の円 6"/>
-          <p:cNvSpPr/>
-          <p:nvPr/>
-        </p:nvSpPr>
-        <p:spPr>
-          <a:xfrm>
-            <a:off x="548640" y="5413248"/>
-            <a:ext cx="502920" cy="502920"/>
-          </a:xfrm>
-          <a:prstGeom prst="ellipse">
-            <a:avLst/>
-          </a:prstGeom>
-          <a:solidFill>
-            <a:schemeClr val="accent1"/>
-          </a:solidFill>
-          <a:ln/>
-        </p:spPr>
-      </p:sp>
-      <p:sp>
-        <p:nvSpPr>
-          <p:cNvPr id="19" name="Text 17"/>
-          <p:cNvSpPr txBox="1"/>
-          <p:nvPr/>
-        </p:nvSpPr>
-        <p:spPr>
-          <a:xfrm>
-            <a:off x="548640" y="5413248"/>
-            <a:ext cx="502920" cy="502920"/>
-          </a:xfrm>
-          <a:prstGeom prst="rect">
-            <a:avLst/>
-          </a:prstGeom>
-          <a:noFill/>
-          <a:ln/>
-        </p:spPr>
-        <p:txBody>
-          <a:bodyPr wrap="square" lIns="0" tIns="0" rIns="0" bIns="0" rtlCol="0" anchor="ctr"/>
-          <a:lstStyle/>
-          <a:p>
-            <a:pPr algn="ctr" indent="0" marL="0">
-              <a:buNone/>
-            </a:pPr>
-            <a:r>
-              <a:rPr lang="en-US" sz="1600" b="1" dirty="0">
-                <a:solidFill>
-                  <a:schemeClr val="bg1"/>
-                </a:solidFill>
-                <a:latin typeface="Yu Gothic" pitchFamily="34" charset="0"/>
-                <a:ea typeface="Yu Gothic" pitchFamily="34" charset="-122"/>
-                <a:cs typeface="Yu Gothic" pitchFamily="34" charset="-120"/>
-              </a:rPr>
-              <a:t>6</a:t>
-            </a:r>
-            <a:endParaRPr lang="en-US" sz="1600" dirty="0"/>
-          </a:p>
-        </p:txBody>
-      </p:sp>
-      <p:sp>
-        <p:nvSpPr>
-          <p:cNvPr id="20" name="Text 18"/>
-          <p:cNvSpPr txBox="1"/>
-          <p:nvPr/>
-        </p:nvSpPr>
-        <p:spPr>
-          <a:xfrm>
-            <a:off x="1280160" y="5349240"/>
-            <a:ext cx="5669280" cy="640080"/>
-          </a:xfrm>
-          <a:prstGeom prst="rect">
-            <a:avLst/>
-          </a:prstGeom>
-          <a:noFill/>
-          <a:ln/>
-        </p:spPr>
-        <p:txBody>
-          <a:bodyPr wrap="square" lIns="0" tIns="0" rIns="0" bIns="0" rtlCol="0" anchor="ctr"/>
-          <a:lstStyle/>
-          <a:p>
-            <a:pPr indent="0" marL="0">
-              <a:buNone/>
-            </a:pPr>
-            <a:r>
-              <a:rPr lang="en-US" sz="1600" dirty="0">
-                <a:solidFill>
-                  <a:schemeClr val="tx1"/>
-                </a:solidFill>
-                <a:latin typeface="Yu Gothic" pitchFamily="34" charset="0"/>
-                <a:ea typeface="Yu Gothic" pitchFamily="34" charset="-122"/>
-                <a:cs typeface="Yu Gothic" pitchFamily="34" charset="-120"/>
-              </a:rPr>
-              <a:t>確認できたことと未確認を、ノートと PR に残す</a:t>
-            </a:r>
-            <a:endParaRPr lang="en-US" sz="1600" dirty="0"/>
-          </a:p>
-        </p:txBody>
-      </p:sp>
-      <p:sp>
-        <p:nvSpPr>
-          <p:cNvPr id="21" name="コツのカード"/>
-          <p:cNvSpPr/>
-          <p:nvPr/>
-        </p:nvSpPr>
-        <p:spPr>
-          <a:xfrm>
-            <a:off x="7315200" y="1463040"/>
-            <a:ext cx="4297680" cy="4572000"/>
+            <a:off x="548640" y="1463040"/>
+            <a:ext cx="5394960" cy="3474720"/>
           </a:xfrm>
           <a:prstGeom prst="roundRect">
             <a:avLst>
-              <a:gd name="adj" fmla="val 2553"/>
+              <a:gd name="adj" fmla="val 3158"/>
             </a:avLst>
           </a:prstGeom>
           <a:solidFill>
@@ -3399,14 +2901,14 @@
       </p:sp>
       <p:sp>
         <p:nvSpPr>
-          <p:cNvPr id="22" name="コツ 円"/>
+          <p:cNvPr id="4" name="人(あなた) 円"/>
           <p:cNvSpPr/>
           <p:nvPr/>
         </p:nvSpPr>
         <p:spPr>
           <a:xfrm>
-            <a:off x="7635240" y="1737360"/>
-            <a:ext cx="685800" cy="685800"/>
+            <a:off x="914400" y="1691640"/>
+            <a:ext cx="731520" cy="731520"/>
           </a:xfrm>
           <a:prstGeom prst="ellipse">
             <a:avLst/>
@@ -3419,7 +2921,7 @@
       </p:sp>
       <p:pic>
         <p:nvPicPr>
-          <p:cNvPr id="23" name="Image 0" descr="コツ">    </p:cNvPr>
+          <p:cNvPr id="5" name="Image 0" descr="人(あなた)">    </p:cNvPr>
           <p:cNvPicPr>
             <a:picLocks noChangeAspect="1"/>
           </p:cNvPicPr>
@@ -3433,8 +2935,8 @@
         </p:blipFill>
         <p:spPr>
           <a:xfrm>
-            <a:off x="7806690" y="1908810"/>
-            <a:ext cx="342900" cy="342900"/>
+            <a:off x="1097280" y="1874520"/>
+            <a:ext cx="365760" cy="365760"/>
           </a:xfrm>
           <a:prstGeom prst="rect">
             <a:avLst/>
@@ -3443,14 +2945,14 @@
       </p:pic>
       <p:sp>
         <p:nvSpPr>
-          <p:cNvPr id="24" name="Text 21"/>
-          <p:cNvSpPr txBox="1"/>
-          <p:nvPr/>
-        </p:nvSpPr>
-        <p:spPr>
-          <a:xfrm>
-            <a:off x="8503920" y="1737360"/>
-            <a:ext cx="2926080" cy="685800"/>
+          <p:cNvPr id="6" name="Text 3"/>
+          <p:cNvSpPr txBox="1"/>
+          <p:nvPr/>
+        </p:nvSpPr>
+        <p:spPr>
+          <a:xfrm>
+            <a:off x="1874520" y="1691640"/>
+            <a:ext cx="3840480" cy="731520"/>
           </a:xfrm>
           <a:prstGeom prst="rect">
             <a:avLst/>
@@ -3466,7 +2968,7 @@
               <a:buNone/>
             </a:pPr>
             <a:r>
-              <a:rPr lang="en-US" sz="2200" b="1" dirty="0">
+              <a:rPr lang="en-US" sz="2400" b="1" dirty="0">
                 <a:solidFill>
                   <a:schemeClr val="tx2"/>
                 </a:solidFill>
@@ -3474,42 +2976,77 @@
                 <a:ea typeface="Yu Gothic" pitchFamily="34" charset="-122"/>
                 <a:cs typeface="Yu Gothic" pitchFamily="34" charset="-120"/>
               </a:rPr>
-              <a:t>コツ</a:t>
-            </a:r>
-            <a:endParaRPr lang="en-US" sz="2200" dirty="0"/>
-          </a:p>
-        </p:txBody>
-      </p:sp>
-      <p:sp>
-        <p:nvSpPr>
-          <p:cNvPr id="25" name="Text 22"/>
-          <p:cNvSpPr txBox="1"/>
-          <p:nvPr/>
-        </p:nvSpPr>
-        <p:spPr>
-          <a:xfrm>
-            <a:off x="7635240" y="2743200"/>
-            <a:ext cx="3657600" cy="3108960"/>
-          </a:xfrm>
-          <a:prstGeom prst="rect">
-            <a:avLst/>
-          </a:prstGeom>
-          <a:noFill/>
-          <a:ln/>
-        </p:spPr>
-        <p:txBody>
-          <a:bodyPr wrap="square" lIns="0" tIns="0" rIns="0" bIns="0" rtlCol="0" anchor="t"/>
-          <a:lstStyle/>
-          <a:p>
-            <a:pPr marL="342900" indent="-342900">
-              <a:spcAft>
-                <a:spcPts val="1400"/>
-              </a:spcAft>
-              <a:buSzPct val="100000"/>
-              <a:buChar char="•"/>
-            </a:pPr>
-            <a:r>
-              <a:rPr lang="en-US" sz="1800" dirty="0">
+              <a:t>人(あなた)</a:t>
+            </a:r>
+            <a:endParaRPr lang="en-US" sz="2400" dirty="0"/>
+          </a:p>
+        </p:txBody>
+      </p:sp>
+      <p:sp>
+        <p:nvSpPr>
+          <p:cNvPr id="7" name="Text 4"/>
+          <p:cNvSpPr txBox="1"/>
+          <p:nvPr/>
+        </p:nvSpPr>
+        <p:spPr>
+          <a:xfrm>
+            <a:off x="914400" y="2697480"/>
+            <a:ext cx="2011680" cy="594360"/>
+          </a:xfrm>
+          <a:prstGeom prst="rect">
+            <a:avLst/>
+          </a:prstGeom>
+          <a:noFill/>
+          <a:ln/>
+        </p:spPr>
+        <p:txBody>
+          <a:bodyPr wrap="square" lIns="0" tIns="0" rIns="0" bIns="0" rtlCol="0" anchor="ctr"/>
+          <a:lstStyle/>
+          <a:p>
+            <a:pPr indent="0" marL="0">
+              <a:buNone/>
+            </a:pPr>
+            <a:r>
+              <a:rPr lang="en-US" sz="1800" b="1" dirty="0">
+                <a:solidFill>
+                  <a:schemeClr val="accent1"/>
+                </a:solidFill>
+                <a:latin typeface="Yu Gothic" pitchFamily="34" charset="0"/>
+                <a:ea typeface="Yu Gothic" pitchFamily="34" charset="-122"/>
+                <a:cs typeface="Yu Gothic" pitchFamily="34" charset="-120"/>
+              </a:rPr>
+              <a:t>方向を決める</a:t>
+            </a:r>
+            <a:endParaRPr lang="en-US" sz="1800" dirty="0"/>
+          </a:p>
+        </p:txBody>
+      </p:sp>
+      <p:sp>
+        <p:nvSpPr>
+          <p:cNvPr id="8" name="Text 5"/>
+          <p:cNvSpPr txBox="1"/>
+          <p:nvPr/>
+        </p:nvSpPr>
+        <p:spPr>
+          <a:xfrm>
+            <a:off x="2971800" y="2697480"/>
+            <a:ext cx="2743200" cy="594360"/>
+          </a:xfrm>
+          <a:prstGeom prst="rect">
+            <a:avLst/>
+          </a:prstGeom>
+          <a:noFill/>
+          <a:ln/>
+        </p:spPr>
+        <p:txBody>
+          <a:bodyPr wrap="square" lIns="0" tIns="0" rIns="0" bIns="0" rtlCol="0" anchor="ctr"/>
+          <a:lstStyle/>
+          <a:p>
+            <a:pPr indent="0" marL="0">
+              <a:buNone/>
+            </a:pPr>
+            <a:r>
+              <a:rPr lang="en-US" sz="1600" dirty="0">
                 <a:solidFill>
                   <a:schemeClr val="tx1"/>
                 </a:solidFill>
@@ -3517,20 +3054,77 @@
                 <a:ea typeface="Yu Gothic" pitchFamily="34" charset="-122"/>
                 <a:cs typeface="Yu Gothic" pitchFamily="34" charset="-120"/>
               </a:rPr>
-              <a:t>出力は、省略せずに貼る</a:t>
+              <a:t>目的と優先順位</a:t>
+            </a:r>
+            <a:endParaRPr lang="en-US" sz="1600" dirty="0"/>
+          </a:p>
+        </p:txBody>
+      </p:sp>
+      <p:sp>
+        <p:nvSpPr>
+          <p:cNvPr id="9" name="Text 6"/>
+          <p:cNvSpPr txBox="1"/>
+          <p:nvPr/>
+        </p:nvSpPr>
+        <p:spPr>
+          <a:xfrm>
+            <a:off x="914400" y="3410712"/>
+            <a:ext cx="2011680" cy="594360"/>
+          </a:xfrm>
+          <a:prstGeom prst="rect">
+            <a:avLst/>
+          </a:prstGeom>
+          <a:noFill/>
+          <a:ln/>
+        </p:spPr>
+        <p:txBody>
+          <a:bodyPr wrap="square" lIns="0" tIns="0" rIns="0" bIns="0" rtlCol="0" anchor="ctr"/>
+          <a:lstStyle/>
+          <a:p>
+            <a:pPr indent="0" marL="0">
+              <a:buNone/>
+            </a:pPr>
+            <a:r>
+              <a:rPr lang="en-US" sz="1800" b="1" dirty="0">
+                <a:solidFill>
+                  <a:schemeClr val="accent1"/>
+                </a:solidFill>
+                <a:latin typeface="Yu Gothic" pitchFamily="34" charset="0"/>
+                <a:ea typeface="Yu Gothic" pitchFamily="34" charset="-122"/>
+                <a:cs typeface="Yu Gothic" pitchFamily="34" charset="-120"/>
+              </a:rPr>
+              <a:t>現実で確かめる</a:t>
             </a:r>
             <a:endParaRPr lang="en-US" sz="1800" dirty="0"/>
           </a:p>
-          <a:p>
-            <a:pPr marL="342900" indent="-342900">
-              <a:spcAft>
-                <a:spcPts val="1400"/>
-              </a:spcAft>
-              <a:buSzPct val="100000"/>
-              <a:buChar char="•"/>
-            </a:pPr>
-            <a:r>
-              <a:rPr lang="en-US" sz="1800" dirty="0">
+        </p:txBody>
+      </p:sp>
+      <p:sp>
+        <p:nvSpPr>
+          <p:cNvPr id="10" name="Text 7"/>
+          <p:cNvSpPr txBox="1"/>
+          <p:nvPr/>
+        </p:nvSpPr>
+        <p:spPr>
+          <a:xfrm>
+            <a:off x="2971800" y="3410712"/>
+            <a:ext cx="2743200" cy="594360"/>
+          </a:xfrm>
+          <a:prstGeom prst="rect">
+            <a:avLst/>
+          </a:prstGeom>
+          <a:noFill/>
+          <a:ln/>
+        </p:spPr>
+        <p:txBody>
+          <a:bodyPr wrap="square" lIns="0" tIns="0" rIns="0" bIns="0" rtlCol="0" anchor="ctr"/>
+          <a:lstStyle/>
+          <a:p>
+            <a:pPr indent="0" marL="0">
+              <a:buNone/>
+            </a:pPr>
+            <a:r>
+              <a:rPr lang="en-US" sz="1600" dirty="0">
                 <a:solidFill>
                   <a:schemeClr val="tx1"/>
                 </a:solidFill>
@@ -3538,20 +3132,77 @@
                 <a:ea typeface="Yu Gothic" pitchFamily="34" charset="-122"/>
                 <a:cs typeface="Yu Gothic" pitchFamily="34" charset="-120"/>
               </a:rPr>
-              <a:t>どこで実行するか(Windows か WSL か)を、コマンドごとに明記してもらう</a:t>
+              <a:t>PC で実行し、出力を貼る</a:t>
+            </a:r>
+            <a:endParaRPr lang="en-US" sz="1600" dirty="0"/>
+          </a:p>
+        </p:txBody>
+      </p:sp>
+      <p:sp>
+        <p:nvSpPr>
+          <p:cNvPr id="11" name="Text 8"/>
+          <p:cNvSpPr txBox="1"/>
+          <p:nvPr/>
+        </p:nvSpPr>
+        <p:spPr>
+          <a:xfrm>
+            <a:off x="914400" y="4123944"/>
+            <a:ext cx="2011680" cy="594360"/>
+          </a:xfrm>
+          <a:prstGeom prst="rect">
+            <a:avLst/>
+          </a:prstGeom>
+          <a:noFill/>
+          <a:ln/>
+        </p:spPr>
+        <p:txBody>
+          <a:bodyPr wrap="square" lIns="0" tIns="0" rIns="0" bIns="0" rtlCol="0" anchor="ctr"/>
+          <a:lstStyle/>
+          <a:p>
+            <a:pPr indent="0" marL="0">
+              <a:buNone/>
+            </a:pPr>
+            <a:r>
+              <a:rPr lang="en-US" sz="1800" b="1" dirty="0">
+                <a:solidFill>
+                  <a:schemeClr val="accent1"/>
+                </a:solidFill>
+                <a:latin typeface="Yu Gothic" pitchFamily="34" charset="0"/>
+                <a:ea typeface="Yu Gothic" pitchFamily="34" charset="-122"/>
+                <a:cs typeface="Yu Gothic" pitchFamily="34" charset="-120"/>
+              </a:rPr>
+              <a:t>判断する</a:t>
             </a:r>
             <a:endParaRPr lang="en-US" sz="1800" dirty="0"/>
           </a:p>
-          <a:p>
-            <a:pPr marL="342900" indent="-342900">
-              <a:spcAft>
-                <a:spcPts val="1400"/>
-              </a:spcAft>
-              <a:buSzPct val="100000"/>
-              <a:buChar char="•"/>
-            </a:pPr>
-            <a:r>
-              <a:rPr lang="en-US" sz="1800" dirty="0">
+        </p:txBody>
+      </p:sp>
+      <p:sp>
+        <p:nvSpPr>
+          <p:cNvPr id="12" name="Text 9"/>
+          <p:cNvSpPr txBox="1"/>
+          <p:nvPr/>
+        </p:nvSpPr>
+        <p:spPr>
+          <a:xfrm>
+            <a:off x="2971800" y="4123944"/>
+            <a:ext cx="2743200" cy="594360"/>
+          </a:xfrm>
+          <a:prstGeom prst="rect">
+            <a:avLst/>
+          </a:prstGeom>
+          <a:noFill/>
+          <a:ln/>
+        </p:spPr>
+        <p:txBody>
+          <a:bodyPr wrap="square" lIns="0" tIns="0" rIns="0" bIns="0" rtlCol="0" anchor="ctr"/>
+          <a:lstStyle/>
+          <a:p>
+            <a:pPr indent="0" marL="0">
+              <a:buNone/>
+            </a:pPr>
+            <a:r>
+              <a:rPr lang="en-US" sz="1600" dirty="0">
                 <a:solidFill>
                   <a:schemeClr val="tx1"/>
                 </a:solidFill>
@@ -3559,9 +3210,409 @@
                 <a:ea typeface="Yu Gothic" pitchFamily="34" charset="-122"/>
                 <a:cs typeface="Yu Gothic" pitchFamily="34" charset="-120"/>
               </a:rPr>
-              <a:t>AI の説明が、推測か確認済みかを聞く</a:t>
+              <a:t>マージ・公開の決定</a:t>
+            </a:r>
+            <a:endParaRPr lang="en-US" sz="1600" dirty="0"/>
+          </a:p>
+        </p:txBody>
+      </p:sp>
+      <p:sp>
+        <p:nvSpPr>
+          <p:cNvPr id="13" name="Claude(AI) のカード"/>
+          <p:cNvSpPr/>
+          <p:nvPr/>
+        </p:nvSpPr>
+        <p:spPr>
+          <a:xfrm>
+            <a:off x="6217920" y="1463040"/>
+            <a:ext cx="5394960" cy="3474720"/>
+          </a:xfrm>
+          <a:prstGeom prst="roundRect">
+            <a:avLst>
+              <a:gd name="adj" fmla="val 3158"/>
+            </a:avLst>
+          </a:prstGeom>
+          <a:solidFill>
+            <a:schemeClr val="bg2"/>
+          </a:solidFill>
+          <a:ln/>
+        </p:spPr>
+      </p:sp>
+      <p:sp>
+        <p:nvSpPr>
+          <p:cNvPr id="14" name="Claude(AI) 円"/>
+          <p:cNvSpPr/>
+          <p:nvPr/>
+        </p:nvSpPr>
+        <p:spPr>
+          <a:xfrm>
+            <a:off x="6583680" y="1691640"/>
+            <a:ext cx="731520" cy="731520"/>
+          </a:xfrm>
+          <a:prstGeom prst="ellipse">
+            <a:avLst/>
+          </a:prstGeom>
+          <a:solidFill>
+            <a:schemeClr val="accent1"/>
+          </a:solidFill>
+          <a:ln/>
+        </p:spPr>
+      </p:sp>
+      <p:pic>
+        <p:nvPicPr>
+          <p:cNvPr id="15" name="Image 1" descr="Claude(AI)">    </p:cNvPr>
+          <p:cNvPicPr>
+            <a:picLocks noChangeAspect="1"/>
+          </p:cNvPicPr>
+          <p:nvPr/>
+        </p:nvPicPr>
+        <p:blipFill>
+          <a:blip r:embed="rId2"/>
+          <a:stretch>
+            <a:fillRect/>
+          </a:stretch>
+        </p:blipFill>
+        <p:spPr>
+          <a:xfrm>
+            <a:off x="6766560" y="1874520"/>
+            <a:ext cx="365760" cy="365760"/>
+          </a:xfrm>
+          <a:prstGeom prst="rect">
+            <a:avLst/>
+          </a:prstGeom>
+        </p:spPr>
+      </p:pic>
+      <p:sp>
+        <p:nvSpPr>
+          <p:cNvPr id="16" name="Text 12"/>
+          <p:cNvSpPr txBox="1"/>
+          <p:nvPr/>
+        </p:nvSpPr>
+        <p:spPr>
+          <a:xfrm>
+            <a:off x="7543800" y="1691640"/>
+            <a:ext cx="3840480" cy="731520"/>
+          </a:xfrm>
+          <a:prstGeom prst="rect">
+            <a:avLst/>
+          </a:prstGeom>
+          <a:noFill/>
+          <a:ln/>
+        </p:spPr>
+        <p:txBody>
+          <a:bodyPr wrap="square" lIns="0" tIns="0" rIns="0" bIns="0" rtlCol="0" anchor="ctr"/>
+          <a:lstStyle/>
+          <a:p>
+            <a:pPr indent="0" marL="0">
+              <a:buNone/>
+            </a:pPr>
+            <a:r>
+              <a:rPr lang="en-US" sz="2400" b="1" dirty="0">
+                <a:solidFill>
+                  <a:schemeClr val="tx2"/>
+                </a:solidFill>
+                <a:latin typeface="Yu Gothic" pitchFamily="34" charset="0"/>
+                <a:ea typeface="Yu Gothic" pitchFamily="34" charset="-122"/>
+                <a:cs typeface="Yu Gothic" pitchFamily="34" charset="-120"/>
+              </a:rPr>
+              <a:t>Claude(AI)</a:t>
+            </a:r>
+            <a:endParaRPr lang="en-US" sz="2400" dirty="0"/>
+          </a:p>
+        </p:txBody>
+      </p:sp>
+      <p:sp>
+        <p:nvSpPr>
+          <p:cNvPr id="17" name="Text 13"/>
+          <p:cNvSpPr txBox="1"/>
+          <p:nvPr/>
+        </p:nvSpPr>
+        <p:spPr>
+          <a:xfrm>
+            <a:off x="6583680" y="2697480"/>
+            <a:ext cx="2011680" cy="594360"/>
+          </a:xfrm>
+          <a:prstGeom prst="rect">
+            <a:avLst/>
+          </a:prstGeom>
+          <a:noFill/>
+          <a:ln/>
+        </p:spPr>
+        <p:txBody>
+          <a:bodyPr wrap="square" lIns="0" tIns="0" rIns="0" bIns="0" rtlCol="0" anchor="ctr"/>
+          <a:lstStyle/>
+          <a:p>
+            <a:pPr indent="0" marL="0">
+              <a:buNone/>
+            </a:pPr>
+            <a:r>
+              <a:rPr lang="en-US" sz="1800" b="1" dirty="0">
+                <a:solidFill>
+                  <a:schemeClr val="accent1"/>
+                </a:solidFill>
+                <a:latin typeface="Yu Gothic" pitchFamily="34" charset="0"/>
+                <a:ea typeface="Yu Gothic" pitchFamily="34" charset="-122"/>
+                <a:cs typeface="Yu Gothic" pitchFamily="34" charset="-120"/>
+              </a:rPr>
+              <a:t>調べる</a:t>
             </a:r>
             <a:endParaRPr lang="en-US" sz="1800" dirty="0"/>
+          </a:p>
+        </p:txBody>
+      </p:sp>
+      <p:sp>
+        <p:nvSpPr>
+          <p:cNvPr id="18" name="Text 14"/>
+          <p:cNvSpPr txBox="1"/>
+          <p:nvPr/>
+        </p:nvSpPr>
+        <p:spPr>
+          <a:xfrm>
+            <a:off x="8641080" y="2697480"/>
+            <a:ext cx="2743200" cy="594360"/>
+          </a:xfrm>
+          <a:prstGeom prst="rect">
+            <a:avLst/>
+          </a:prstGeom>
+          <a:noFill/>
+          <a:ln/>
+        </p:spPr>
+        <p:txBody>
+          <a:bodyPr wrap="square" lIns="0" tIns="0" rIns="0" bIns="0" rtlCol="0" anchor="ctr"/>
+          <a:lstStyle/>
+          <a:p>
+            <a:pPr indent="0" marL="0">
+              <a:buNone/>
+            </a:pPr>
+            <a:r>
+              <a:rPr lang="en-US" sz="1600" dirty="0">
+                <a:solidFill>
+                  <a:schemeClr val="tx1"/>
+                </a:solidFill>
+                <a:latin typeface="Yu Gothic" pitchFamily="34" charset="0"/>
+                <a:ea typeface="Yu Gothic" pitchFamily="34" charset="-122"/>
+                <a:cs typeface="Yu Gothic" pitchFamily="34" charset="-120"/>
+              </a:rPr>
+              <a:t>コードと資料を読む</a:t>
+            </a:r>
+            <a:endParaRPr lang="en-US" sz="1600" dirty="0"/>
+          </a:p>
+        </p:txBody>
+      </p:sp>
+      <p:sp>
+        <p:nvSpPr>
+          <p:cNvPr id="19" name="Text 15"/>
+          <p:cNvSpPr txBox="1"/>
+          <p:nvPr/>
+        </p:nvSpPr>
+        <p:spPr>
+          <a:xfrm>
+            <a:off x="6583680" y="3410712"/>
+            <a:ext cx="2011680" cy="594360"/>
+          </a:xfrm>
+          <a:prstGeom prst="rect">
+            <a:avLst/>
+          </a:prstGeom>
+          <a:noFill/>
+          <a:ln/>
+        </p:spPr>
+        <p:txBody>
+          <a:bodyPr wrap="square" lIns="0" tIns="0" rIns="0" bIns="0" rtlCol="0" anchor="ctr"/>
+          <a:lstStyle/>
+          <a:p>
+            <a:pPr indent="0" marL="0">
+              <a:buNone/>
+            </a:pPr>
+            <a:r>
+              <a:rPr lang="en-US" sz="1800" b="1" dirty="0">
+                <a:solidFill>
+                  <a:schemeClr val="accent1"/>
+                </a:solidFill>
+                <a:latin typeface="Yu Gothic" pitchFamily="34" charset="0"/>
+                <a:ea typeface="Yu Gothic" pitchFamily="34" charset="-122"/>
+                <a:cs typeface="Yu Gothic" pitchFamily="34" charset="-120"/>
+              </a:rPr>
+              <a:t>作る</a:t>
+            </a:r>
+            <a:endParaRPr lang="en-US" sz="1800" dirty="0"/>
+          </a:p>
+        </p:txBody>
+      </p:sp>
+      <p:sp>
+        <p:nvSpPr>
+          <p:cNvPr id="20" name="Text 16"/>
+          <p:cNvSpPr txBox="1"/>
+          <p:nvPr/>
+        </p:nvSpPr>
+        <p:spPr>
+          <a:xfrm>
+            <a:off x="8641080" y="3410712"/>
+            <a:ext cx="2743200" cy="594360"/>
+          </a:xfrm>
+          <a:prstGeom prst="rect">
+            <a:avLst/>
+          </a:prstGeom>
+          <a:noFill/>
+          <a:ln/>
+        </p:spPr>
+        <p:txBody>
+          <a:bodyPr wrap="square" lIns="0" tIns="0" rIns="0" bIns="0" rtlCol="0" anchor="ctr"/>
+          <a:lstStyle/>
+          <a:p>
+            <a:pPr indent="0" marL="0">
+              <a:buNone/>
+            </a:pPr>
+            <a:r>
+              <a:rPr lang="en-US" sz="1600" dirty="0">
+                <a:solidFill>
+                  <a:schemeClr val="tx1"/>
+                </a:solidFill>
+                <a:latin typeface="Yu Gothic" pitchFamily="34" charset="0"/>
+                <a:ea typeface="Yu Gothic" pitchFamily="34" charset="-122"/>
+                <a:cs typeface="Yu Gothic" pitchFamily="34" charset="-120"/>
+              </a:rPr>
+              <a:t>実装・モック・テスト</a:t>
+            </a:r>
+            <a:endParaRPr lang="en-US" sz="1600" dirty="0"/>
+          </a:p>
+        </p:txBody>
+      </p:sp>
+      <p:sp>
+        <p:nvSpPr>
+          <p:cNvPr id="21" name="Text 17"/>
+          <p:cNvSpPr txBox="1"/>
+          <p:nvPr/>
+        </p:nvSpPr>
+        <p:spPr>
+          <a:xfrm>
+            <a:off x="6583680" y="4123944"/>
+            <a:ext cx="2011680" cy="594360"/>
+          </a:xfrm>
+          <a:prstGeom prst="rect">
+            <a:avLst/>
+          </a:prstGeom>
+          <a:noFill/>
+          <a:ln/>
+        </p:spPr>
+        <p:txBody>
+          <a:bodyPr wrap="square" lIns="0" tIns="0" rIns="0" bIns="0" rtlCol="0" anchor="ctr"/>
+          <a:lstStyle/>
+          <a:p>
+            <a:pPr indent="0" marL="0">
+              <a:buNone/>
+            </a:pPr>
+            <a:r>
+              <a:rPr lang="en-US" sz="1800" b="1" dirty="0">
+                <a:solidFill>
+                  <a:schemeClr val="accent1"/>
+                </a:solidFill>
+                <a:latin typeface="Yu Gothic" pitchFamily="34" charset="0"/>
+                <a:ea typeface="Yu Gothic" pitchFamily="34" charset="-122"/>
+                <a:cs typeface="Yu Gothic" pitchFamily="34" charset="-120"/>
+              </a:rPr>
+              <a:t>記録する</a:t>
+            </a:r>
+            <a:endParaRPr lang="en-US" sz="1800" dirty="0"/>
+          </a:p>
+        </p:txBody>
+      </p:sp>
+      <p:sp>
+        <p:nvSpPr>
+          <p:cNvPr id="22" name="Text 18"/>
+          <p:cNvSpPr txBox="1"/>
+          <p:nvPr/>
+        </p:nvSpPr>
+        <p:spPr>
+          <a:xfrm>
+            <a:off x="8641080" y="4123944"/>
+            <a:ext cx="2743200" cy="594360"/>
+          </a:xfrm>
+          <a:prstGeom prst="rect">
+            <a:avLst/>
+          </a:prstGeom>
+          <a:noFill/>
+          <a:ln/>
+        </p:spPr>
+        <p:txBody>
+          <a:bodyPr wrap="square" lIns="0" tIns="0" rIns="0" bIns="0" rtlCol="0" anchor="ctr"/>
+          <a:lstStyle/>
+          <a:p>
+            <a:pPr indent="0" marL="0">
+              <a:buNone/>
+            </a:pPr>
+            <a:r>
+              <a:rPr lang="en-US" sz="1600" dirty="0">
+                <a:solidFill>
+                  <a:schemeClr val="tx1"/>
+                </a:solidFill>
+                <a:latin typeface="Yu Gothic" pitchFamily="34" charset="0"/>
+                <a:ea typeface="Yu Gothic" pitchFamily="34" charset="-122"/>
+                <a:cs typeface="Yu Gothic" pitchFamily="34" charset="-120"/>
+              </a:rPr>
+              <a:t>ノート・PR・スライド</a:t>
+            </a:r>
+            <a:endParaRPr lang="en-US" sz="1600" dirty="0"/>
+          </a:p>
+        </p:txBody>
+      </p:sp>
+      <p:sp>
+        <p:nvSpPr>
+          <p:cNvPr id="23" name="要点の帯"/>
+          <p:cNvSpPr/>
+          <p:nvPr/>
+        </p:nvSpPr>
+        <p:spPr>
+          <a:xfrm>
+            <a:off x="548640" y="5166360"/>
+            <a:ext cx="11064240" cy="868680"/>
+          </a:xfrm>
+          <a:prstGeom prst="roundRect">
+            <a:avLst>
+              <a:gd name="adj" fmla="val 12632"/>
+            </a:avLst>
+          </a:prstGeom>
+          <a:solidFill>
+            <a:schemeClr val="accent2"/>
+          </a:solidFill>
+          <a:ln/>
+        </p:spPr>
+      </p:sp>
+      <p:sp>
+        <p:nvSpPr>
+          <p:cNvPr id="24" name="Text 20"/>
+          <p:cNvSpPr txBox="1"/>
+          <p:nvPr/>
+        </p:nvSpPr>
+        <p:spPr>
+          <a:xfrm>
+            <a:off x="822960" y="5166360"/>
+            <a:ext cx="10515600" cy="868680"/>
+          </a:xfrm>
+          <a:prstGeom prst="rect">
+            <a:avLst/>
+          </a:prstGeom>
+          <a:noFill/>
+          <a:ln/>
+        </p:spPr>
+        <p:txBody>
+          <a:bodyPr wrap="square" lIns="0" tIns="0" rIns="0" bIns="0" rtlCol="0" anchor="ctr"/>
+          <a:lstStyle/>
+          <a:p>
+            <a:pPr indent="0" marL="0">
+              <a:buNone/>
+            </a:pPr>
+            <a:r>
+              <a:rPr lang="en-US" sz="2000" b="1" dirty="0">
+                <a:solidFill>
+                  <a:schemeClr val="tx1"/>
+                </a:solidFill>
+                <a:latin typeface="Yu Gothic" pitchFamily="34" charset="0"/>
+                <a:ea typeface="Yu Gothic" pitchFamily="34" charset="-122"/>
+                <a:cs typeface="Yu Gothic" pitchFamily="34" charset="-120"/>
+              </a:rPr>
+              <a:t>人は、現実との接点(実機での確認・判断・責任)を持ち続ける</a:t>
+            </a:r>
+            <a:endParaRPr lang="en-US" sz="2000" dirty="0"/>
           </a:p>
         </p:txBody>
       </p:sp>
@@ -3621,6 +3672,892 @@
 <file path=ppt/slides/slide11.xml><?xml version="1.0" encoding="utf-8"?>
 <p:sld xmlns:a="http://schemas.openxmlformats.org/drawingml/2006/main" xmlns:r="http://schemas.openxmlformats.org/officeDocument/2006/relationships" xmlns:p="http://schemas.openxmlformats.org/presentationml/2006/main">
   <p:cSld name="Slide 11">
+    <p:spTree>
+      <p:nvGrpSpPr>
+        <p:cNvPr id="1" name=""/>
+        <p:cNvGrpSpPr/>
+        <p:nvPr/>
+      </p:nvGrpSpPr>
+      <p:grpSpPr>
+        <a:xfrm>
+          <a:off x="0" y="0"/>
+          <a:ext cx="0" cy="0"/>
+          <a:chOff x="0" y="0"/>
+          <a:chExt cx="0" cy="0"/>
+        </a:xfrm>
+      </p:grpSpPr>
+      <p:sp>
+        <p:nvSpPr>
+          <p:cNvPr id="2" name="Text 0"/>
+          <p:cNvSpPr/>
+          <p:nvPr>
+            <p:ph idx="100" type="title" hasCustomPrompt="1"/>
+          </p:nvPr>
+        </p:nvSpPr>
+        <p:spPr>
+          <a:xfrm>
+            <a:off x="548640" y="365760"/>
+            <a:ext cx="11064240" cy="822960"/>
+          </a:xfrm>
+          <a:prstGeom prst="rect">
+            <a:avLst/>
+          </a:prstGeom>
+          <a:noFill/>
+          <a:ln/>
+        </p:spPr>
+        <p:txBody>
+          <a:bodyPr wrap="square" lIns="0" tIns="0" rIns="0" bIns="0" rtlCol="0" anchor="ctr"/>
+          <a:lstStyle/>
+          <a:p>
+            <a:pPr algn="l" indent="0" marL="0">
+              <a:buNone/>
+            </a:pPr>
+            <a:r>
+              <a:rPr lang="en-US" sz="3400" b="1" dirty="0">
+                <a:solidFill>
+                  <a:schemeClr val="tx2"/>
+                </a:solidFill>
+              </a:rPr>
+              <a:t>AI との進め方</a:t>
+            </a:r>
+            <a:endParaRPr lang="en-US" sz="3400" dirty="0"/>
+          </a:p>
+        </p:txBody>
+      </p:sp>
+      <p:sp>
+        <p:nvSpPr>
+          <p:cNvPr id="3" name="手順の円 1"/>
+          <p:cNvSpPr/>
+          <p:nvPr/>
+        </p:nvSpPr>
+        <p:spPr>
+          <a:xfrm>
+            <a:off x="548640" y="1527048"/>
+            <a:ext cx="502920" cy="502920"/>
+          </a:xfrm>
+          <a:prstGeom prst="ellipse">
+            <a:avLst/>
+          </a:prstGeom>
+          <a:solidFill>
+            <a:schemeClr val="accent1"/>
+          </a:solidFill>
+          <a:ln/>
+        </p:spPr>
+      </p:sp>
+      <p:sp>
+        <p:nvSpPr>
+          <p:cNvPr id="4" name="Text 2"/>
+          <p:cNvSpPr txBox="1"/>
+          <p:nvPr/>
+        </p:nvSpPr>
+        <p:spPr>
+          <a:xfrm>
+            <a:off x="548640" y="1527048"/>
+            <a:ext cx="502920" cy="502920"/>
+          </a:xfrm>
+          <a:prstGeom prst="rect">
+            <a:avLst/>
+          </a:prstGeom>
+          <a:noFill/>
+          <a:ln/>
+        </p:spPr>
+        <p:txBody>
+          <a:bodyPr wrap="square" lIns="0" tIns="0" rIns="0" bIns="0" rtlCol="0" anchor="ctr"/>
+          <a:lstStyle/>
+          <a:p>
+            <a:pPr algn="ctr" indent="0" marL="0">
+              <a:buNone/>
+            </a:pPr>
+            <a:r>
+              <a:rPr lang="en-US" sz="1600" b="1" dirty="0">
+                <a:solidFill>
+                  <a:schemeClr val="bg1"/>
+                </a:solidFill>
+                <a:latin typeface="Yu Gothic" pitchFamily="34" charset="0"/>
+                <a:ea typeface="Yu Gothic" pitchFamily="34" charset="-122"/>
+                <a:cs typeface="Yu Gothic" pitchFamily="34" charset="-120"/>
+              </a:rPr>
+              <a:t>1</a:t>
+            </a:r>
+            <a:endParaRPr lang="en-US" sz="1600" dirty="0"/>
+          </a:p>
+        </p:txBody>
+      </p:sp>
+      <p:sp>
+        <p:nvSpPr>
+          <p:cNvPr id="5" name="Text 3"/>
+          <p:cNvSpPr txBox="1"/>
+          <p:nvPr/>
+        </p:nvSpPr>
+        <p:spPr>
+          <a:xfrm>
+            <a:off x="1280160" y="1463040"/>
+            <a:ext cx="5669280" cy="640080"/>
+          </a:xfrm>
+          <a:prstGeom prst="rect">
+            <a:avLst/>
+          </a:prstGeom>
+          <a:noFill/>
+          <a:ln/>
+        </p:spPr>
+        <p:txBody>
+          <a:bodyPr wrap="square" lIns="0" tIns="0" rIns="0" bIns="0" rtlCol="0" anchor="ctr"/>
+          <a:lstStyle/>
+          <a:p>
+            <a:pPr indent="0" marL="0">
+              <a:buNone/>
+            </a:pPr>
+            <a:r>
+              <a:rPr lang="en-US" sz="1600" dirty="0">
+                <a:solidFill>
+                  <a:schemeClr val="tx1"/>
+                </a:solidFill>
+                <a:latin typeface="Yu Gothic" pitchFamily="34" charset="0"/>
+                <a:ea typeface="Yu Gothic" pitchFamily="34" charset="-122"/>
+                <a:cs typeface="Yu Gothic" pitchFamily="34" charset="-120"/>
+              </a:rPr>
+              <a:t>目的を伝える</a:t>
+            </a:r>
+            <a:endParaRPr lang="en-US" sz="1600" dirty="0"/>
+          </a:p>
+        </p:txBody>
+      </p:sp>
+      <p:sp>
+        <p:nvSpPr>
+          <p:cNvPr id="6" name="手順の円 2"/>
+          <p:cNvSpPr/>
+          <p:nvPr/>
+        </p:nvSpPr>
+        <p:spPr>
+          <a:xfrm>
+            <a:off x="548640" y="2304288"/>
+            <a:ext cx="502920" cy="502920"/>
+          </a:xfrm>
+          <a:prstGeom prst="ellipse">
+            <a:avLst/>
+          </a:prstGeom>
+          <a:solidFill>
+            <a:schemeClr val="accent1"/>
+          </a:solidFill>
+          <a:ln/>
+        </p:spPr>
+      </p:sp>
+      <p:sp>
+        <p:nvSpPr>
+          <p:cNvPr id="7" name="Text 5"/>
+          <p:cNvSpPr txBox="1"/>
+          <p:nvPr/>
+        </p:nvSpPr>
+        <p:spPr>
+          <a:xfrm>
+            <a:off x="548640" y="2304288"/>
+            <a:ext cx="502920" cy="502920"/>
+          </a:xfrm>
+          <a:prstGeom prst="rect">
+            <a:avLst/>
+          </a:prstGeom>
+          <a:noFill/>
+          <a:ln/>
+        </p:spPr>
+        <p:txBody>
+          <a:bodyPr wrap="square" lIns="0" tIns="0" rIns="0" bIns="0" rtlCol="0" anchor="ctr"/>
+          <a:lstStyle/>
+          <a:p>
+            <a:pPr algn="ctr" indent="0" marL="0">
+              <a:buNone/>
+            </a:pPr>
+            <a:r>
+              <a:rPr lang="en-US" sz="1600" b="1" dirty="0">
+                <a:solidFill>
+                  <a:schemeClr val="bg1"/>
+                </a:solidFill>
+                <a:latin typeface="Yu Gothic" pitchFamily="34" charset="0"/>
+                <a:ea typeface="Yu Gothic" pitchFamily="34" charset="-122"/>
+                <a:cs typeface="Yu Gothic" pitchFamily="34" charset="-120"/>
+              </a:rPr>
+              <a:t>2</a:t>
+            </a:r>
+            <a:endParaRPr lang="en-US" sz="1600" dirty="0"/>
+          </a:p>
+        </p:txBody>
+      </p:sp>
+      <p:sp>
+        <p:nvSpPr>
+          <p:cNvPr id="8" name="Text 6"/>
+          <p:cNvSpPr txBox="1"/>
+          <p:nvPr/>
+        </p:nvSpPr>
+        <p:spPr>
+          <a:xfrm>
+            <a:off x="1280160" y="2240280"/>
+            <a:ext cx="5669280" cy="640080"/>
+          </a:xfrm>
+          <a:prstGeom prst="rect">
+            <a:avLst/>
+          </a:prstGeom>
+          <a:noFill/>
+          <a:ln/>
+        </p:spPr>
+        <p:txBody>
+          <a:bodyPr wrap="square" lIns="0" tIns="0" rIns="0" bIns="0" rtlCol="0" anchor="ctr"/>
+          <a:lstStyle/>
+          <a:p>
+            <a:pPr indent="0" marL="0">
+              <a:buNone/>
+            </a:pPr>
+            <a:r>
+              <a:rPr lang="en-US" sz="1600" dirty="0">
+                <a:solidFill>
+                  <a:schemeClr val="tx1"/>
+                </a:solidFill>
+                <a:latin typeface="Yu Gothic" pitchFamily="34" charset="0"/>
+                <a:ea typeface="Yu Gothic" pitchFamily="34" charset="-122"/>
+                <a:cs typeface="Yu Gothic" pitchFamily="34" charset="-120"/>
+              </a:rPr>
+              <a:t>AI が、コードとドキュメントを読んで調べる</a:t>
+            </a:r>
+            <a:endParaRPr lang="en-US" sz="1600" dirty="0"/>
+          </a:p>
+        </p:txBody>
+      </p:sp>
+      <p:sp>
+        <p:nvSpPr>
+          <p:cNvPr id="9" name="手順の円 3"/>
+          <p:cNvSpPr/>
+          <p:nvPr/>
+        </p:nvSpPr>
+        <p:spPr>
+          <a:xfrm>
+            <a:off x="548640" y="3081528"/>
+            <a:ext cx="502920" cy="502920"/>
+          </a:xfrm>
+          <a:prstGeom prst="ellipse">
+            <a:avLst/>
+          </a:prstGeom>
+          <a:solidFill>
+            <a:schemeClr val="accent1"/>
+          </a:solidFill>
+          <a:ln/>
+        </p:spPr>
+      </p:sp>
+      <p:sp>
+        <p:nvSpPr>
+          <p:cNvPr id="10" name="Text 8"/>
+          <p:cNvSpPr txBox="1"/>
+          <p:nvPr/>
+        </p:nvSpPr>
+        <p:spPr>
+          <a:xfrm>
+            <a:off x="548640" y="3081528"/>
+            <a:ext cx="502920" cy="502920"/>
+          </a:xfrm>
+          <a:prstGeom prst="rect">
+            <a:avLst/>
+          </a:prstGeom>
+          <a:noFill/>
+          <a:ln/>
+        </p:spPr>
+        <p:txBody>
+          <a:bodyPr wrap="square" lIns="0" tIns="0" rIns="0" bIns="0" rtlCol="0" anchor="ctr"/>
+          <a:lstStyle/>
+          <a:p>
+            <a:pPr algn="ctr" indent="0" marL="0">
+              <a:buNone/>
+            </a:pPr>
+            <a:r>
+              <a:rPr lang="en-US" sz="1600" b="1" dirty="0">
+                <a:solidFill>
+                  <a:schemeClr val="bg1"/>
+                </a:solidFill>
+                <a:latin typeface="Yu Gothic" pitchFamily="34" charset="0"/>
+                <a:ea typeface="Yu Gothic" pitchFamily="34" charset="-122"/>
+                <a:cs typeface="Yu Gothic" pitchFamily="34" charset="-120"/>
+              </a:rPr>
+              <a:t>3</a:t>
+            </a:r>
+            <a:endParaRPr lang="en-US" sz="1600" dirty="0"/>
+          </a:p>
+        </p:txBody>
+      </p:sp>
+      <p:sp>
+        <p:nvSpPr>
+          <p:cNvPr id="11" name="Text 9"/>
+          <p:cNvSpPr txBox="1"/>
+          <p:nvPr/>
+        </p:nvSpPr>
+        <p:spPr>
+          <a:xfrm>
+            <a:off x="1280160" y="3017520"/>
+            <a:ext cx="5669280" cy="640080"/>
+          </a:xfrm>
+          <a:prstGeom prst="rect">
+            <a:avLst/>
+          </a:prstGeom>
+          <a:noFill/>
+          <a:ln/>
+        </p:spPr>
+        <p:txBody>
+          <a:bodyPr wrap="square" lIns="0" tIns="0" rIns="0" bIns="0" rtlCol="0" anchor="ctr"/>
+          <a:lstStyle/>
+          <a:p>
+            <a:pPr indent="0" marL="0">
+              <a:buNone/>
+            </a:pPr>
+            <a:r>
+              <a:rPr lang="en-US" sz="1600" dirty="0">
+                <a:solidFill>
+                  <a:schemeClr val="tx1"/>
+                </a:solidFill>
+                <a:latin typeface="Yu Gothic" pitchFamily="34" charset="0"/>
+                <a:ea typeface="Yu Gothic" pitchFamily="34" charset="-122"/>
+                <a:cs typeface="Yu Gothic" pitchFamily="34" charset="-120"/>
+              </a:rPr>
+              <a:t>小さく実装して、作業環境で動かす</a:t>
+            </a:r>
+            <a:endParaRPr lang="en-US" sz="1600" dirty="0"/>
+          </a:p>
+        </p:txBody>
+      </p:sp>
+      <p:sp>
+        <p:nvSpPr>
+          <p:cNvPr id="12" name="手順の円 4"/>
+          <p:cNvSpPr/>
+          <p:nvPr/>
+        </p:nvSpPr>
+        <p:spPr>
+          <a:xfrm>
+            <a:off x="548640" y="3858768"/>
+            <a:ext cx="502920" cy="502920"/>
+          </a:xfrm>
+          <a:prstGeom prst="ellipse">
+            <a:avLst/>
+          </a:prstGeom>
+          <a:solidFill>
+            <a:schemeClr val="accent1"/>
+          </a:solidFill>
+          <a:ln/>
+        </p:spPr>
+      </p:sp>
+      <p:sp>
+        <p:nvSpPr>
+          <p:cNvPr id="13" name="Text 11"/>
+          <p:cNvSpPr txBox="1"/>
+          <p:nvPr/>
+        </p:nvSpPr>
+        <p:spPr>
+          <a:xfrm>
+            <a:off x="548640" y="3858768"/>
+            <a:ext cx="502920" cy="502920"/>
+          </a:xfrm>
+          <a:prstGeom prst="rect">
+            <a:avLst/>
+          </a:prstGeom>
+          <a:noFill/>
+          <a:ln/>
+        </p:spPr>
+        <p:txBody>
+          <a:bodyPr wrap="square" lIns="0" tIns="0" rIns="0" bIns="0" rtlCol="0" anchor="ctr"/>
+          <a:lstStyle/>
+          <a:p>
+            <a:pPr algn="ctr" indent="0" marL="0">
+              <a:buNone/>
+            </a:pPr>
+            <a:r>
+              <a:rPr lang="en-US" sz="1600" b="1" dirty="0">
+                <a:solidFill>
+                  <a:schemeClr val="bg1"/>
+                </a:solidFill>
+                <a:latin typeface="Yu Gothic" pitchFamily="34" charset="0"/>
+                <a:ea typeface="Yu Gothic" pitchFamily="34" charset="-122"/>
+                <a:cs typeface="Yu Gothic" pitchFamily="34" charset="-120"/>
+              </a:rPr>
+              <a:t>4</a:t>
+            </a:r>
+            <a:endParaRPr lang="en-US" sz="1600" dirty="0"/>
+          </a:p>
+        </p:txBody>
+      </p:sp>
+      <p:sp>
+        <p:nvSpPr>
+          <p:cNvPr id="14" name="Text 12"/>
+          <p:cNvSpPr txBox="1"/>
+          <p:nvPr/>
+        </p:nvSpPr>
+        <p:spPr>
+          <a:xfrm>
+            <a:off x="1280160" y="3794760"/>
+            <a:ext cx="5669280" cy="640080"/>
+          </a:xfrm>
+          <a:prstGeom prst="rect">
+            <a:avLst/>
+          </a:prstGeom>
+          <a:noFill/>
+          <a:ln/>
+        </p:spPr>
+        <p:txBody>
+          <a:bodyPr wrap="square" lIns="0" tIns="0" rIns="0" bIns="0" rtlCol="0" anchor="ctr"/>
+          <a:lstStyle/>
+          <a:p>
+            <a:pPr indent="0" marL="0">
+              <a:buNone/>
+            </a:pPr>
+            <a:r>
+              <a:rPr lang="en-US" sz="1600" dirty="0">
+                <a:solidFill>
+                  <a:schemeClr val="tx1"/>
+                </a:solidFill>
+                <a:latin typeface="Yu Gothic" pitchFamily="34" charset="0"/>
+                <a:ea typeface="Yu Gothic" pitchFamily="34" charset="-122"/>
+                <a:cs typeface="Yu Gothic" pitchFamily="34" charset="-120"/>
+              </a:rPr>
+              <a:t>PC や Actions で、実通信を確認する(出力を貼る)</a:t>
+            </a:r>
+            <a:endParaRPr lang="en-US" sz="1600" dirty="0"/>
+          </a:p>
+        </p:txBody>
+      </p:sp>
+      <p:sp>
+        <p:nvSpPr>
+          <p:cNvPr id="15" name="手順の円 5"/>
+          <p:cNvSpPr/>
+          <p:nvPr/>
+        </p:nvSpPr>
+        <p:spPr>
+          <a:xfrm>
+            <a:off x="548640" y="4636008"/>
+            <a:ext cx="502920" cy="502920"/>
+          </a:xfrm>
+          <a:prstGeom prst="ellipse">
+            <a:avLst/>
+          </a:prstGeom>
+          <a:solidFill>
+            <a:schemeClr val="accent1"/>
+          </a:solidFill>
+          <a:ln/>
+        </p:spPr>
+      </p:sp>
+      <p:sp>
+        <p:nvSpPr>
+          <p:cNvPr id="16" name="Text 14"/>
+          <p:cNvSpPr txBox="1"/>
+          <p:nvPr/>
+        </p:nvSpPr>
+        <p:spPr>
+          <a:xfrm>
+            <a:off x="548640" y="4636008"/>
+            <a:ext cx="502920" cy="502920"/>
+          </a:xfrm>
+          <a:prstGeom prst="rect">
+            <a:avLst/>
+          </a:prstGeom>
+          <a:noFill/>
+          <a:ln/>
+        </p:spPr>
+        <p:txBody>
+          <a:bodyPr wrap="square" lIns="0" tIns="0" rIns="0" bIns="0" rtlCol="0" anchor="ctr"/>
+          <a:lstStyle/>
+          <a:p>
+            <a:pPr algn="ctr" indent="0" marL="0">
+              <a:buNone/>
+            </a:pPr>
+            <a:r>
+              <a:rPr lang="en-US" sz="1600" b="1" dirty="0">
+                <a:solidFill>
+                  <a:schemeClr val="bg1"/>
+                </a:solidFill>
+                <a:latin typeface="Yu Gothic" pitchFamily="34" charset="0"/>
+                <a:ea typeface="Yu Gothic" pitchFamily="34" charset="-122"/>
+                <a:cs typeface="Yu Gothic" pitchFamily="34" charset="-120"/>
+              </a:rPr>
+              <a:t>5</a:t>
+            </a:r>
+            <a:endParaRPr lang="en-US" sz="1600" dirty="0"/>
+          </a:p>
+        </p:txBody>
+      </p:sp>
+      <p:sp>
+        <p:nvSpPr>
+          <p:cNvPr id="17" name="Text 15"/>
+          <p:cNvSpPr txBox="1"/>
+          <p:nvPr/>
+        </p:nvSpPr>
+        <p:spPr>
+          <a:xfrm>
+            <a:off x="1280160" y="4572000"/>
+            <a:ext cx="5669280" cy="640080"/>
+          </a:xfrm>
+          <a:prstGeom prst="rect">
+            <a:avLst/>
+          </a:prstGeom>
+          <a:noFill/>
+          <a:ln/>
+        </p:spPr>
+        <p:txBody>
+          <a:bodyPr wrap="square" lIns="0" tIns="0" rIns="0" bIns="0" rtlCol="0" anchor="ctr"/>
+          <a:lstStyle/>
+          <a:p>
+            <a:pPr indent="0" marL="0">
+              <a:buNone/>
+            </a:pPr>
+            <a:r>
+              <a:rPr lang="en-US" sz="1600" dirty="0">
+                <a:solidFill>
+                  <a:schemeClr val="tx1"/>
+                </a:solidFill>
+                <a:latin typeface="Yu Gothic" pitchFamily="34" charset="0"/>
+                <a:ea typeface="Yu Gothic" pitchFamily="34" charset="-122"/>
+                <a:cs typeface="Yu Gothic" pitchFamily="34" charset="-120"/>
+              </a:rPr>
+              <a:t>AI が出力を読んで、不具合を直す</a:t>
+            </a:r>
+            <a:endParaRPr lang="en-US" sz="1600" dirty="0"/>
+          </a:p>
+        </p:txBody>
+      </p:sp>
+      <p:sp>
+        <p:nvSpPr>
+          <p:cNvPr id="18" name="手順の円 6"/>
+          <p:cNvSpPr/>
+          <p:nvPr/>
+        </p:nvSpPr>
+        <p:spPr>
+          <a:xfrm>
+            <a:off x="548640" y="5413248"/>
+            <a:ext cx="502920" cy="502920"/>
+          </a:xfrm>
+          <a:prstGeom prst="ellipse">
+            <a:avLst/>
+          </a:prstGeom>
+          <a:solidFill>
+            <a:schemeClr val="accent1"/>
+          </a:solidFill>
+          <a:ln/>
+        </p:spPr>
+      </p:sp>
+      <p:sp>
+        <p:nvSpPr>
+          <p:cNvPr id="19" name="Text 17"/>
+          <p:cNvSpPr txBox="1"/>
+          <p:nvPr/>
+        </p:nvSpPr>
+        <p:spPr>
+          <a:xfrm>
+            <a:off x="548640" y="5413248"/>
+            <a:ext cx="502920" cy="502920"/>
+          </a:xfrm>
+          <a:prstGeom prst="rect">
+            <a:avLst/>
+          </a:prstGeom>
+          <a:noFill/>
+          <a:ln/>
+        </p:spPr>
+        <p:txBody>
+          <a:bodyPr wrap="square" lIns="0" tIns="0" rIns="0" bIns="0" rtlCol="0" anchor="ctr"/>
+          <a:lstStyle/>
+          <a:p>
+            <a:pPr algn="ctr" indent="0" marL="0">
+              <a:buNone/>
+            </a:pPr>
+            <a:r>
+              <a:rPr lang="en-US" sz="1600" b="1" dirty="0">
+                <a:solidFill>
+                  <a:schemeClr val="bg1"/>
+                </a:solidFill>
+                <a:latin typeface="Yu Gothic" pitchFamily="34" charset="0"/>
+                <a:ea typeface="Yu Gothic" pitchFamily="34" charset="-122"/>
+                <a:cs typeface="Yu Gothic" pitchFamily="34" charset="-120"/>
+              </a:rPr>
+              <a:t>6</a:t>
+            </a:r>
+            <a:endParaRPr lang="en-US" sz="1600" dirty="0"/>
+          </a:p>
+        </p:txBody>
+      </p:sp>
+      <p:sp>
+        <p:nvSpPr>
+          <p:cNvPr id="20" name="Text 18"/>
+          <p:cNvSpPr txBox="1"/>
+          <p:nvPr/>
+        </p:nvSpPr>
+        <p:spPr>
+          <a:xfrm>
+            <a:off x="1280160" y="5349240"/>
+            <a:ext cx="5669280" cy="640080"/>
+          </a:xfrm>
+          <a:prstGeom prst="rect">
+            <a:avLst/>
+          </a:prstGeom>
+          <a:noFill/>
+          <a:ln/>
+        </p:spPr>
+        <p:txBody>
+          <a:bodyPr wrap="square" lIns="0" tIns="0" rIns="0" bIns="0" rtlCol="0" anchor="ctr"/>
+          <a:lstStyle/>
+          <a:p>
+            <a:pPr indent="0" marL="0">
+              <a:buNone/>
+            </a:pPr>
+            <a:r>
+              <a:rPr lang="en-US" sz="1600" dirty="0">
+                <a:solidFill>
+                  <a:schemeClr val="tx1"/>
+                </a:solidFill>
+                <a:latin typeface="Yu Gothic" pitchFamily="34" charset="0"/>
+                <a:ea typeface="Yu Gothic" pitchFamily="34" charset="-122"/>
+                <a:cs typeface="Yu Gothic" pitchFamily="34" charset="-120"/>
+              </a:rPr>
+              <a:t>確認できたことと未確認を、ノートと PR に残す</a:t>
+            </a:r>
+            <a:endParaRPr lang="en-US" sz="1600" dirty="0"/>
+          </a:p>
+        </p:txBody>
+      </p:sp>
+      <p:sp>
+        <p:nvSpPr>
+          <p:cNvPr id="21" name="コツのカード"/>
+          <p:cNvSpPr/>
+          <p:nvPr/>
+        </p:nvSpPr>
+        <p:spPr>
+          <a:xfrm>
+            <a:off x="7315200" y="1463040"/>
+            <a:ext cx="4297680" cy="4572000"/>
+          </a:xfrm>
+          <a:prstGeom prst="roundRect">
+            <a:avLst>
+              <a:gd name="adj" fmla="val 2553"/>
+            </a:avLst>
+          </a:prstGeom>
+          <a:solidFill>
+            <a:schemeClr val="bg2"/>
+          </a:solidFill>
+          <a:ln/>
+        </p:spPr>
+      </p:sp>
+      <p:sp>
+        <p:nvSpPr>
+          <p:cNvPr id="22" name="コツ 円"/>
+          <p:cNvSpPr/>
+          <p:nvPr/>
+        </p:nvSpPr>
+        <p:spPr>
+          <a:xfrm>
+            <a:off x="7635240" y="1737360"/>
+            <a:ext cx="685800" cy="685800"/>
+          </a:xfrm>
+          <a:prstGeom prst="ellipse">
+            <a:avLst/>
+          </a:prstGeom>
+          <a:solidFill>
+            <a:schemeClr val="accent2"/>
+          </a:solidFill>
+          <a:ln/>
+        </p:spPr>
+      </p:sp>
+      <p:pic>
+        <p:nvPicPr>
+          <p:cNvPr id="23" name="Image 0" descr="コツ">    </p:cNvPr>
+          <p:cNvPicPr>
+            <a:picLocks noChangeAspect="1"/>
+          </p:cNvPicPr>
+          <p:nvPr/>
+        </p:nvPicPr>
+        <p:blipFill>
+          <a:blip r:embed="rId1"/>
+          <a:stretch>
+            <a:fillRect/>
+          </a:stretch>
+        </p:blipFill>
+        <p:spPr>
+          <a:xfrm>
+            <a:off x="7806690" y="1908810"/>
+            <a:ext cx="342900" cy="342900"/>
+          </a:xfrm>
+          <a:prstGeom prst="rect">
+            <a:avLst/>
+          </a:prstGeom>
+        </p:spPr>
+      </p:pic>
+      <p:sp>
+        <p:nvSpPr>
+          <p:cNvPr id="24" name="Text 21"/>
+          <p:cNvSpPr txBox="1"/>
+          <p:nvPr/>
+        </p:nvSpPr>
+        <p:spPr>
+          <a:xfrm>
+            <a:off x="8503920" y="1737360"/>
+            <a:ext cx="2926080" cy="685800"/>
+          </a:xfrm>
+          <a:prstGeom prst="rect">
+            <a:avLst/>
+          </a:prstGeom>
+          <a:noFill/>
+          <a:ln/>
+        </p:spPr>
+        <p:txBody>
+          <a:bodyPr wrap="square" lIns="0" tIns="0" rIns="0" bIns="0" rtlCol="0" anchor="ctr"/>
+          <a:lstStyle/>
+          <a:p>
+            <a:pPr indent="0" marL="0">
+              <a:buNone/>
+            </a:pPr>
+            <a:r>
+              <a:rPr lang="en-US" sz="2200" b="1" dirty="0">
+                <a:solidFill>
+                  <a:schemeClr val="tx2"/>
+                </a:solidFill>
+                <a:latin typeface="Yu Gothic" pitchFamily="34" charset="0"/>
+                <a:ea typeface="Yu Gothic" pitchFamily="34" charset="-122"/>
+                <a:cs typeface="Yu Gothic" pitchFamily="34" charset="-120"/>
+              </a:rPr>
+              <a:t>コツ</a:t>
+            </a:r>
+            <a:endParaRPr lang="en-US" sz="2200" dirty="0"/>
+          </a:p>
+        </p:txBody>
+      </p:sp>
+      <p:sp>
+        <p:nvSpPr>
+          <p:cNvPr id="25" name="Text 22"/>
+          <p:cNvSpPr txBox="1"/>
+          <p:nvPr/>
+        </p:nvSpPr>
+        <p:spPr>
+          <a:xfrm>
+            <a:off x="7635240" y="2743200"/>
+            <a:ext cx="3657600" cy="3108960"/>
+          </a:xfrm>
+          <a:prstGeom prst="rect">
+            <a:avLst/>
+          </a:prstGeom>
+          <a:noFill/>
+          <a:ln/>
+        </p:spPr>
+        <p:txBody>
+          <a:bodyPr wrap="square" lIns="0" tIns="0" rIns="0" bIns="0" rtlCol="0" anchor="t"/>
+          <a:lstStyle/>
+          <a:p>
+            <a:pPr marL="342900" indent="-342900">
+              <a:spcAft>
+                <a:spcPts val="1400"/>
+              </a:spcAft>
+              <a:buSzPct val="100000"/>
+              <a:buChar char="•"/>
+            </a:pPr>
+            <a:r>
+              <a:rPr lang="en-US" sz="1800" dirty="0">
+                <a:solidFill>
+                  <a:schemeClr val="tx1"/>
+                </a:solidFill>
+                <a:latin typeface="Yu Gothic" pitchFamily="34" charset="0"/>
+                <a:ea typeface="Yu Gothic" pitchFamily="34" charset="-122"/>
+                <a:cs typeface="Yu Gothic" pitchFamily="34" charset="-120"/>
+              </a:rPr>
+              <a:t>出力は、省略せずに貼る</a:t>
+            </a:r>
+            <a:endParaRPr lang="en-US" sz="1800" dirty="0"/>
+          </a:p>
+          <a:p>
+            <a:pPr marL="342900" indent="-342900">
+              <a:spcAft>
+                <a:spcPts val="1400"/>
+              </a:spcAft>
+              <a:buSzPct val="100000"/>
+              <a:buChar char="•"/>
+            </a:pPr>
+            <a:r>
+              <a:rPr lang="en-US" sz="1800" dirty="0">
+                <a:solidFill>
+                  <a:schemeClr val="tx1"/>
+                </a:solidFill>
+                <a:latin typeface="Yu Gothic" pitchFamily="34" charset="0"/>
+                <a:ea typeface="Yu Gothic" pitchFamily="34" charset="-122"/>
+                <a:cs typeface="Yu Gothic" pitchFamily="34" charset="-120"/>
+              </a:rPr>
+              <a:t>どこで実行するか(Windows か WSL か)を、コマンドごとに明記してもらう</a:t>
+            </a:r>
+            <a:endParaRPr lang="en-US" sz="1800" dirty="0"/>
+          </a:p>
+          <a:p>
+            <a:pPr marL="342900" indent="-342900">
+              <a:spcAft>
+                <a:spcPts val="1400"/>
+              </a:spcAft>
+              <a:buSzPct val="100000"/>
+              <a:buChar char="•"/>
+            </a:pPr>
+            <a:r>
+              <a:rPr lang="en-US" sz="1800" dirty="0">
+                <a:solidFill>
+                  <a:schemeClr val="tx1"/>
+                </a:solidFill>
+                <a:latin typeface="Yu Gothic" pitchFamily="34" charset="0"/>
+                <a:ea typeface="Yu Gothic" pitchFamily="34" charset="-122"/>
+                <a:cs typeface="Yu Gothic" pitchFamily="34" charset="-120"/>
+              </a:rPr>
+              <a:t>AI の説明が、推測か確認済みかを聞く</a:t>
+            </a:r>
+            <a:endParaRPr lang="en-US" sz="1800" dirty="0"/>
+          </a:p>
+        </p:txBody>
+      </p:sp>
+      <p:sp>
+        <p:nvSpPr>
+          <p:cNvPr id="25" name="Slide Number Placeholder 0"/>
+          <p:cNvSpPr>
+            <a:spLocks noGrp="1"/>
+          </p:cNvSpPr>
+          <p:nvPr>
+            <p:ph type="sldNum" sz="quarter" idx="4294967295"/>
+          </p:nvPr>
+        </p:nvSpPr>
+        <p:spPr>
+          <a:xfrm>
+            <a:off x="10972800" y="6355080"/>
+            <a:ext cx="640080" cy="274320"/>
+          </a:xfrm>
+          <a:prstGeom prst="rect">
+            <a:avLst/>
+          </a:prstGeom>
+          <a:extLst>
+            <a:ext uri="{C572A759-6A51-4108-AA02-DFA0A04FC94B}">
+              <ma14:wrappingTextBoxFlag xmlns:ma14="http://schemas.microsoft.com/office/mac/drawingml/2011/main" val="0"/>
+            </a:ext>
+          </a:extLst>
+        </p:spPr>
+        <p:txBody>
+          <a:bodyPr/>
+          <a:lstStyle>
+            <a:lvl1pPr>
+              <a:defRPr sz="1100">
+                <a:solidFill>
+                  <a:schemeClr val="accent3"/>
+                </a:solidFill>
+              </a:defRPr>
+            </a:lvl1pPr>
+          </a:lstStyle>
+          <a:p>
+            <a:pPr algn="r"/>
+            <a:fld id="{F7021451-1387-4CA6-816F-3879F97B5CBC}" type="slidenum">
+              <a:rPr b="0" lang="en-US"/>
+              <a:t>11</a:t>
+            </a:fld>
+            <a:endParaRPr lang="en-US"/>
+          </a:p>
+        </p:txBody>
+      </p:sp>
+    </p:spTree>
+  </p:cSld>
+  <p:clrMapOvr>
+    <a:masterClrMapping/>
+  </p:clrMapOvr>
+</p:sld>
+</file>
+
+<file path=ppt/slides/slide12.xml><?xml version="1.0" encoding="utf-8"?>
+<p:sld xmlns:a="http://schemas.openxmlformats.org/drawingml/2006/main" xmlns:r="http://schemas.openxmlformats.org/officeDocument/2006/relationships" xmlns:p="http://schemas.openxmlformats.org/presentationml/2006/main">
+  <p:cSld name="Slide 12">
     <p:spTree>
       <p:nvGrpSpPr>
         <p:cNvPr id="1" name=""/>

--- a/docs/ai-built-tools-process.pptx
+++ b/docs/ai-built-tools-process.pptx
@@ -118,13 +118,13 @@
   <p:extLst>
     <p:ext uri="{521415D9-36F7-43E2-AB2F-B90AF26B5E84}">
       <p14:sectionLst xmlns:p14="http://schemas.microsoft.com/office/powerpoint/2010/main">
-        <p14:section name="導入" id="{7aa4da58-d2fb-b780-278f-2f0d0f3d5637}">
+        <p14:section name="導入" id="{89e20783-72d3-f5d4-bc0f-c27513f599c9}">
           <p14:sldIdLst>
             <p14:sldId id="256"/>
             <p14:sldId id="257"/>
           </p14:sldIdLst>
         </p14:section>
-        <p14:section name="工程" id="{1f29aff3-4ce0-67bf-e0f7-dccd1ecb27b5}">
+        <p14:section name="工程" id="{dc529dbe-ad5a-93e6-9fa5-caec60754983}">
           <p14:sldIdLst>
             <p14:sldId id="258"/>
             <p14:sldId id="259"/>
@@ -133,13 +133,13 @@
             <p14:sldId id="262"/>
           </p14:sldIdLst>
         </p14:section>
-        <p14:section name="結果" id="{3cb6d174-2361-a0e1-4874-ae81545120d3}">
+        <p14:section name="結果" id="{617b85e4-7146-1b76-b566-e017745a57d6}">
           <p14:sldIdLst>
             <p14:sldId id="263"/>
             <p14:sldId id="264"/>
           </p14:sldIdLst>
         </p14:section>
-        <p14:section name="まとめ" id="{10b2a5df-ba97-6af7-77a7-68993449cd44}">
+        <p14:section name="まとめ" id="{68fd5873-454d-2d9a-e562-78985002ad68}">
           <p14:sldIdLst>
             <p14:sldId id="265"/>
             <p14:sldId id="266"/>
@@ -181,7 +181,7 @@
                 </a:solidFill>
                 <a:latin typeface="+mn-lt"/>
               </a:rPr>
-              <a:t>同じモデル(3B)・同じコードでの比較</a:t>
+              <a:t>同じモデル(3B)・同じコード、独立した 5 回</a:t>
             </a:r>
           </a:p>
         </c:rich>
@@ -243,18 +243,27 @@
           </c:dLbls>
           <c:cat>
             <c:multiLvlStrRef>
-              <c:f>Sheet1!$A$2:$A$4</c:f>
+              <c:f>Sheet1!$A$2:$A$7</c:f>
               <c:multiLvlStrCache>
-                <c:ptCount val="3"/>
+                <c:ptCount val="6"/>
                 <c:lvl>
                   <c:pt idx="0">
                     <c:v>ルールだけ</c:v>
                   </c:pt>
                   <c:pt idx="1">
-                    <c:v>AI あり 1 回目</c:v>
+                    <c:v>AI 1 回目</c:v>
                   </c:pt>
                   <c:pt idx="2">
-                    <c:v>AI あり 2 回目</c:v>
+                    <c:v>AI 2 回目</c:v>
+                  </c:pt>
+                  <c:pt idx="3">
+                    <c:v>AI 3 回目</c:v>
+                  </c:pt>
+                  <c:pt idx="4">
+                    <c:v>AI 4 回目</c:v>
+                  </c:pt>
+                  <c:pt idx="5">
+                    <c:v>AI 5 回目</c:v>
                   </c:pt>
                 </c:lvl>
               </c:multiLvlStrCache>
@@ -262,18 +271,27 @@
           </c:cat>
           <c:val>
             <c:numRef>
-              <c:f>Sheet1!$B$2:$B$4</c:f>
+              <c:f>Sheet1!$B$2:$B$7</c:f>
               <c:numCache>
                 <c:formatCode>General</c:formatCode>
-                <c:ptCount val="3"/>
+                <c:ptCount val="6"/>
                 <c:pt idx="0">
                   <c:v>5</c:v>
                 </c:pt>
                 <c:pt idx="1">
+                  <c:v>3</c:v>
+                </c:pt>
+                <c:pt idx="2">
                   <c:v>6</c:v>
                 </c:pt>
-                <c:pt idx="2">
-                  <c:v>5</c:v>
+                <c:pt idx="3">
+                  <c:v>4</c:v>
+                </c:pt>
+                <c:pt idx="4">
+                  <c:v>6</c:v>
+                </c:pt>
+                <c:pt idx="5">
+                  <c:v>6</c:v>
                 </c:pt>
               </c:numCache>
             </c:numRef>
@@ -326,18 +344,27 @@
           </c:dLbls>
           <c:cat>
             <c:multiLvlStrRef>
-              <c:f>Sheet1!$A$2:$A$4</c:f>
+              <c:f>Sheet1!$A$2:$A$7</c:f>
               <c:multiLvlStrCache>
-                <c:ptCount val="3"/>
+                <c:ptCount val="6"/>
                 <c:lvl>
                   <c:pt idx="0">
                     <c:v>ルールだけ</c:v>
                   </c:pt>
                   <c:pt idx="1">
-                    <c:v>AI あり 1 回目</c:v>
+                    <c:v>AI 1 回目</c:v>
                   </c:pt>
                   <c:pt idx="2">
-                    <c:v>AI あり 2 回目</c:v>
+                    <c:v>AI 2 回目</c:v>
+                  </c:pt>
+                  <c:pt idx="3">
+                    <c:v>AI 3 回目</c:v>
+                  </c:pt>
+                  <c:pt idx="4">
+                    <c:v>AI 4 回目</c:v>
+                  </c:pt>
+                  <c:pt idx="5">
+                    <c:v>AI 5 回目</c:v>
                   </c:pt>
                 </c:lvl>
               </c:multiLvlStrCache>
@@ -345,17 +372,26 @@
           </c:cat>
           <c:val>
             <c:numRef>
-              <c:f>Sheet1!$C$2:$C$4</c:f>
+              <c:f>Sheet1!$C$2:$C$7</c:f>
               <c:numCache>
                 <c:formatCode>General</c:formatCode>
-                <c:ptCount val="3"/>
+                <c:ptCount val="6"/>
                 <c:pt idx="0">
                   <c:v>2</c:v>
                 </c:pt>
                 <c:pt idx="1">
+                  <c:v>2</c:v>
+                </c:pt>
+                <c:pt idx="2">
+                  <c:v>2</c:v>
+                </c:pt>
+                <c:pt idx="3">
                   <c:v>1</c:v>
                 </c:pt>
-                <c:pt idx="2">
+                <c:pt idx="4">
+                  <c:v>2</c:v>
+                </c:pt>
+                <c:pt idx="5">
                   <c:v>2</c:v>
                 </c:pt>
               </c:numCache>
@@ -386,7 +422,7 @@
           <c:showBubbleSize val="0"/>
           <c:showLeaderLines val="0"/>
         </c:dLbls>
-        <c:gapWidth val="60"/>
+        <c:gapWidth val="50"/>
         <c:overlap val="0"/>
         <c:axId val="2094734554"/>
         <c:axId val="2094734552"/>
@@ -417,7 +453,7 @@
           <a:lstStyle/>
           <a:p>
             <a:pPr>
-              <a:defRPr sz="1400" b="0" i="0" u="none" strike="noStrike">
+              <a:defRPr sz="1300" b="0" i="0" u="none" strike="noStrike">
                 <a:solidFill>
                   <a:srgbClr val="1B2B34"/>
                 </a:solidFill>
@@ -1893,7 +1929,7 @@
           <a:p>
             <a:r>
               <a:rPr lang="en-US" dirty="0"/>
-              <a:t>同じモデル、同じコードで、2 回実行しました。結果が変わっています。打ち消されたのは、/file のパストラバーサルです。1 回の結果で、AI を使うほうが良いとは言えません。5 回の実行は、集計中です。</a:t>
+              <a:t>キャッシュを消して、独立して 5 回実行した結果です。検出は 3 から 6 まで変わりました。平均は 5.0 で、ルールだけの 5 と同じです。AI が本物の脆弱性を打ち消した回が、OS コマンドインジェクションとパストラバーサルで、それぞれ 5 回中 2 回ありました。最初の試験では、LLM の応答のキャッシュで、2 回目以降が 1 回目の再利用になっていて、独立した実行になっていませんでした。それを直して、やり直した結果です。</a:t>
             </a:r>
             <a:endParaRPr lang="en-US" dirty="0"/>
           </a:p>
@@ -11531,7 +11567,7 @@
         </p:nvGraphicFramePr>
         <p:xfrm>
           <a:off x="548640" y="1371600"/>
-          <a:ext cx="6766560" cy="4754880"/>
+          <a:ext cx="7040880" cy="4754880"/>
         </p:xfrm>
         <a:graphic xmlns:a="http://schemas.openxmlformats.org/drawingml/2006/main">
           <a:graphicData uri="http://schemas.openxmlformats.org/drawingml/2006/chart">
@@ -11547,12 +11583,12 @@
         </p:nvSpPr>
         <p:spPr>
           <a:xfrm>
-            <a:off x="7589520" y="1371600"/>
-            <a:ext cx="4023360" cy="2011680"/>
+            <a:off x="7863840" y="1371600"/>
+            <a:ext cx="3749040" cy="2148840"/>
           </a:xfrm>
           <a:prstGeom prst="roundRect">
             <a:avLst>
-              <a:gd name="adj" fmla="val 5455"/>
+              <a:gd name="adj" fmla="val 5106"/>
             </a:avLst>
           </a:prstGeom>
           <a:solidFill>
@@ -11569,8 +11605,8 @@
         </p:nvSpPr>
         <p:spPr>
           <a:xfrm>
-            <a:off x="7818120" y="1554480"/>
-            <a:ext cx="3566160" cy="1691640"/>
+            <a:off x="8092440" y="1508760"/>
+            <a:ext cx="3291840" cy="1920240"/>
           </a:xfrm>
           <a:prstGeom prst="rect">
             <a:avLst/>
@@ -11586,7 +11622,7 @@
               <a:buNone/>
             </a:pPr>
             <a:r>
-              <a:rPr lang="en-US" sz="1800" dirty="0">
+              <a:rPr lang="en-US" sz="1600" dirty="0">
                 <a:solidFill>
                   <a:schemeClr val="tx1"/>
                 </a:solidFill>
@@ -11594,9 +11630,9 @@
                 <a:ea typeface="Yu Gothic" pitchFamily="34" charset="-122"/>
                 <a:cs typeface="Yu Gothic" pitchFamily="34" charset="-120"/>
               </a:rPr>
-              <a:t>2 回目は、AI が本物の脆弱性を「誤検知」と判定して、打ち消した</a:t>
-            </a:r>
-            <a:endParaRPr lang="en-US" sz="1800" dirty="0"/>
+              <a:t>5 回中 2 回、AI が本物の脆弱性(OS コマンドインジェクションとパストラバーサル)を「誤検知」として打ち消した</a:t>
+            </a:r>
+            <a:endParaRPr lang="en-US" sz="1600" dirty="0"/>
           </a:p>
         </p:txBody>
       </p:sp>
@@ -11608,12 +11644,12 @@
         </p:nvSpPr>
         <p:spPr>
           <a:xfrm>
-            <a:off x="7589520" y="3611880"/>
-            <a:ext cx="4023360" cy="1188720"/>
+            <a:off x="7863840" y="3703320"/>
+            <a:ext cx="3749040" cy="1143000"/>
           </a:xfrm>
           <a:prstGeom prst="roundRect">
             <a:avLst>
-              <a:gd name="adj" fmla="val 9231"/>
+              <a:gd name="adj" fmla="val 9600"/>
             </a:avLst>
           </a:prstGeom>
           <a:solidFill>
@@ -11630,8 +11666,8 @@
         </p:nvSpPr>
         <p:spPr>
           <a:xfrm>
-            <a:off x="7818120" y="3611880"/>
-            <a:ext cx="3566160" cy="1188720"/>
+            <a:off x="8092440" y="3703320"/>
+            <a:ext cx="3291840" cy="1143000"/>
           </a:xfrm>
           <a:prstGeom prst="rect">
             <a:avLst/>
@@ -11669,8 +11705,8 @@
         </p:nvSpPr>
         <p:spPr>
           <a:xfrm>
-            <a:off x="7589520" y="5029200"/>
-            <a:ext cx="4023360" cy="1005840"/>
+            <a:off x="7863840" y="5029200"/>
+            <a:ext cx="3749040" cy="1005840"/>
           </a:xfrm>
           <a:prstGeom prst="rect">
             <a:avLst/>
@@ -11694,7 +11730,7 @@
                 <a:ea typeface="Yu Gothic" pitchFamily="34" charset="-122"/>
                 <a:cs typeface="Yu Gothic" pitchFamily="34" charset="-120"/>
               </a:rPr>
-              <a:t>1 つのモデル、1 つのアプリの結果。5 回の実行は集計中</a:t>
+              <a:t>検出の平均は 5.0 で、ルールだけと同じ。1 つのモデル、1 つのアプリの結果</a:t>
             </a:r>
             <a:endParaRPr lang="en-US" sz="1400" dirty="0"/>
           </a:p>

--- a/docs/ai-built-tools-process.pptx
+++ b/docs/ai-built-tools-process.pptx
@@ -1489,7 +1489,7 @@
           <a:p>
             <a:r>
               <a:rPr lang="en-US" dirty="0"/>
-              <a:t>クラウドからは OSV や GitHub の API に届きません。そこで、モックで確かめたあと、PC か Actions で実通信を確かめる 2 段構えにしました。</a:t>
+              <a:t>OSV = Open Source Vulnerabilities(osv.dev、Googleが運営するOSSの脆弱性データベース)。クラウドからは OSV や GitHub の API に届きません。そこで、モックで確かめたあと、PC か Actions で実通信を確かめる 2 段構えにしました。</a:t>
             </a:r>
             <a:endParaRPr lang="en-US" dirty="0"/>
           </a:p>
@@ -7401,7 +7401,7 @@
                 <a:ea typeface="Yu Gothic" pitchFamily="34" charset="-122"/>
                 <a:cs typeface="Yu Gothic" pitchFamily="34" charset="-120"/>
               </a:rPr>
-              <a:t>実通信(OSV、GitHub)、Ollama</a:t>
+              <a:t>実通信(OSV=Open Source Vulnerabilities、GitHub)、Ollama</a:t>
             </a:r>
             <a:endParaRPr lang="en-US" sz="1400" dirty="0"/>
           </a:p>

--- a/docs/ai-built-tools-process.pptx
+++ b/docs/ai-built-tools-process.pptx
@@ -1577,7 +1577,7 @@
           <a:p>
             <a:r>
               <a:rPr lang="en-US" dirty="0"/>
-              <a:t>このセッションの作業の大部分は、クラウドの Ubuntu の作業環境で行いました。apt で dotnet を入れ、uv・poetry・go と合わせて、本物のロックファイルを作れました。一方、外部 API には届かないので、通信を拒否されたときの動作(終了コード 2)を、わざと確認しました。pkill -f が自分のシェルを止めた、import os の抜けに気づいた、といった不具合も、ここで見つかりました。</a:t>
+              <a:t>このセッションの作業の大部分は、クラウドの Ubuntu の作業環境で行いました。apt で dotnet を入れ、uv・poetry・go と合わせて、本物のロックファイルを作れました。一方、外部 API には届かないので、通信を拒否されたときの動作(終了コード 2)を、わざと確認しました。pkill -f が自分のシェルを止めた、import os の抜けに気づいた、といった不具合も、ここで見つかりました。 uv・poetry・go・dotnet はUbuntu固有のコマンドではなく、この環境にapt/pip経由で入れたクロスプラットフォームのパッケージ管理ツールです。さらに、自分自身が動いているこの環境自体(Ubuntu 24.04のユーザーランド + 独自ビルドのカーネル、Firecracker microVM由来)も、他の対象と同じやり方でuname/os-releaseを確認しました。</a:t>
             </a:r>
             <a:endParaRPr lang="en-US" dirty="0"/>
           </a:p>
@@ -7924,7 +7924,7 @@
         <p:spPr>
           <a:xfrm>
             <a:off x="548640" y="1463040"/>
-            <a:ext cx="6949440" cy="4572000"/>
+            <a:ext cx="6949440" cy="4736960"/>
           </a:xfrm>
           <a:prstGeom prst="roundRect">
             <a:avLst>
@@ -8067,7 +8067,7 @@
         </p:nvSpPr>
         <p:spPr>
           <a:xfrm>
-            <a:off x="868680" y="3108960"/>
+            <a:off x="868680" y="2977440"/>
             <a:ext cx="457200" cy="457200"/>
           </a:xfrm>
           <a:prstGeom prst="ellipse">
@@ -8095,7 +8095,7 @@
         </p:blipFill>
         <p:spPr>
           <a:xfrm>
-            <a:off x="982980" y="3223260"/>
+            <a:off x="982980" y="3091740"/>
             <a:ext cx="228600" cy="228600"/>
           </a:xfrm>
           <a:prstGeom prst="rect">
@@ -8111,7 +8111,7 @@
         </p:nvSpPr>
         <p:spPr>
           <a:xfrm>
-            <a:off x="1554480" y="3063240"/>
+            <a:off x="1554480" y="2931720"/>
             <a:ext cx="5669280" cy="594360"/>
           </a:xfrm>
           <a:prstGeom prst="rect">
@@ -8150,7 +8150,7 @@
         </p:nvSpPr>
         <p:spPr>
           <a:xfrm>
-            <a:off x="868680" y="3840480"/>
+            <a:off x="868680" y="3577440"/>
             <a:ext cx="457200" cy="457200"/>
           </a:xfrm>
           <a:prstGeom prst="ellipse">
@@ -8178,7 +8178,7 @@
         </p:blipFill>
         <p:spPr>
           <a:xfrm>
-            <a:off x="982980" y="3954780"/>
+            <a:off x="982980" y="3691740"/>
             <a:ext cx="228600" cy="228600"/>
           </a:xfrm>
           <a:prstGeom prst="rect">
@@ -8194,7 +8194,7 @@
         </p:nvSpPr>
         <p:spPr>
           <a:xfrm>
-            <a:off x="1554480" y="3794760"/>
+            <a:off x="1554480" y="3531720"/>
             <a:ext cx="5669280" cy="594360"/>
           </a:xfrm>
           <a:prstGeom prst="rect">
@@ -8233,7 +8233,7 @@
         </p:nvSpPr>
         <p:spPr>
           <a:xfrm>
-            <a:off x="868680" y="4572000"/>
+            <a:off x="868680" y="4177440"/>
             <a:ext cx="457200" cy="457200"/>
           </a:xfrm>
           <a:prstGeom prst="ellipse">
@@ -8261,7 +8261,7 @@
         </p:blipFill>
         <p:spPr>
           <a:xfrm>
-            <a:off x="982980" y="4686300"/>
+            <a:off x="982980" y="4291740"/>
             <a:ext cx="228600" cy="228600"/>
           </a:xfrm>
           <a:prstGeom prst="rect">
@@ -8277,7 +8277,7 @@
         </p:nvSpPr>
         <p:spPr>
           <a:xfrm>
-            <a:off x="1554480" y="4526280"/>
+            <a:off x="1554480" y="4131720"/>
             <a:ext cx="5669280" cy="594360"/>
           </a:xfrm>
           <a:prstGeom prst="rect">
@@ -8316,7 +8316,7 @@
         </p:nvSpPr>
         <p:spPr>
           <a:xfrm>
-            <a:off x="868680" y="5303520"/>
+            <a:off x="868680" y="4777440"/>
             <a:ext cx="457200" cy="457200"/>
           </a:xfrm>
           <a:prstGeom prst="ellipse">
@@ -8344,7 +8344,7 @@
         </p:blipFill>
         <p:spPr>
           <a:xfrm>
-            <a:off x="982980" y="5417820"/>
+            <a:off x="982980" y="4891740"/>
             <a:ext cx="228600" cy="228600"/>
           </a:xfrm>
           <a:prstGeom prst="rect">
@@ -8360,7 +8360,7 @@
         </p:nvSpPr>
         <p:spPr>
           <a:xfrm>
-            <a:off x="1554480" y="5257800"/>
+            <a:off x="1554480" y="4731720"/>
             <a:ext cx="5669280" cy="594360"/>
           </a:xfrm>
           <a:prstGeom prst="rect">
@@ -8386,6 +8386,89 @@
                 <a:cs typeface="Yu Gothic" pitchFamily="34" charset="-120"/>
               </a:rPr>
               <a:t>ワークフローのシェルを、3 通りで実行</a:t>
+            </a:r>
+            <a:endParaRPr lang="en-US" sz="1600" dirty="0"/>
+          </a:p>
+        </p:txBody>
+      </p:sp>
+      <p:sp>
+        <p:nvSpPr>
+          <p:cNvPr id="101" name="できたこと 6 円"/>
+          <p:cNvSpPr/>
+          <p:nvPr/>
+        </p:nvSpPr>
+        <p:spPr>
+          <a:xfrm>
+            <a:off x="868680" y="5377440"/>
+            <a:ext cx="457200" cy="457200"/>
+          </a:xfrm>
+          <a:prstGeom prst="ellipse">
+            <a:avLst/>
+          </a:prstGeom>
+          <a:solidFill>
+            <a:schemeClr val="accent1"/>
+          </a:solidFill>
+          <a:ln/>
+        </p:spPr>
+      </p:sp>
+      <p:pic>
+        <p:nvPicPr>
+          <p:cNvPr id="102" name="Image 6" descr="できたこと 6">    </p:cNvPr>
+          <p:cNvPicPr>
+            <a:picLocks noChangeAspect="1"/>
+          </p:cNvPicPr>
+          <p:nvPr/>
+        </p:nvPicPr>
+        <p:blipFill>
+          <a:blip r:embed="rId1"/>
+          <a:stretch>
+            <a:fillRect/>
+          </a:stretch>
+        </p:blipFill>
+        <p:spPr>
+          <a:xfrm>
+            <a:off x="982980" y="5491740"/>
+            <a:ext cx="228600" cy="228600"/>
+          </a:xfrm>
+          <a:prstGeom prst="rect">
+            <a:avLst/>
+          </a:prstGeom>
+        </p:spPr>
+      </p:pic>
+      <p:sp>
+        <p:nvSpPr>
+          <p:cNvPr id="103" name="Text 20"/>
+          <p:cNvSpPr txBox="1"/>
+          <p:nvPr/>
+        </p:nvSpPr>
+        <p:spPr>
+          <a:xfrm>
+            <a:off x="1554480" y="5331720"/>
+            <a:ext cx="5669280" cy="594360"/>
+          </a:xfrm>
+          <a:prstGeom prst="rect">
+            <a:avLst/>
+          </a:prstGeom>
+          <a:noFill/>
+          <a:ln/>
+        </p:spPr>
+        <p:txBody>
+          <a:bodyPr wrap="square" lIns="0" tIns="0" rIns="0" bIns="0" rtlCol="0" anchor="ctr"/>
+          <a:lstStyle/>
+          <a:p>
+            <a:pPr indent="0" marL="0">
+              <a:buNone/>
+            </a:pPr>
+            <a:r>
+              <a:rPr lang="en-US" sz="1600" dirty="0">
+                <a:solidFill>
+                  <a:schemeClr val="tx1"/>
+                </a:solidFill>
+                <a:latin typeface="Yu Gothic" pitchFamily="34" charset="0"/>
+                <a:ea typeface="Yu Gothic" pitchFamily="34" charset="-122"/>
+                <a:cs typeface="Yu Gothic" pitchFamily="34" charset="-120"/>
+              </a:rPr>
+              <a:t>自分自身の実行環境も確認(Ubuntu + 独自カーネル)</a:t>
             </a:r>
             <a:endParaRPr lang="en-US" sz="1600" dirty="0"/>
           </a:p>
@@ -8400,7 +8483,7 @@
         <p:spPr>
           <a:xfrm>
             <a:off x="7772400" y="1463040"/>
-            <a:ext cx="3840480" cy="4572000"/>
+            <a:ext cx="3840480" cy="4736960"/>
           </a:xfrm>
           <a:prstGeom prst="roundRect">
             <a:avLst>
